--- a/data-eng/decks/w5d4s4.pptx
+++ b/data-eng/decks/w5d4s4.pptx
@@ -15,6 +15,7 @@
     <p:sldId id="263" r:id="rId14"/>
     <p:sldId id="264" r:id="rId15"/>
     <p:sldId id="265" r:id="rId16"/>
+    <p:sldId id="266" r:id="rId17"/>
   </p:sldIdLst>
   <p:sldSz cx="18288000" cy="10287000" type="screen4x3"/>
   <p:notesSz cx="6858000" cy="9144000"/>
@@ -3099,7 +3100,7 @@
       <p:grpSpPr/>
       <p:sp>
         <p:nvSpPr>
-          <p:cNvPr id="2" name="Oval 1"/>
+          <p:cNvPr id="2" name="deckgen:decor"/>
           <p:cNvSpPr/>
           <p:nvPr/>
         </p:nvSpPr>
@@ -3129,7 +3130,7 @@
       </p:sp>
       <p:sp>
         <p:nvSpPr>
-          <p:cNvPr id="3" name="Oval 2"/>
+          <p:cNvPr id="3" name="deckgen:decor"/>
           <p:cNvSpPr/>
           <p:nvPr/>
         </p:nvSpPr>
@@ -3159,7 +3160,7 @@
       </p:sp>
       <p:sp>
         <p:nvSpPr>
-          <p:cNvPr id="4" name="Oval 3"/>
+          <p:cNvPr id="4" name="deckgen:decor"/>
           <p:cNvSpPr/>
           <p:nvPr/>
         </p:nvSpPr>
@@ -3189,7 +3190,7 @@
       </p:sp>
       <p:sp>
         <p:nvSpPr>
-          <p:cNvPr id="5" name="Rectangle 4"/>
+          <p:cNvPr id="5" name="deckgen:decor"/>
           <p:cNvSpPr/>
           <p:nvPr/>
         </p:nvSpPr>
@@ -3219,7 +3220,7 @@
       </p:sp>
       <p:sp>
         <p:nvSpPr>
-          <p:cNvPr id="6" name="Oval 5"/>
+          <p:cNvPr id="6" name="deckgen:decor"/>
           <p:cNvSpPr/>
           <p:nvPr/>
         </p:nvSpPr>
@@ -3249,7 +3250,7 @@
       </p:sp>
       <p:sp>
         <p:nvSpPr>
-          <p:cNvPr id="7" name="Oval 6"/>
+          <p:cNvPr id="7" name="deckgen:decor"/>
           <p:cNvSpPr/>
           <p:nvPr/>
         </p:nvSpPr>
@@ -3279,7 +3280,7 @@
       </p:sp>
       <p:sp>
         <p:nvSpPr>
-          <p:cNvPr id="8" name="Oval 7"/>
+          <p:cNvPr id="8" name="deckgen:decor"/>
           <p:cNvSpPr/>
           <p:nvPr/>
         </p:nvSpPr>
@@ -3309,7 +3310,7 @@
       </p:sp>
       <p:sp>
         <p:nvSpPr>
-          <p:cNvPr id="9" name="Oval 8"/>
+          <p:cNvPr id="9" name="deckgen:decor"/>
           <p:cNvSpPr/>
           <p:nvPr/>
         </p:nvSpPr>
@@ -3339,7 +3340,7 @@
       </p:sp>
       <p:sp>
         <p:nvSpPr>
-          <p:cNvPr id="10" name="Rectangle 9"/>
+          <p:cNvPr id="10" name="deckgen:decor"/>
           <p:cNvSpPr/>
           <p:nvPr/>
         </p:nvSpPr>
@@ -3599,7 +3600,1150 @@
       <p:grpSpPr/>
       <p:sp>
         <p:nvSpPr>
-          <p:cNvPr id="2" name="Oval 1"/>
+          <p:cNvPr id="2" name="deckgen:decor"/>
+          <p:cNvSpPr/>
+          <p:nvPr/>
+        </p:nvSpPr>
+        <p:spPr>
+          <a:xfrm>
+            <a:off x="15811500" y="8382000"/>
+            <a:ext cx="4953000" cy="4953000"/>
+          </a:xfrm>
+          <a:prstGeom prst="ellipse">
+            <a:avLst/>
+          </a:prstGeom>
+          <a:solidFill>
+            <a:srgbClr val="F3F6FC"/>
+          </a:solidFill>
+          <a:ln>
+            <a:noFill/>
+          </a:ln>
+          <a:effectLst/>
+        </p:spPr>
+        <p:txBody>
+          <a:bodyPr rtlCol="0" anchor="ctr" wrap="square"/>
+          <a:lstStyle/>
+          <a:p>
+            <a:pPr algn="ctr"/>
+          </a:p>
+        </p:txBody>
+      </p:sp>
+      <p:sp>
+        <p:nvSpPr>
+          <p:cNvPr id="3" name="deckgen:decor"/>
+          <p:cNvSpPr/>
+          <p:nvPr/>
+        </p:nvSpPr>
+        <p:spPr>
+          <a:xfrm>
+            <a:off x="16859250" y="9429750"/>
+            <a:ext cx="2857500" cy="2857500"/>
+          </a:xfrm>
+          <a:prstGeom prst="ellipse">
+            <a:avLst/>
+          </a:prstGeom>
+          <a:solidFill>
+            <a:srgbClr val="FFFFFF"/>
+          </a:solidFill>
+          <a:ln>
+            <a:noFill/>
+          </a:ln>
+          <a:effectLst/>
+        </p:spPr>
+        <p:txBody>
+          <a:bodyPr rtlCol="0" anchor="ctr" wrap="square"/>
+          <a:lstStyle/>
+          <a:p>
+            <a:pPr algn="ctr"/>
+          </a:p>
+        </p:txBody>
+      </p:sp>
+      <p:sp>
+        <p:nvSpPr>
+          <p:cNvPr id="4" name="deckgen:decor"/>
+          <p:cNvSpPr/>
+          <p:nvPr/>
+        </p:nvSpPr>
+        <p:spPr>
+          <a:xfrm>
+            <a:off x="-1428750" y="1428750"/>
+            <a:ext cx="2857500" cy="2857500"/>
+          </a:xfrm>
+          <a:prstGeom prst="ellipse">
+            <a:avLst/>
+          </a:prstGeom>
+          <a:solidFill>
+            <a:srgbClr val="F7F8FA"/>
+          </a:solidFill>
+          <a:ln>
+            <a:noFill/>
+          </a:ln>
+          <a:effectLst/>
+        </p:spPr>
+        <p:txBody>
+          <a:bodyPr rtlCol="0" anchor="ctr" wrap="square"/>
+          <a:lstStyle/>
+          <a:p>
+            <a:pPr algn="ctr"/>
+          </a:p>
+        </p:txBody>
+      </p:sp>
+      <p:sp>
+        <p:nvSpPr>
+          <p:cNvPr id="5" name="TextBox 4"/>
+          <p:cNvSpPr txBox="1"/>
+          <p:nvPr/>
+        </p:nvSpPr>
+        <p:spPr>
+          <a:xfrm>
+            <a:off x="1143000" y="838200"/>
+            <a:ext cx="16002000" cy="342900"/>
+          </a:xfrm>
+          <a:prstGeom prst="rect">
+            <a:avLst/>
+          </a:prstGeom>
+          <a:noFill/>
+        </p:spPr>
+        <p:txBody>
+          <a:bodyPr wrap="square" lIns="0" rIns="0" tIns="0" bIns="0" anchor="t">
+            <a:spAutoFit/>
+          </a:bodyPr>
+          <a:lstStyle/>
+          <a:p>
+            <a:pPr algn="l">
+              <a:lnSpc>
+                <a:spcPct val="100000"/>
+              </a:lnSpc>
+            </a:pPr>
+            <a:r>
+              <a:rPr sz="1950" b="1" spc="160">
+                <a:solidFill>
+                  <a:srgbClr val="1E5BC6"/>
+                </a:solidFill>
+                <a:latin typeface="Pretendard"/>
+                <a:ea typeface="Pretendard"/>
+                <a:cs typeface="Pretendard"/>
+              </a:rPr>
+              <a:t>다음 회차 예고</a:t>
+            </a:r>
+          </a:p>
+        </p:txBody>
+      </p:sp>
+      <p:sp>
+        <p:nvSpPr>
+          <p:cNvPr id="6" name="TextBox 5"/>
+          <p:cNvSpPr txBox="1"/>
+          <p:nvPr/>
+        </p:nvSpPr>
+        <p:spPr>
+          <a:xfrm>
+            <a:off x="1143000" y="1162050"/>
+            <a:ext cx="16002000" cy="762000"/>
+          </a:xfrm>
+          <a:prstGeom prst="rect">
+            <a:avLst/>
+          </a:prstGeom>
+          <a:noFill/>
+        </p:spPr>
+        <p:txBody>
+          <a:bodyPr wrap="square" lIns="0" rIns="0" tIns="0" bIns="0" anchor="t">
+            <a:spAutoFit/>
+          </a:bodyPr>
+          <a:lstStyle/>
+          <a:p>
+            <a:pPr algn="l">
+              <a:lnSpc>
+                <a:spcPct val="100000"/>
+              </a:lnSpc>
+            </a:pPr>
+            <a:r>
+              <a:rPr sz="5100" b="1">
+                <a:solidFill>
+                  <a:srgbClr val="0D2B5E"/>
+                </a:solidFill>
+                <a:latin typeface="Pretendard"/>
+                <a:ea typeface="Pretendard"/>
+                <a:cs typeface="Pretendard"/>
+              </a:rPr>
+              <a:t>5-5 · 파티셔닝과 셔플링 최적화</a:t>
+            </a:r>
+          </a:p>
+        </p:txBody>
+      </p:sp>
+      <p:sp>
+        <p:nvSpPr>
+          <p:cNvPr id="7" name="Rectangle 6"/>
+          <p:cNvSpPr/>
+          <p:nvPr/>
+        </p:nvSpPr>
+        <p:spPr>
+          <a:xfrm>
+            <a:off x="1143000" y="2038350"/>
+            <a:ext cx="16002000" cy="28575"/>
+          </a:xfrm>
+          <a:prstGeom prst="rect">
+            <a:avLst/>
+          </a:prstGeom>
+          <a:solidFill>
+            <a:srgbClr val="0D2B5E"/>
+          </a:solidFill>
+          <a:ln>
+            <a:noFill/>
+          </a:ln>
+          <a:effectLst/>
+        </p:spPr>
+        <p:txBody>
+          <a:bodyPr rtlCol="0" anchor="ctr" wrap="square"/>
+          <a:lstStyle/>
+          <a:p>
+            <a:pPr algn="ctr"/>
+          </a:p>
+        </p:txBody>
+      </p:sp>
+      <p:sp>
+        <p:nvSpPr>
+          <p:cNvPr id="8" name="Rounded Rectangle 7"/>
+          <p:cNvSpPr/>
+          <p:nvPr/>
+        </p:nvSpPr>
+        <p:spPr>
+          <a:xfrm>
+            <a:off x="1143000" y="3429000"/>
+            <a:ext cx="3714750" cy="2476500"/>
+          </a:xfrm>
+          <a:prstGeom prst="roundRect">
+            <a:avLst>
+              <a:gd name="adj" fmla="val 1923"/>
+            </a:avLst>
+          </a:prstGeom>
+          <a:solidFill>
+            <a:srgbClr val="FAFBFD"/>
+          </a:solidFill>
+          <a:ln w="9525">
+            <a:solidFill>
+              <a:srgbClr val="DCE1E8"/>
+            </a:solidFill>
+          </a:ln>
+          <a:effectLst/>
+        </p:spPr>
+        <p:txBody>
+          <a:bodyPr rtlCol="0" anchor="ctr" wrap="square"/>
+          <a:lstStyle/>
+          <a:p>
+            <a:pPr algn="ctr"/>
+          </a:p>
+        </p:txBody>
+      </p:sp>
+      <p:sp>
+        <p:nvSpPr>
+          <p:cNvPr id="9" name="Rectangle 8"/>
+          <p:cNvSpPr/>
+          <p:nvPr/>
+        </p:nvSpPr>
+        <p:spPr>
+          <a:xfrm>
+            <a:off x="1143000" y="3429000"/>
+            <a:ext cx="3714750" cy="47625"/>
+          </a:xfrm>
+          <a:prstGeom prst="rect">
+            <a:avLst/>
+          </a:prstGeom>
+          <a:solidFill>
+            <a:srgbClr val="1E5BC6"/>
+          </a:solidFill>
+          <a:ln>
+            <a:noFill/>
+          </a:ln>
+          <a:effectLst/>
+        </p:spPr>
+        <p:txBody>
+          <a:bodyPr rtlCol="0" anchor="ctr" wrap="square"/>
+          <a:lstStyle/>
+          <a:p>
+            <a:pPr algn="ctr"/>
+          </a:p>
+        </p:txBody>
+      </p:sp>
+      <p:sp>
+        <p:nvSpPr>
+          <p:cNvPr id="10" name="deckgen:ornament"/>
+          <p:cNvSpPr txBox="1"/>
+          <p:nvPr/>
+        </p:nvSpPr>
+        <p:spPr>
+          <a:xfrm>
+            <a:off x="4000500" y="3638550"/>
+            <a:ext cx="590550" cy="400050"/>
+          </a:xfrm>
+          <a:prstGeom prst="rect">
+            <a:avLst/>
+          </a:prstGeom>
+          <a:noFill/>
+        </p:spPr>
+        <p:txBody>
+          <a:bodyPr wrap="square" lIns="0" rIns="0" tIns="0" bIns="0" anchor="t">
+            <a:spAutoFit/>
+          </a:bodyPr>
+          <a:lstStyle/>
+          <a:p>
+            <a:pPr algn="r">
+              <a:lnSpc>
+                <a:spcPct val="100000"/>
+              </a:lnSpc>
+            </a:pPr>
+            <a:r>
+              <a:rPr sz="2550" b="1">
+                <a:solidFill>
+                  <a:srgbClr val="E4EBF4"/>
+                </a:solidFill>
+                <a:latin typeface="Pretendard"/>
+                <a:ea typeface="Pretendard"/>
+                <a:cs typeface="Pretendard"/>
+              </a:rPr>
+              <a:t>01</a:t>
+            </a:r>
+          </a:p>
+        </p:txBody>
+      </p:sp>
+      <p:sp>
+        <p:nvSpPr>
+          <p:cNvPr id="11" name="TextBox 10"/>
+          <p:cNvSpPr txBox="1"/>
+          <p:nvPr/>
+        </p:nvSpPr>
+        <p:spPr>
+          <a:xfrm>
+            <a:off x="1466850" y="3752850"/>
+            <a:ext cx="3067050" cy="1828800"/>
+          </a:xfrm>
+          <a:prstGeom prst="rect">
+            <a:avLst/>
+          </a:prstGeom>
+          <a:noFill/>
+        </p:spPr>
+        <p:txBody>
+          <a:bodyPr wrap="square" lIns="0" rIns="0" tIns="0" bIns="0" anchor="ctr">
+            <a:spAutoFit/>
+          </a:bodyPr>
+          <a:lstStyle/>
+          <a:p>
+            <a:pPr>
+              <a:lnSpc>
+                <a:spcPct val="115000"/>
+              </a:lnSpc>
+            </a:pPr>
+            <a:r>
+              <a:rPr sz="2700" b="1">
+                <a:solidFill>
+                  <a:srgbClr val="0D2B5E"/>
+                </a:solidFill>
+                <a:latin typeface="Pretendard"/>
+                <a:ea typeface="Pretendard"/>
+                <a:cs typeface="Pretendard"/>
+              </a:rPr>
+              <a:t>이론 1H</a:t>
+            </a:r>
+          </a:p>
+          <a:p>
+            <a:pPr>
+              <a:lnSpc>
+                <a:spcPct val="146000"/>
+              </a:lnSpc>
+              <a:spcBef>
+                <a:spcPts val="1050"/>
+              </a:spcBef>
+            </a:pPr>
+            <a:r>
+              <a:rPr sz="2025" b="0">
+                <a:solidFill>
+                  <a:srgbClr val="3D3D3D"/>
+                </a:solidFill>
+                <a:latin typeface="Pretendard"/>
+                <a:ea typeface="Pretendard"/>
+                <a:cs typeface="Pretendard"/>
+              </a:rPr>
+              <a:t>파티셔닝과</a:t>
+            </a:r>
+          </a:p>
+          <a:p>
+            <a:pPr>
+              <a:lnSpc>
+                <a:spcPct val="146000"/>
+              </a:lnSpc>
+            </a:pPr>
+            <a:r>
+              <a:rPr sz="2025" b="0">
+                <a:solidFill>
+                  <a:srgbClr val="3D3D3D"/>
+                </a:solidFill>
+                <a:latin typeface="Pretendard"/>
+                <a:ea typeface="Pretendard"/>
+                <a:cs typeface="Pretendard"/>
+              </a:rPr>
+              <a:t>셔플링 원리</a:t>
+            </a:r>
+          </a:p>
+        </p:txBody>
+      </p:sp>
+      <p:sp>
+        <p:nvSpPr>
+          <p:cNvPr id="12" name="Rounded Rectangle 11"/>
+          <p:cNvSpPr/>
+          <p:nvPr/>
+        </p:nvSpPr>
+        <p:spPr>
+          <a:xfrm>
+            <a:off x="5238750" y="3429000"/>
+            <a:ext cx="3714750" cy="2476500"/>
+          </a:xfrm>
+          <a:prstGeom prst="roundRect">
+            <a:avLst>
+              <a:gd name="adj" fmla="val 1923"/>
+            </a:avLst>
+          </a:prstGeom>
+          <a:solidFill>
+            <a:srgbClr val="FAFBFD"/>
+          </a:solidFill>
+          <a:ln w="9525">
+            <a:solidFill>
+              <a:srgbClr val="DCE1E8"/>
+            </a:solidFill>
+          </a:ln>
+          <a:effectLst/>
+        </p:spPr>
+        <p:txBody>
+          <a:bodyPr rtlCol="0" anchor="ctr" wrap="square"/>
+          <a:lstStyle/>
+          <a:p>
+            <a:pPr algn="ctr"/>
+          </a:p>
+        </p:txBody>
+      </p:sp>
+      <p:sp>
+        <p:nvSpPr>
+          <p:cNvPr id="13" name="Rectangle 12"/>
+          <p:cNvSpPr/>
+          <p:nvPr/>
+        </p:nvSpPr>
+        <p:spPr>
+          <a:xfrm>
+            <a:off x="5238750" y="3429000"/>
+            <a:ext cx="3714750" cy="47625"/>
+          </a:xfrm>
+          <a:prstGeom prst="rect">
+            <a:avLst/>
+          </a:prstGeom>
+          <a:solidFill>
+            <a:srgbClr val="1E5BC6"/>
+          </a:solidFill>
+          <a:ln>
+            <a:noFill/>
+          </a:ln>
+          <a:effectLst/>
+        </p:spPr>
+        <p:txBody>
+          <a:bodyPr rtlCol="0" anchor="ctr" wrap="square"/>
+          <a:lstStyle/>
+          <a:p>
+            <a:pPr algn="ctr"/>
+          </a:p>
+        </p:txBody>
+      </p:sp>
+      <p:sp>
+        <p:nvSpPr>
+          <p:cNvPr id="14" name="deckgen:ornament"/>
+          <p:cNvSpPr txBox="1"/>
+          <p:nvPr/>
+        </p:nvSpPr>
+        <p:spPr>
+          <a:xfrm>
+            <a:off x="8096250" y="3638550"/>
+            <a:ext cx="590550" cy="400050"/>
+          </a:xfrm>
+          <a:prstGeom prst="rect">
+            <a:avLst/>
+          </a:prstGeom>
+          <a:noFill/>
+        </p:spPr>
+        <p:txBody>
+          <a:bodyPr wrap="square" lIns="0" rIns="0" tIns="0" bIns="0" anchor="t">
+            <a:spAutoFit/>
+          </a:bodyPr>
+          <a:lstStyle/>
+          <a:p>
+            <a:pPr algn="r">
+              <a:lnSpc>
+                <a:spcPct val="100000"/>
+              </a:lnSpc>
+            </a:pPr>
+            <a:r>
+              <a:rPr sz="2550" b="1">
+                <a:solidFill>
+                  <a:srgbClr val="E4EBF4"/>
+                </a:solidFill>
+                <a:latin typeface="Pretendard"/>
+                <a:ea typeface="Pretendard"/>
+                <a:cs typeface="Pretendard"/>
+              </a:rPr>
+              <a:t>02</a:t>
+            </a:r>
+          </a:p>
+        </p:txBody>
+      </p:sp>
+      <p:sp>
+        <p:nvSpPr>
+          <p:cNvPr id="15" name="TextBox 14"/>
+          <p:cNvSpPr txBox="1"/>
+          <p:nvPr/>
+        </p:nvSpPr>
+        <p:spPr>
+          <a:xfrm>
+            <a:off x="5562600" y="3752850"/>
+            <a:ext cx="3067050" cy="1828800"/>
+          </a:xfrm>
+          <a:prstGeom prst="rect">
+            <a:avLst/>
+          </a:prstGeom>
+          <a:noFill/>
+        </p:spPr>
+        <p:txBody>
+          <a:bodyPr wrap="square" lIns="0" rIns="0" tIns="0" bIns="0" anchor="ctr">
+            <a:spAutoFit/>
+          </a:bodyPr>
+          <a:lstStyle/>
+          <a:p>
+            <a:pPr>
+              <a:lnSpc>
+                <a:spcPct val="115000"/>
+              </a:lnSpc>
+            </a:pPr>
+            <a:r>
+              <a:rPr sz="2700" b="1">
+                <a:solidFill>
+                  <a:srgbClr val="0D2B5E"/>
+                </a:solidFill>
+                <a:latin typeface="Pretendard"/>
+                <a:ea typeface="Pretendard"/>
+                <a:cs typeface="Pretendard"/>
+              </a:rPr>
+              <a:t>실습 1.5H</a:t>
+            </a:r>
+          </a:p>
+          <a:p>
+            <a:pPr>
+              <a:lnSpc>
+                <a:spcPct val="146000"/>
+              </a:lnSpc>
+              <a:spcBef>
+                <a:spcPts val="1050"/>
+              </a:spcBef>
+            </a:pPr>
+            <a:r>
+              <a:rPr sz="2025" b="0">
+                <a:solidFill>
+                  <a:srgbClr val="3D3D3D"/>
+                </a:solidFill>
+                <a:latin typeface="Pretendard"/>
+                <a:ea typeface="Pretendard"/>
+                <a:cs typeface="Pretendard"/>
+              </a:rPr>
+              <a:t>repartition·</a:t>
+            </a:r>
+          </a:p>
+          <a:p>
+            <a:pPr>
+              <a:lnSpc>
+                <a:spcPct val="146000"/>
+              </a:lnSpc>
+            </a:pPr>
+            <a:r>
+              <a:rPr sz="2025" b="0">
+                <a:solidFill>
+                  <a:srgbClr val="3D3D3D"/>
+                </a:solidFill>
+                <a:latin typeface="Pretendard"/>
+                <a:ea typeface="Pretendard"/>
+                <a:cs typeface="Pretendard"/>
+              </a:rPr>
+              <a:t>coalesce 셔플</a:t>
+            </a:r>
+          </a:p>
+        </p:txBody>
+      </p:sp>
+      <p:sp>
+        <p:nvSpPr>
+          <p:cNvPr id="16" name="Rounded Rectangle 15"/>
+          <p:cNvSpPr/>
+          <p:nvPr/>
+        </p:nvSpPr>
+        <p:spPr>
+          <a:xfrm>
+            <a:off x="9334500" y="3429000"/>
+            <a:ext cx="3714750" cy="2476500"/>
+          </a:xfrm>
+          <a:prstGeom prst="roundRect">
+            <a:avLst>
+              <a:gd name="adj" fmla="val 1923"/>
+            </a:avLst>
+          </a:prstGeom>
+          <a:solidFill>
+            <a:srgbClr val="0D2B5E"/>
+          </a:solidFill>
+          <a:ln w="9525">
+            <a:solidFill>
+              <a:srgbClr val="0D2B5E"/>
+            </a:solidFill>
+          </a:ln>
+          <a:effectLst/>
+        </p:spPr>
+        <p:txBody>
+          <a:bodyPr rtlCol="0" anchor="ctr" wrap="square"/>
+          <a:lstStyle/>
+          <a:p>
+            <a:pPr algn="ctr"/>
+          </a:p>
+        </p:txBody>
+      </p:sp>
+      <p:sp>
+        <p:nvSpPr>
+          <p:cNvPr id="17" name="Rectangle 16"/>
+          <p:cNvSpPr/>
+          <p:nvPr/>
+        </p:nvSpPr>
+        <p:spPr>
+          <a:xfrm>
+            <a:off x="9334500" y="3429000"/>
+            <a:ext cx="3714750" cy="47625"/>
+          </a:xfrm>
+          <a:prstGeom prst="rect">
+            <a:avLst/>
+          </a:prstGeom>
+          <a:solidFill>
+            <a:srgbClr val="1E5BC6"/>
+          </a:solidFill>
+          <a:ln>
+            <a:noFill/>
+          </a:ln>
+          <a:effectLst/>
+        </p:spPr>
+        <p:txBody>
+          <a:bodyPr rtlCol="0" anchor="ctr" wrap="square"/>
+          <a:lstStyle/>
+          <a:p>
+            <a:pPr algn="ctr"/>
+          </a:p>
+        </p:txBody>
+      </p:sp>
+      <p:sp>
+        <p:nvSpPr>
+          <p:cNvPr id="18" name="deckgen:ornament"/>
+          <p:cNvSpPr txBox="1"/>
+          <p:nvPr/>
+        </p:nvSpPr>
+        <p:spPr>
+          <a:xfrm>
+            <a:off x="12192000" y="3638550"/>
+            <a:ext cx="590550" cy="400050"/>
+          </a:xfrm>
+          <a:prstGeom prst="rect">
+            <a:avLst/>
+          </a:prstGeom>
+          <a:noFill/>
+        </p:spPr>
+        <p:txBody>
+          <a:bodyPr wrap="square" lIns="0" rIns="0" tIns="0" bIns="0" anchor="t">
+            <a:spAutoFit/>
+          </a:bodyPr>
+          <a:lstStyle/>
+          <a:p>
+            <a:pPr algn="r">
+              <a:lnSpc>
+                <a:spcPct val="100000"/>
+              </a:lnSpc>
+            </a:pPr>
+            <a:r>
+              <a:rPr sz="2550" b="1">
+                <a:solidFill>
+                  <a:srgbClr val="3B4B7C"/>
+                </a:solidFill>
+                <a:latin typeface="Pretendard"/>
+                <a:ea typeface="Pretendard"/>
+                <a:cs typeface="Pretendard"/>
+              </a:rPr>
+              <a:t>03</a:t>
+            </a:r>
+          </a:p>
+        </p:txBody>
+      </p:sp>
+      <p:sp>
+        <p:nvSpPr>
+          <p:cNvPr id="19" name="TextBox 18"/>
+          <p:cNvSpPr txBox="1"/>
+          <p:nvPr/>
+        </p:nvSpPr>
+        <p:spPr>
+          <a:xfrm>
+            <a:off x="9658350" y="3752850"/>
+            <a:ext cx="3067050" cy="1828800"/>
+          </a:xfrm>
+          <a:prstGeom prst="rect">
+            <a:avLst/>
+          </a:prstGeom>
+          <a:noFill/>
+        </p:spPr>
+        <p:txBody>
+          <a:bodyPr wrap="square" lIns="0" rIns="0" tIns="0" bIns="0" anchor="ctr">
+            <a:spAutoFit/>
+          </a:bodyPr>
+          <a:lstStyle/>
+          <a:p>
+            <a:pPr>
+              <a:lnSpc>
+                <a:spcPct val="115000"/>
+              </a:lnSpc>
+            </a:pPr>
+            <a:r>
+              <a:rPr sz="2700" b="1">
+                <a:solidFill>
+                  <a:srgbClr val="FFFFFF"/>
+                </a:solidFill>
+                <a:latin typeface="Pretendard"/>
+                <a:ea typeface="Pretendard"/>
+                <a:cs typeface="Pretendard"/>
+              </a:rPr>
+              <a:t>실습 1H</a:t>
+            </a:r>
+          </a:p>
+          <a:p>
+            <a:pPr>
+              <a:lnSpc>
+                <a:spcPct val="146000"/>
+              </a:lnSpc>
+              <a:spcBef>
+                <a:spcPts val="1050"/>
+              </a:spcBef>
+            </a:pPr>
+            <a:r>
+              <a:rPr sz="2025" b="0">
+                <a:solidFill>
+                  <a:srgbClr val="D9E2F0"/>
+                </a:solidFill>
+                <a:latin typeface="Pretendard"/>
+                <a:ea typeface="Pretendard"/>
+                <a:cs typeface="Pretendard"/>
+              </a:rPr>
+              <a:t>배치 스크립트로</a:t>
+            </a:r>
+          </a:p>
+          <a:p>
+            <a:pPr>
+              <a:lnSpc>
+                <a:spcPct val="146000"/>
+              </a:lnSpc>
+            </a:pPr>
+            <a:r>
+              <a:rPr sz="2025" b="0">
+                <a:solidFill>
+                  <a:srgbClr val="D9E2F0"/>
+                </a:solidFill>
+                <a:latin typeface="Pretendard"/>
+                <a:ea typeface="Pretendard"/>
+                <a:cs typeface="Pretendard"/>
+              </a:rPr>
+              <a:t>데이터 마트 산출</a:t>
+            </a:r>
+          </a:p>
+        </p:txBody>
+      </p:sp>
+      <p:sp>
+        <p:nvSpPr>
+          <p:cNvPr id="20" name="Rounded Rectangle 19"/>
+          <p:cNvSpPr/>
+          <p:nvPr/>
+        </p:nvSpPr>
+        <p:spPr>
+          <a:xfrm>
+            <a:off x="13430250" y="3429000"/>
+            <a:ext cx="3714750" cy="2476500"/>
+          </a:xfrm>
+          <a:prstGeom prst="roundRect">
+            <a:avLst>
+              <a:gd name="adj" fmla="val 1923"/>
+            </a:avLst>
+          </a:prstGeom>
+          <a:solidFill>
+            <a:srgbClr val="FAFBFD"/>
+          </a:solidFill>
+          <a:ln w="9525">
+            <a:solidFill>
+              <a:srgbClr val="DCE1E8"/>
+            </a:solidFill>
+          </a:ln>
+          <a:effectLst/>
+        </p:spPr>
+        <p:txBody>
+          <a:bodyPr rtlCol="0" anchor="ctr" wrap="square"/>
+          <a:lstStyle/>
+          <a:p>
+            <a:pPr algn="ctr"/>
+          </a:p>
+        </p:txBody>
+      </p:sp>
+      <p:sp>
+        <p:nvSpPr>
+          <p:cNvPr id="21" name="Rectangle 20"/>
+          <p:cNvSpPr/>
+          <p:nvPr/>
+        </p:nvSpPr>
+        <p:spPr>
+          <a:xfrm>
+            <a:off x="13430250" y="3429000"/>
+            <a:ext cx="3714750" cy="47625"/>
+          </a:xfrm>
+          <a:prstGeom prst="rect">
+            <a:avLst/>
+          </a:prstGeom>
+          <a:solidFill>
+            <a:srgbClr val="1E5BC6"/>
+          </a:solidFill>
+          <a:ln>
+            <a:noFill/>
+          </a:ln>
+          <a:effectLst/>
+        </p:spPr>
+        <p:txBody>
+          <a:bodyPr rtlCol="0" anchor="ctr" wrap="square"/>
+          <a:lstStyle/>
+          <a:p>
+            <a:pPr algn="ctr"/>
+          </a:p>
+        </p:txBody>
+      </p:sp>
+      <p:sp>
+        <p:nvSpPr>
+          <p:cNvPr id="22" name="deckgen:ornament"/>
+          <p:cNvSpPr txBox="1"/>
+          <p:nvPr/>
+        </p:nvSpPr>
+        <p:spPr>
+          <a:xfrm>
+            <a:off x="16287750" y="3638550"/>
+            <a:ext cx="590550" cy="400050"/>
+          </a:xfrm>
+          <a:prstGeom prst="rect">
+            <a:avLst/>
+          </a:prstGeom>
+          <a:noFill/>
+        </p:spPr>
+        <p:txBody>
+          <a:bodyPr wrap="square" lIns="0" rIns="0" tIns="0" bIns="0" anchor="t">
+            <a:spAutoFit/>
+          </a:bodyPr>
+          <a:lstStyle/>
+          <a:p>
+            <a:pPr algn="r">
+              <a:lnSpc>
+                <a:spcPct val="100000"/>
+              </a:lnSpc>
+            </a:pPr>
+            <a:r>
+              <a:rPr sz="2550" b="1">
+                <a:solidFill>
+                  <a:srgbClr val="E4EBF4"/>
+                </a:solidFill>
+                <a:latin typeface="Pretendard"/>
+                <a:ea typeface="Pretendard"/>
+                <a:cs typeface="Pretendard"/>
+              </a:rPr>
+              <a:t>04</a:t>
+            </a:r>
+          </a:p>
+        </p:txBody>
+      </p:sp>
+      <p:sp>
+        <p:nvSpPr>
+          <p:cNvPr id="23" name="TextBox 22"/>
+          <p:cNvSpPr txBox="1"/>
+          <p:nvPr/>
+        </p:nvSpPr>
+        <p:spPr>
+          <a:xfrm>
+            <a:off x="13754100" y="3752850"/>
+            <a:ext cx="3067050" cy="1828800"/>
+          </a:xfrm>
+          <a:prstGeom prst="rect">
+            <a:avLst/>
+          </a:prstGeom>
+          <a:noFill/>
+        </p:spPr>
+        <p:txBody>
+          <a:bodyPr wrap="square" lIns="0" rIns="0" tIns="0" bIns="0" anchor="ctr">
+            <a:spAutoFit/>
+          </a:bodyPr>
+          <a:lstStyle/>
+          <a:p>
+            <a:pPr>
+              <a:lnSpc>
+                <a:spcPct val="115000"/>
+              </a:lnSpc>
+            </a:pPr>
+            <a:r>
+              <a:rPr sz="2700" b="1">
+                <a:solidFill>
+                  <a:srgbClr val="0D2B5E"/>
+                </a:solidFill>
+                <a:latin typeface="Pretendard"/>
+                <a:ea typeface="Pretendard"/>
+                <a:cs typeface="Pretendard"/>
+              </a:rPr>
+              <a:t>정리 0.5H</a:t>
+            </a:r>
+          </a:p>
+          <a:p>
+            <a:pPr>
+              <a:lnSpc>
+                <a:spcPct val="146000"/>
+              </a:lnSpc>
+              <a:spcBef>
+                <a:spcPts val="1050"/>
+              </a:spcBef>
+            </a:pPr>
+            <a:r>
+              <a:rPr sz="2025" b="0">
+                <a:solidFill>
+                  <a:srgbClr val="3D3D3D"/>
+                </a:solidFill>
+                <a:latin typeface="Pretendard"/>
+                <a:ea typeface="Pretendard"/>
+                <a:cs typeface="Pretendard"/>
+              </a:rPr>
+              <a:t>정리·회고</a:t>
+            </a:r>
+          </a:p>
+          <a:p>
+            <a:pPr>
+              <a:lnSpc>
+                <a:spcPct val="146000"/>
+              </a:lnSpc>
+            </a:pPr>
+            <a:r>
+              <a:rPr sz="2025" b="0">
+                <a:solidFill>
+                  <a:srgbClr val="3D3D3D"/>
+                </a:solidFill>
+                <a:latin typeface="Pretendard"/>
+                <a:ea typeface="Pretendard"/>
+                <a:cs typeface="Pretendard"/>
+              </a:rPr>
+              <a:t>산출물 점검</a:t>
+            </a:r>
+          </a:p>
+        </p:txBody>
+      </p:sp>
+      <p:sp>
+        <p:nvSpPr>
+          <p:cNvPr id="24" name="Rectangle 23"/>
+          <p:cNvSpPr/>
+          <p:nvPr/>
+        </p:nvSpPr>
+        <p:spPr>
+          <a:xfrm>
+            <a:off x="1143000" y="6496050"/>
+            <a:ext cx="47625" cy="723900"/>
+          </a:xfrm>
+          <a:prstGeom prst="rect">
+            <a:avLst/>
+          </a:prstGeom>
+          <a:solidFill>
+            <a:srgbClr val="1E5BC6"/>
+          </a:solidFill>
+          <a:ln>
+            <a:noFill/>
+          </a:ln>
+          <a:effectLst/>
+        </p:spPr>
+        <p:txBody>
+          <a:bodyPr rtlCol="0" anchor="ctr" wrap="square"/>
+          <a:lstStyle/>
+          <a:p>
+            <a:pPr algn="ctr"/>
+          </a:p>
+        </p:txBody>
+      </p:sp>
+      <p:sp>
+        <p:nvSpPr>
+          <p:cNvPr id="25" name="TextBox 24"/>
+          <p:cNvSpPr txBox="1"/>
+          <p:nvPr/>
+        </p:nvSpPr>
+        <p:spPr>
+          <a:xfrm>
+            <a:off x="1390650" y="6553200"/>
+            <a:ext cx="15754350" cy="762000"/>
+          </a:xfrm>
+          <a:prstGeom prst="rect">
+            <a:avLst/>
+          </a:prstGeom>
+          <a:noFill/>
+        </p:spPr>
+        <p:txBody>
+          <a:bodyPr wrap="square" lIns="0" rIns="0" tIns="0" bIns="0" anchor="t">
+            <a:spAutoFit/>
+          </a:bodyPr>
+          <a:lstStyle/>
+          <a:p>
+            <a:pPr algn="l">
+              <a:lnSpc>
+                <a:spcPct val="150000"/>
+              </a:lnSpc>
+            </a:pPr>
+            <a:r>
+              <a:rPr sz="2025" b="1">
+                <a:solidFill>
+                  <a:srgbClr val="7D7D7D"/>
+                </a:solidFill>
+                <a:latin typeface="Pretendard"/>
+                <a:ea typeface="Pretendard"/>
+                <a:cs typeface="Pretendard"/>
+              </a:rPr>
+              <a:t>준비: 5-3~5-4 compose(스파크 클러스터 + MinIO) · lake.db.orders · product_sales — 배치 스크립트와 마트 테이블이 주차 산출물</a:t>
+            </a:r>
+          </a:p>
+        </p:txBody>
+      </p:sp>
+      <p:sp>
+        <p:nvSpPr>
+          <p:cNvPr id="26" name="Rectangle 25"/>
+          <p:cNvSpPr/>
+          <p:nvPr/>
+        </p:nvSpPr>
+        <p:spPr>
+          <a:xfrm>
+            <a:off x="1143000" y="8058150"/>
+            <a:ext cx="16002000" cy="9525"/>
+          </a:xfrm>
+          <a:prstGeom prst="rect">
+            <a:avLst/>
+          </a:prstGeom>
+          <a:solidFill>
+            <a:srgbClr val="DCE1E8"/>
+          </a:solidFill>
+          <a:ln>
+            <a:noFill/>
+          </a:ln>
+          <a:effectLst/>
+        </p:spPr>
+        <p:txBody>
+          <a:bodyPr rtlCol="0" anchor="ctr" wrap="square"/>
+          <a:lstStyle/>
+          <a:p>
+            <a:pPr algn="ctr"/>
+          </a:p>
+        </p:txBody>
+      </p:sp>
+      <p:sp>
+        <p:nvSpPr>
+          <p:cNvPr id="27" name="TextBox 26"/>
+          <p:cNvSpPr txBox="1"/>
+          <p:nvPr/>
+        </p:nvSpPr>
+        <p:spPr>
+          <a:xfrm>
+            <a:off x="1143000" y="8248650"/>
+            <a:ext cx="13335000" cy="323850"/>
+          </a:xfrm>
+          <a:prstGeom prst="rect">
+            <a:avLst/>
+          </a:prstGeom>
+          <a:noFill/>
+        </p:spPr>
+        <p:txBody>
+          <a:bodyPr wrap="square" lIns="0" rIns="0" tIns="0" bIns="0" anchor="t">
+            <a:spAutoFit/>
+          </a:bodyPr>
+          <a:lstStyle/>
+          <a:p>
+            <a:pPr algn="l">
+              <a:lnSpc>
+                <a:spcPct val="100000"/>
+              </a:lnSpc>
+            </a:pPr>
+            <a:r>
+              <a:rPr sz="1725" b="0">
+                <a:solidFill>
+                  <a:srgbClr val="7D7D7D"/>
+                </a:solidFill>
+                <a:latin typeface="Pretendard"/>
+                <a:ea typeface="Pretendard"/>
+                <a:cs typeface="Pretendard"/>
+              </a:rPr>
+              <a:t>데이터 엔지니어링 &amp; RAG 파이프라인 160H · 5-4 · 정리·회고 0.5H</a:t>
+            </a:r>
+          </a:p>
+        </p:txBody>
+      </p:sp>
+      <p:sp>
+        <p:nvSpPr>
+          <p:cNvPr id="28" name="TextBox 27"/>
+          <p:cNvSpPr txBox="1"/>
+          <p:nvPr/>
+        </p:nvSpPr>
+        <p:spPr>
+          <a:xfrm>
+            <a:off x="15240000" y="8248650"/>
+            <a:ext cx="1905000" cy="323850"/>
+          </a:xfrm>
+          <a:prstGeom prst="rect">
+            <a:avLst/>
+          </a:prstGeom>
+          <a:noFill/>
+        </p:spPr>
+        <p:txBody>
+          <a:bodyPr wrap="square" lIns="0" rIns="0" tIns="0" bIns="0" anchor="t">
+            <a:spAutoFit/>
+          </a:bodyPr>
+          <a:lstStyle/>
+          <a:p>
+            <a:pPr algn="r">
+              <a:lnSpc>
+                <a:spcPct val="100000"/>
+              </a:lnSpc>
+            </a:pPr>
+            <a:r>
+              <a:rPr sz="1725" b="0">
+                <a:solidFill>
+                  <a:srgbClr val="7D7D7D"/>
+                </a:solidFill>
+                <a:latin typeface="Pretendard"/>
+                <a:ea typeface="Pretendard"/>
+                <a:cs typeface="Pretendard"/>
+              </a:rPr>
+              <a:t>10</a:t>
+            </a:r>
+          </a:p>
+        </p:txBody>
+      </p:sp>
+    </p:spTree>
+  </p:cSld>
+  <p:clrMapOvr>
+    <a:masterClrMapping/>
+  </p:clrMapOvr>
+</p:sld>
+</file>
+
+<file path=ppt/slides/slide11.xml><?xml version="1.0" encoding="utf-8"?>
+<p:sld xmlns:a="http://schemas.openxmlformats.org/drawingml/2006/main" xmlns:p="http://schemas.openxmlformats.org/presentationml/2006/main" xmlns:r="http://schemas.openxmlformats.org/officeDocument/2006/relationships">
+  <p:cSld>
+    <p:spTree>
+      <p:nvGrpSpPr>
+        <p:cNvPr id="1" name=""/>
+        <p:cNvGrpSpPr/>
+        <p:nvPr/>
+      </p:nvGrpSpPr>
+      <p:grpSpPr/>
+      <p:sp>
+        <p:nvSpPr>
+          <p:cNvPr id="2" name="deckgen:decor"/>
           <p:cNvSpPr/>
           <p:nvPr/>
         </p:nvSpPr>
@@ -3629,7 +4773,7 @@
       </p:sp>
       <p:sp>
         <p:nvSpPr>
-          <p:cNvPr id="3" name="Oval 2"/>
+          <p:cNvPr id="3" name="deckgen:decor"/>
           <p:cNvSpPr/>
           <p:nvPr/>
         </p:nvSpPr>
@@ -4381,7 +5525,7 @@
                 <a:ea typeface="Pretendard"/>
                 <a:cs typeface="Pretendard"/>
               </a:rPr>
-              <a:t>compose 기동 · orders·product_sales</a:t>
+              <a:t>compose stop 상태 · 테이블 셋</a:t>
             </a:r>
           </a:p>
         </p:txBody>
@@ -4406,7 +5550,7 @@
       <p:grpSpPr/>
       <p:sp>
         <p:nvSpPr>
-          <p:cNvPr id="2" name="Oval 1"/>
+          <p:cNvPr id="2" name="deckgen:decor"/>
           <p:cNvSpPr/>
           <p:nvPr/>
         </p:nvSpPr>
@@ -4436,7 +5580,7 @@
       </p:sp>
       <p:sp>
         <p:nvSpPr>
-          <p:cNvPr id="3" name="Oval 2"/>
+          <p:cNvPr id="3" name="deckgen:decor"/>
           <p:cNvSpPr/>
           <p:nvPr/>
         </p:nvSpPr>
@@ -4466,7 +5610,7 @@
       </p:sp>
       <p:sp>
         <p:nvSpPr>
-          <p:cNvPr id="4" name="Oval 3"/>
+          <p:cNvPr id="4" name="deckgen:decor"/>
           <p:cNvSpPr/>
           <p:nvPr/>
         </p:nvSpPr>
@@ -4893,7 +6037,7 @@
                 <a:ea typeface="Pretendard"/>
                 <a:cs typeface="Pretendard"/>
               </a:rPr>
-              <a:t>오늘 만든 테이블 세 개와 셔플 파티션 수를 확인한다</a:t>
+              <a:t>테이블 셋과 파티션 수를 확인하고 compose 를 멈춘다</a:t>
             </a:r>
           </a:p>
         </p:txBody>
@@ -5039,7 +6183,7 @@
                 <a:ea typeface="Pretendard"/>
                 <a:cs typeface="Pretendard"/>
               </a:rPr>
-              <a:t>자주 겪는 오류 네 가지의 원인과 해결을 안다</a:t>
+              <a:t>자주 겪는 오류 여섯 가지의 원인과 해결을 안다</a:t>
             </a:r>
           </a:p>
         </p:txBody>
@@ -5260,7 +6404,7 @@
                 <a:ea typeface="Pretendard"/>
                 <a:cs typeface="Pretendard"/>
               </a:rPr>
-              <a:t>데이터가 5행인데 200조각으로 나누는 것이 얼마나 낭비인지 — 5-5 의 출발점</a:t>
+              <a:t>설정은 200조각, sales 는 AQE 가 합쳐 1조각 — 이 차이가 5-5 의 출발점</a:t>
             </a:r>
           </a:p>
         </p:txBody>
@@ -5397,7 +6541,7 @@
       <p:grpSpPr/>
       <p:sp>
         <p:nvSpPr>
-          <p:cNvPr id="2" name="Oval 1"/>
+          <p:cNvPr id="2" name="deckgen:decor"/>
           <p:cNvSpPr/>
           <p:nvPr/>
         </p:nvSpPr>
@@ -5427,7 +6571,7 @@
       </p:sp>
       <p:sp>
         <p:nvSpPr>
-          <p:cNvPr id="3" name="Oval 2"/>
+          <p:cNvPr id="3" name="deckgen:decor"/>
           <p:cNvSpPr/>
           <p:nvPr/>
         </p:nvSpPr>
@@ -5457,7 +6601,7 @@
       </p:sp>
       <p:sp>
         <p:nvSpPr>
-          <p:cNvPr id="4" name="Oval 3"/>
+          <p:cNvPr id="4" name="deckgen:decor"/>
           <p:cNvSpPr/>
           <p:nvPr/>
         </p:nvSpPr>
@@ -8454,7 +9598,7 @@
       <p:grpSpPr/>
       <p:sp>
         <p:nvSpPr>
-          <p:cNvPr id="2" name="Oval 1"/>
+          <p:cNvPr id="2" name="deckgen:decor"/>
           <p:cNvSpPr/>
           <p:nvPr/>
         </p:nvSpPr>
@@ -8484,7 +9628,7 @@
       </p:sp>
       <p:sp>
         <p:nvSpPr>
-          <p:cNvPr id="3" name="Oval 2"/>
+          <p:cNvPr id="3" name="deckgen:decor"/>
           <p:cNvSpPr/>
           <p:nvPr/>
         </p:nvSpPr>
@@ -8514,7 +9658,7 @@
       </p:sp>
       <p:sp>
         <p:nvSpPr>
-          <p:cNvPr id="4" name="Oval 3"/>
+          <p:cNvPr id="4" name="deckgen:decor"/>
           <p:cNvSpPr/>
           <p:nvPr/>
         </p:nvSpPr>
@@ -8836,7 +9980,7 @@
                 <a:ea typeface="Pretendard"/>
                 <a:cs typeface="Pretendard"/>
               </a:rPr>
-              <a:t>orders · product_sales · daily_revenue 세 개가 보인다</a:t>
+              <a:t>daily_revenue · product_sales · orders — 임시 뷰는 안 나온다</a:t>
             </a:r>
           </a:p>
         </p:txBody>
@@ -9023,7 +10167,7 @@
                 <a:ea typeface="Pretendard"/>
                 <a:cs typeface="Pretendard"/>
               </a:rPr>
-              <a:t>sales 의 파티션 수 — 5-5 의 주제</a:t>
+              <a:t>sales 파티션: 1 — AQE 가 실행하며 빈 조각을 합쳤다</a:t>
             </a:r>
           </a:p>
         </p:txBody>
@@ -9210,7 +10354,7 @@
                 <a:ea typeface="Pretendard"/>
                 <a:cs typeface="Pretendard"/>
               </a:rPr>
-              <a:t>200 으로 나온다 — 데이터 5행을 200조각으로 나누고 있다</a:t>
+              <a:t>기본 셔플 파티션: 200 — 이 값을 바꿔 보는 것이 5-5</a:t>
             </a:r>
           </a:p>
         </p:txBody>
@@ -9285,7 +10429,7 @@
                 <a:ea typeface="Pretendard"/>
                 <a:cs typeface="Pretendard"/>
               </a:rPr>
-              <a:t>셔플 파티션</a:t>
+              <a:t>파티션 수</a:t>
             </a:r>
           </a:p>
         </p:txBody>
@@ -9326,7 +10470,25 @@
                 <a:ea typeface="Pretendard"/>
                 <a:cs typeface="Pretendard"/>
               </a:rPr>
-              <a:t>200</a:t>
+              <a:t>sales 1</a:t>
+            </a:r>
+          </a:p>
+          <a:p>
+            <a:pPr algn="l">
+              <a:lnSpc>
+                <a:spcPct val="138000"/>
+              </a:lnSpc>
+            </a:pPr>
+            <a:r>
+              <a:rPr sz="2700" b="1">
+                <a:solidFill>
+                  <a:srgbClr val="0D2B5E"/>
+                </a:solidFill>
+                <a:latin typeface="Pretendard"/>
+                <a:ea typeface="Pretendard"/>
+                <a:cs typeface="Pretendard"/>
+              </a:rPr>
+              <a:t>설정 200</a:t>
             </a:r>
           </a:p>
         </p:txBody>
@@ -9463,7 +10625,7 @@
       <p:grpSpPr/>
       <p:sp>
         <p:nvSpPr>
-          <p:cNvPr id="2" name="Oval 1"/>
+          <p:cNvPr id="2" name="deckgen:decor"/>
           <p:cNvSpPr/>
           <p:nvPr/>
         </p:nvSpPr>
@@ -9493,7 +10655,7 @@
       </p:sp>
       <p:sp>
         <p:nvSpPr>
-          <p:cNvPr id="3" name="Oval 2"/>
+          <p:cNvPr id="3" name="deckgen:decor"/>
           <p:cNvSpPr/>
           <p:nvPr/>
         </p:nvSpPr>
@@ -9523,7 +10685,7 @@
       </p:sp>
       <p:sp>
         <p:nvSpPr>
-          <p:cNvPr id="4" name="Oval 3"/>
+          <p:cNvPr id="4" name="deckgen:decor"/>
           <p:cNvSpPr/>
           <p:nvPr/>
         </p:nvSpPr>
@@ -9587,7 +10749,7 @@
                 <a:ea typeface="Pretendard"/>
                 <a:cs typeface="Pretendard"/>
               </a:rPr>
-              <a:t>오늘의 체크리스트</a:t>
+              <a:t>수업을 마칠 때</a:t>
             </a:r>
           </a:p>
         </p:txBody>
@@ -9628,7 +10790,7 @@
                 <a:ea typeface="Pretendard"/>
                 <a:cs typeface="Pretendard"/>
               </a:rPr>
-              <a:t>여덟 개를 스스로 확인해 보세요</a:t>
+              <a:t>지우지 않고 멈춘다 — exit() 에서 stop 까지</a:t>
             </a:r>
           </a:p>
         </p:txBody>
@@ -9671,12 +10833,12 @@
         </p:nvSpPr>
         <p:spPr>
           <a:xfrm>
-            <a:off x="1143000" y="2886075"/>
-            <a:ext cx="16002000" cy="523875"/>
+            <a:off x="1143000" y="2933700"/>
+            <a:ext cx="16002000" cy="1000125"/>
           </a:xfrm>
           <a:prstGeom prst="roundRect">
             <a:avLst>
-              <a:gd name="adj" fmla="val 9090"/>
+              <a:gd name="adj" fmla="val 4761"/>
             </a:avLst>
           </a:prstGeom>
           <a:solidFill>
@@ -9705,8 +10867,8 @@
         </p:nvSpPr>
         <p:spPr>
           <a:xfrm>
-            <a:off x="1390650" y="2881312"/>
-            <a:ext cx="533400" cy="533400"/>
+            <a:off x="1447800" y="3138488"/>
+            <a:ext cx="590550" cy="590550"/>
           </a:xfrm>
           <a:prstGeom prst="ellipse">
             <a:avLst/>
@@ -9735,8 +10897,8 @@
         </p:nvSpPr>
         <p:spPr>
           <a:xfrm>
-            <a:off x="1390650" y="3005138"/>
-            <a:ext cx="533400" cy="323850"/>
+            <a:off x="1447800" y="3290888"/>
+            <a:ext cx="590550" cy="323850"/>
           </a:xfrm>
           <a:prstGeom prst="rect">
             <a:avLst/>
@@ -9755,7 +10917,7 @@
               </a:lnSpc>
             </a:pPr>
             <a:r>
-              <a:rPr sz="2100" b="1">
+              <a:rPr sz="2250" b="1">
                 <a:solidFill>
                   <a:srgbClr val="FFFFFF"/>
                 </a:solidFill>
@@ -9776,27 +10938,27 @@
         </p:nvSpPr>
         <p:spPr>
           <a:xfrm>
-            <a:off x="2190750" y="2886075"/>
-            <a:ext cx="14573250" cy="523875"/>
-          </a:xfrm>
-          <a:prstGeom prst="rect">
-            <a:avLst/>
-          </a:prstGeom>
-          <a:noFill/>
-        </p:spPr>
-        <p:txBody>
-          <a:bodyPr wrap="square" lIns="0" rIns="0" tIns="0" bIns="0" anchor="ctr">
+            <a:off x="2324100" y="3024188"/>
+            <a:ext cx="14478000" cy="400050"/>
+          </a:xfrm>
+          <a:prstGeom prst="rect">
+            <a:avLst/>
+          </a:prstGeom>
+          <a:noFill/>
+        </p:spPr>
+        <p:txBody>
+          <a:bodyPr wrap="square" lIns="0" rIns="0" tIns="0" bIns="0" anchor="t">
             <a:spAutoFit/>
           </a:bodyPr>
           <a:lstStyle/>
           <a:p>
             <a:pPr algn="l">
               <a:lnSpc>
-                <a:spcPct val="100000"/>
-              </a:lnSpc>
-            </a:pPr>
-            <a:r>
-              <a:rPr sz="2100" b="1">
+                <a:spcPct val="110000"/>
+              </a:lnSpc>
+            </a:pPr>
+            <a:r>
+              <a:rPr sz="2475" b="1">
                 <a:solidFill>
                   <a:srgbClr val="0D2B5E"/>
                 </a:solidFill>
@@ -9804,25 +10966,66 @@
                 <a:ea typeface="Pretendard"/>
                 <a:cs typeface="Pretendard"/>
               </a:rPr>
-              <a:t>PySpark 문법이 Pandas 와 거의 같은 이름이라는 것을 확인했다</a:t>
-            </a:r>
-          </a:p>
-        </p:txBody>
-      </p:sp>
-      <p:sp>
-        <p:nvSpPr>
-          <p:cNvPr id="12" name="Rounded Rectangle 11"/>
-          <p:cNvSpPr/>
-          <p:nvPr/>
-        </p:nvSpPr>
-        <p:spPr>
-          <a:xfrm>
-            <a:off x="1143000" y="3524250"/>
-            <a:ext cx="16002000" cy="523875"/>
+              <a:t>exit()</a:t>
+            </a:r>
+          </a:p>
+        </p:txBody>
+      </p:sp>
+      <p:sp>
+        <p:nvSpPr>
+          <p:cNvPr id="12" name="TextBox 11"/>
+          <p:cNvSpPr txBox="1"/>
+          <p:nvPr/>
+        </p:nvSpPr>
+        <p:spPr>
+          <a:xfrm>
+            <a:off x="2324100" y="3481388"/>
+            <a:ext cx="14478000" cy="361950"/>
+          </a:xfrm>
+          <a:prstGeom prst="rect">
+            <a:avLst/>
+          </a:prstGeom>
+          <a:noFill/>
+        </p:spPr>
+        <p:txBody>
+          <a:bodyPr wrap="square" lIns="0" rIns="0" tIns="0" bIns="0" anchor="t">
+            <a:spAutoFit/>
+          </a:bodyPr>
+          <a:lstStyle/>
+          <a:p>
+            <a:pPr algn="l">
+              <a:lnSpc>
+                <a:spcPct val="120000"/>
+              </a:lnSpc>
+            </a:pPr>
+            <a:r>
+              <a:rPr sz="2025" b="0">
+                <a:solidFill>
+                  <a:srgbClr val="3D3D3D"/>
+                </a:solidFill>
+                <a:latin typeface="Pretendard"/>
+                <a:ea typeface="Pretendard"/>
+                <a:cs typeface="Pretendard"/>
+              </a:rPr>
+              <a:t>&gt;&gt;&gt; 에서 셸을 나온다 — 변수와 임시 뷰는 여기서 사라진다</a:t>
+            </a:r>
+          </a:p>
+        </p:txBody>
+      </p:sp>
+      <p:sp>
+        <p:nvSpPr>
+          <p:cNvPr id="13" name="Rounded Rectangle 12"/>
+          <p:cNvSpPr/>
+          <p:nvPr/>
+        </p:nvSpPr>
+        <p:spPr>
+          <a:xfrm>
+            <a:off x="1143000" y="4105275"/>
+            <a:ext cx="16002000" cy="1000125"/>
           </a:xfrm>
           <a:prstGeom prst="roundRect">
             <a:avLst>
-              <a:gd name="adj" fmla="val 9090"/>
+              <a:gd name="adj" fmla="val 4761"/>
             </a:avLst>
           </a:prstGeom>
           <a:solidFill>
@@ -9845,14 +11048,14 @@
       </p:sp>
       <p:sp>
         <p:nvSpPr>
-          <p:cNvPr id="13" name="Oval 12"/>
-          <p:cNvSpPr/>
-          <p:nvPr/>
-        </p:nvSpPr>
-        <p:spPr>
-          <a:xfrm>
-            <a:off x="1390650" y="3519488"/>
-            <a:ext cx="533400" cy="533400"/>
+          <p:cNvPr id="14" name="Oval 13"/>
+          <p:cNvSpPr/>
+          <p:nvPr/>
+        </p:nvSpPr>
+        <p:spPr>
+          <a:xfrm>
+            <a:off x="1447800" y="4310062"/>
+            <a:ext cx="590550" cy="590550"/>
           </a:xfrm>
           <a:prstGeom prst="ellipse">
             <a:avLst/>
@@ -9875,14 +11078,14 @@
       </p:sp>
       <p:sp>
         <p:nvSpPr>
-          <p:cNvPr id="14" name="TextBox 13"/>
-          <p:cNvSpPr txBox="1"/>
-          <p:nvPr/>
-        </p:nvSpPr>
-        <p:spPr>
-          <a:xfrm>
-            <a:off x="1390650" y="3643312"/>
-            <a:ext cx="533400" cy="323850"/>
+          <p:cNvPr id="15" name="TextBox 14"/>
+          <p:cNvSpPr txBox="1"/>
+          <p:nvPr/>
+        </p:nvSpPr>
+        <p:spPr>
+          <a:xfrm>
+            <a:off x="1447800" y="4462462"/>
+            <a:ext cx="590550" cy="323850"/>
           </a:xfrm>
           <a:prstGeom prst="rect">
             <a:avLst/>
@@ -9901,7 +11104,7 @@
               </a:lnSpc>
             </a:pPr>
             <a:r>
-              <a:rPr sz="2100" b="1">
+              <a:rPr sz="2250" b="1">
                 <a:solidFill>
                   <a:srgbClr val="FFFFFF"/>
                 </a:solidFill>
@@ -9916,33 +11119,33 @@
       </p:sp>
       <p:sp>
         <p:nvSpPr>
-          <p:cNvPr id="15" name="TextBox 14"/>
-          <p:cNvSpPr txBox="1"/>
-          <p:nvPr/>
-        </p:nvSpPr>
-        <p:spPr>
-          <a:xfrm>
-            <a:off x="2190750" y="3524250"/>
-            <a:ext cx="14573250" cy="523875"/>
-          </a:xfrm>
-          <a:prstGeom prst="rect">
-            <a:avLst/>
-          </a:prstGeom>
-          <a:noFill/>
-        </p:spPr>
-        <p:txBody>
-          <a:bodyPr wrap="square" lIns="0" rIns="0" tIns="0" bIns="0" anchor="ctr">
+          <p:cNvPr id="16" name="TextBox 15"/>
+          <p:cNvSpPr txBox="1"/>
+          <p:nvPr/>
+        </p:nvSpPr>
+        <p:spPr>
+          <a:xfrm>
+            <a:off x="2324100" y="4195762"/>
+            <a:ext cx="14478000" cy="400050"/>
+          </a:xfrm>
+          <a:prstGeom prst="rect">
+            <a:avLst/>
+          </a:prstGeom>
+          <a:noFill/>
+        </p:spPr>
+        <p:txBody>
+          <a:bodyPr wrap="square" lIns="0" rIns="0" tIns="0" bIns="0" anchor="t">
             <a:spAutoFit/>
           </a:bodyPr>
           <a:lstStyle/>
           <a:p>
             <a:pPr algn="l">
               <a:lnSpc>
-                <a:spcPct val="100000"/>
-              </a:lnSpc>
-            </a:pPr>
-            <a:r>
-              <a:rPr sz="2100" b="1">
+                <a:spcPct val="110000"/>
+              </a:lnSpc>
+            </a:pPr>
+            <a:r>
+              <a:rPr sz="2475" b="1">
                 <a:solidFill>
                   <a:srgbClr val="0D2B5E"/>
                 </a:solidFill>
@@ -9950,25 +11153,66 @@
                 <a:ea typeface="Pretendard"/>
                 <a:cs typeface="Pretendard"/>
               </a:rPr>
-              <a:t>API 와 SQL 이 같은 논리 계획으로 수렴한다는 것을 이해했다</a:t>
-            </a:r>
-          </a:p>
-        </p:txBody>
-      </p:sp>
-      <p:sp>
-        <p:nvSpPr>
-          <p:cNvPr id="16" name="Rounded Rectangle 15"/>
-          <p:cNvSpPr/>
-          <p:nvPr/>
-        </p:nvSpPr>
-        <p:spPr>
-          <a:xfrm>
-            <a:off x="1143000" y="4162425"/>
-            <a:ext cx="16002000" cy="523875"/>
+              <a:t>cd ~/data-eng/week5 · docker compose ps</a:t>
+            </a:r>
+          </a:p>
+        </p:txBody>
+      </p:sp>
+      <p:sp>
+        <p:nvSpPr>
+          <p:cNvPr id="17" name="TextBox 16"/>
+          <p:cNvSpPr txBox="1"/>
+          <p:nvPr/>
+        </p:nvSpPr>
+        <p:spPr>
+          <a:xfrm>
+            <a:off x="2324100" y="4652962"/>
+            <a:ext cx="14478000" cy="361950"/>
+          </a:xfrm>
+          <a:prstGeom prst="rect">
+            <a:avLst/>
+          </a:prstGeom>
+          <a:noFill/>
+        </p:spPr>
+        <p:txBody>
+          <a:bodyPr wrap="square" lIns="0" rIns="0" tIns="0" bIns="0" anchor="t">
+            <a:spAutoFit/>
+          </a:bodyPr>
+          <a:lstStyle/>
+          <a:p>
+            <a:pPr algn="l">
+              <a:lnSpc>
+                <a:spcPct val="120000"/>
+              </a:lnSpc>
+            </a:pPr>
+            <a:r>
+              <a:rPr sz="2025" b="0">
+                <a:solidFill>
+                  <a:srgbClr val="3D3D3D"/>
+                </a:solidFill>
+                <a:latin typeface="Pretendard"/>
+                <a:ea typeface="Pretendard"/>
+                <a:cs typeface="Pretendard"/>
+              </a:rPr>
+              <a:t>컨테이너 넷이 Up</a:t>
+            </a:r>
+          </a:p>
+        </p:txBody>
+      </p:sp>
+      <p:sp>
+        <p:nvSpPr>
+          <p:cNvPr id="18" name="Rounded Rectangle 17"/>
+          <p:cNvSpPr/>
+          <p:nvPr/>
+        </p:nvSpPr>
+        <p:spPr>
+          <a:xfrm>
+            <a:off x="1143000" y="5276850"/>
+            <a:ext cx="16002000" cy="1000125"/>
           </a:xfrm>
           <a:prstGeom prst="roundRect">
             <a:avLst>
-              <a:gd name="adj" fmla="val 9090"/>
+              <a:gd name="adj" fmla="val 4761"/>
             </a:avLst>
           </a:prstGeom>
           <a:solidFill>
@@ -9991,14 +11235,14 @@
       </p:sp>
       <p:sp>
         <p:nvSpPr>
-          <p:cNvPr id="17" name="Oval 16"/>
-          <p:cNvSpPr/>
-          <p:nvPr/>
-        </p:nvSpPr>
-        <p:spPr>
-          <a:xfrm>
-            <a:off x="1390650" y="4157662"/>
-            <a:ext cx="533400" cy="533400"/>
+          <p:cNvPr id="19" name="Oval 18"/>
+          <p:cNvSpPr/>
+          <p:nvPr/>
+        </p:nvSpPr>
+        <p:spPr>
+          <a:xfrm>
+            <a:off x="1447800" y="5481638"/>
+            <a:ext cx="590550" cy="590550"/>
           </a:xfrm>
           <a:prstGeom prst="ellipse">
             <a:avLst/>
@@ -10021,14 +11265,14 @@
       </p:sp>
       <p:sp>
         <p:nvSpPr>
-          <p:cNvPr id="18" name="TextBox 17"/>
-          <p:cNvSpPr txBox="1"/>
-          <p:nvPr/>
-        </p:nvSpPr>
-        <p:spPr>
-          <a:xfrm>
-            <a:off x="1390650" y="4281488"/>
-            <a:ext cx="533400" cy="323850"/>
+          <p:cNvPr id="20" name="TextBox 19"/>
+          <p:cNvSpPr txBox="1"/>
+          <p:nvPr/>
+        </p:nvSpPr>
+        <p:spPr>
+          <a:xfrm>
+            <a:off x="1447800" y="5634038"/>
+            <a:ext cx="590550" cy="323850"/>
           </a:xfrm>
           <a:prstGeom prst="rect">
             <a:avLst/>
@@ -10047,7 +11291,7 @@
               </a:lnSpc>
             </a:pPr>
             <a:r>
-              <a:rPr sz="2100" b="1">
+              <a:rPr sz="2250" b="1">
                 <a:solidFill>
                   <a:srgbClr val="FFFFFF"/>
                 </a:solidFill>
@@ -10062,33 +11306,33 @@
       </p:sp>
       <p:sp>
         <p:nvSpPr>
-          <p:cNvPr id="19" name="TextBox 18"/>
-          <p:cNvSpPr txBox="1"/>
-          <p:nvPr/>
-        </p:nvSpPr>
-        <p:spPr>
-          <a:xfrm>
-            <a:off x="2190750" y="4162425"/>
-            <a:ext cx="14573250" cy="523875"/>
-          </a:xfrm>
-          <a:prstGeom prst="rect">
-            <a:avLst/>
-          </a:prstGeom>
-          <a:noFill/>
-        </p:spPr>
-        <p:txBody>
-          <a:bodyPr wrap="square" lIns="0" rIns="0" tIns="0" bIns="0" anchor="ctr">
+          <p:cNvPr id="21" name="TextBox 20"/>
+          <p:cNvSpPr txBox="1"/>
+          <p:nvPr/>
+        </p:nvSpPr>
+        <p:spPr>
+          <a:xfrm>
+            <a:off x="2324100" y="5367338"/>
+            <a:ext cx="14478000" cy="400050"/>
+          </a:xfrm>
+          <a:prstGeom prst="rect">
+            <a:avLst/>
+          </a:prstGeom>
+          <a:noFill/>
+        </p:spPr>
+        <p:txBody>
+          <a:bodyPr wrap="square" lIns="0" rIns="0" tIns="0" bIns="0" anchor="t">
             <a:spAutoFit/>
           </a:bodyPr>
           <a:lstStyle/>
           <a:p>
             <a:pPr algn="l">
               <a:lnSpc>
-                <a:spcPct val="100000"/>
-              </a:lnSpc>
-            </a:pPr>
-            <a:r>
-              <a:rPr sz="2100" b="1">
+                <a:spcPct val="110000"/>
+              </a:lnSpc>
+            </a:pPr>
+            <a:r>
+              <a:rPr sz="2475" b="1">
                 <a:solidFill>
                   <a:srgbClr val="0D2B5E"/>
                 </a:solidFill>
@@ -10096,25 +11340,66 @@
                 <a:ea typeface="Pretendard"/>
                 <a:cs typeface="Pretendard"/>
               </a:rPr>
-              <a:t>join · withColumn · filter · groupBy 를 체인으로 이어 파이프라인을 만들었다</a:t>
-            </a:r>
-          </a:p>
-        </p:txBody>
-      </p:sp>
-      <p:sp>
-        <p:nvSpPr>
-          <p:cNvPr id="20" name="Rounded Rectangle 19"/>
-          <p:cNvSpPr/>
-          <p:nvPr/>
-        </p:nvSpPr>
-        <p:spPr>
-          <a:xfrm>
-            <a:off x="1143000" y="4800600"/>
-            <a:ext cx="16002000" cy="523875"/>
+              <a:t>ls</a:t>
+            </a:r>
+          </a:p>
+        </p:txBody>
+      </p:sp>
+      <p:sp>
+        <p:nvSpPr>
+          <p:cNvPr id="22" name="TextBox 21"/>
+          <p:cNvSpPr txBox="1"/>
+          <p:nvPr/>
+        </p:nvSpPr>
+        <p:spPr>
+          <a:xfrm>
+            <a:off x="2324100" y="5824538"/>
+            <a:ext cx="14478000" cy="361950"/>
+          </a:xfrm>
+          <a:prstGeom prst="rect">
+            <a:avLst/>
+          </a:prstGeom>
+          <a:noFill/>
+        </p:spPr>
+        <p:txBody>
+          <a:bodyPr wrap="square" lIns="0" rIns="0" tIns="0" bIns="0" anchor="t">
+            <a:spAutoFit/>
+          </a:bodyPr>
+          <a:lstStyle/>
+          <a:p>
+            <a:pPr algn="l">
+              <a:lnSpc>
+                <a:spcPct val="120000"/>
+              </a:lnSpc>
+            </a:pPr>
+            <a:r>
+              <a:rPr sz="2025" b="0">
+                <a:solidFill>
+                  <a:srgbClr val="3D3D3D"/>
+                </a:solidFill>
+                <a:latin typeface="Pretendard"/>
+                <a:ea typeface="Pretendard"/>
+                <a:cs typeface="Pretendard"/>
+              </a:rPr>
+              <a:t>docker-compose.yml · first_job.py · lake-pyspark.sh</a:t>
+            </a:r>
+          </a:p>
+        </p:txBody>
+      </p:sp>
+      <p:sp>
+        <p:nvSpPr>
+          <p:cNvPr id="23" name="Rounded Rectangle 22"/>
+          <p:cNvSpPr/>
+          <p:nvPr/>
+        </p:nvSpPr>
+        <p:spPr>
+          <a:xfrm>
+            <a:off x="1143000" y="6448425"/>
+            <a:ext cx="16002000" cy="1000125"/>
           </a:xfrm>
           <a:prstGeom prst="roundRect">
             <a:avLst>
-              <a:gd name="adj" fmla="val 9090"/>
+              <a:gd name="adj" fmla="val 4761"/>
             </a:avLst>
           </a:prstGeom>
           <a:solidFill>
@@ -10137,14 +11422,14 @@
       </p:sp>
       <p:sp>
         <p:nvSpPr>
-          <p:cNvPr id="21" name="Oval 20"/>
-          <p:cNvSpPr/>
-          <p:nvPr/>
-        </p:nvSpPr>
-        <p:spPr>
-          <a:xfrm>
-            <a:off x="1390650" y="4795838"/>
-            <a:ext cx="533400" cy="533400"/>
+          <p:cNvPr id="24" name="Oval 23"/>
+          <p:cNvSpPr/>
+          <p:nvPr/>
+        </p:nvSpPr>
+        <p:spPr>
+          <a:xfrm>
+            <a:off x="1447800" y="6653212"/>
+            <a:ext cx="590550" cy="590550"/>
           </a:xfrm>
           <a:prstGeom prst="ellipse">
             <a:avLst/>
@@ -10167,14 +11452,14 @@
       </p:sp>
       <p:sp>
         <p:nvSpPr>
-          <p:cNvPr id="22" name="TextBox 21"/>
-          <p:cNvSpPr txBox="1"/>
-          <p:nvPr/>
-        </p:nvSpPr>
-        <p:spPr>
-          <a:xfrm>
-            <a:off x="1390650" y="4919662"/>
-            <a:ext cx="533400" cy="323850"/>
+          <p:cNvPr id="25" name="TextBox 24"/>
+          <p:cNvSpPr txBox="1"/>
+          <p:nvPr/>
+        </p:nvSpPr>
+        <p:spPr>
+          <a:xfrm>
+            <a:off x="1447800" y="6805612"/>
+            <a:ext cx="590550" cy="323850"/>
           </a:xfrm>
           <a:prstGeom prst="rect">
             <a:avLst/>
@@ -10193,7 +11478,7 @@
               </a:lnSpc>
             </a:pPr>
             <a:r>
-              <a:rPr sz="2100" b="1">
+              <a:rPr sz="2250" b="1">
                 <a:solidFill>
                   <a:srgbClr val="FFFFFF"/>
                 </a:solidFill>
@@ -10208,33 +11493,33 @@
       </p:sp>
       <p:sp>
         <p:nvSpPr>
-          <p:cNvPr id="23" name="TextBox 22"/>
-          <p:cNvSpPr txBox="1"/>
-          <p:nvPr/>
-        </p:nvSpPr>
-        <p:spPr>
-          <a:xfrm>
-            <a:off x="2190750" y="4800600"/>
-            <a:ext cx="14573250" cy="523875"/>
-          </a:xfrm>
-          <a:prstGeom prst="rect">
-            <a:avLst/>
-          </a:prstGeom>
-          <a:noFill/>
-        </p:spPr>
-        <p:txBody>
-          <a:bodyPr wrap="square" lIns="0" rIns="0" tIns="0" bIns="0" anchor="ctr">
+          <p:cNvPr id="26" name="TextBox 25"/>
+          <p:cNvSpPr txBox="1"/>
+          <p:nvPr/>
+        </p:nvSpPr>
+        <p:spPr>
+          <a:xfrm>
+            <a:off x="2324100" y="6538912"/>
+            <a:ext cx="14478000" cy="400050"/>
+          </a:xfrm>
+          <a:prstGeom prst="rect">
+            <a:avLst/>
+          </a:prstGeom>
+          <a:noFill/>
+        </p:spPr>
+        <p:txBody>
+          <a:bodyPr wrap="square" lIns="0" rIns="0" tIns="0" bIns="0" anchor="t">
             <a:spAutoFit/>
           </a:bodyPr>
           <a:lstStyle/>
           <a:p>
             <a:pPr algn="l">
               <a:lnSpc>
-                <a:spcPct val="100000"/>
-              </a:lnSpc>
-            </a:pPr>
-            <a:r>
-              <a:rPr sz="2100" b="1">
+                <a:spcPct val="110000"/>
+              </a:lnSpc>
+            </a:pPr>
+            <a:r>
+              <a:rPr sz="2475" b="1">
                 <a:solidFill>
                   <a:srgbClr val="0D2B5E"/>
                 </a:solidFill>
@@ -10242,61 +11527,68 @@
                 <a:ea typeface="Pretendard"/>
                 <a:cs typeface="Pretendard"/>
               </a:rPr>
-              <a:t>조인 키를 문자열로 지정해 중복 컬럼 없이 조인했다</a:t>
-            </a:r>
-          </a:p>
-        </p:txBody>
-      </p:sp>
-      <p:sp>
-        <p:nvSpPr>
-          <p:cNvPr id="24" name="Rounded Rectangle 23"/>
-          <p:cNvSpPr/>
-          <p:nvPr/>
-        </p:nvSpPr>
-        <p:spPr>
-          <a:xfrm>
-            <a:off x="1143000" y="5438775"/>
-            <a:ext cx="16002000" cy="523875"/>
-          </a:xfrm>
-          <a:prstGeom prst="roundRect">
-            <a:avLst>
-              <a:gd name="adj" fmla="val 9090"/>
-            </a:avLst>
-          </a:prstGeom>
-          <a:solidFill>
-            <a:srgbClr val="FAFBFD"/>
-          </a:solidFill>
-          <a:ln w="9525">
-            <a:solidFill>
-              <a:srgbClr val="DCE1E8"/>
-            </a:solidFill>
-          </a:ln>
-          <a:effectLst/>
-        </p:spPr>
-        <p:txBody>
-          <a:bodyPr rtlCol="0" anchor="ctr" wrap="square"/>
-          <a:lstStyle/>
-          <a:p>
-            <a:pPr algn="ctr"/>
-          </a:p>
-        </p:txBody>
-      </p:sp>
-      <p:sp>
-        <p:nvSpPr>
-          <p:cNvPr id="25" name="Oval 24"/>
-          <p:cNvSpPr/>
-          <p:nvPr/>
-        </p:nvSpPr>
-        <p:spPr>
-          <a:xfrm>
-            <a:off x="1390650" y="5434012"/>
-            <a:ext cx="533400" cy="533400"/>
-          </a:xfrm>
-          <a:prstGeom prst="ellipse">
-            <a:avLst/>
-          </a:prstGeom>
-          <a:solidFill>
-            <a:srgbClr val="0D2B5E"/>
+              <a:t>docker compose stop</a:t>
+            </a:r>
+          </a:p>
+        </p:txBody>
+      </p:sp>
+      <p:sp>
+        <p:nvSpPr>
+          <p:cNvPr id="27" name="TextBox 26"/>
+          <p:cNvSpPr txBox="1"/>
+          <p:nvPr/>
+        </p:nvSpPr>
+        <p:spPr>
+          <a:xfrm>
+            <a:off x="2324100" y="6996112"/>
+            <a:ext cx="14478000" cy="361950"/>
+          </a:xfrm>
+          <a:prstGeom prst="rect">
+            <a:avLst/>
+          </a:prstGeom>
+          <a:noFill/>
+        </p:spPr>
+        <p:txBody>
+          <a:bodyPr wrap="square" lIns="0" rIns="0" tIns="0" bIns="0" anchor="t">
+            <a:spAutoFit/>
+          </a:bodyPr>
+          <a:lstStyle/>
+          <a:p>
+            <a:pPr algn="l">
+              <a:lnSpc>
+                <a:spcPct val="120000"/>
+              </a:lnSpc>
+            </a:pPr>
+            <a:r>
+              <a:rPr sz="2025" b="0">
+                <a:solidFill>
+                  <a:srgbClr val="3D3D3D"/>
+                </a:solidFill>
+                <a:latin typeface="Pretendard"/>
+                <a:ea typeface="Pretendard"/>
+                <a:cs typeface="Pretendard"/>
+              </a:rPr>
+              <a:t>넷 Stopped — product_sales · daily_revenue 는 MinIO 볼륨에 남는다</a:t>
+            </a:r>
+          </a:p>
+        </p:txBody>
+      </p:sp>
+      <p:sp>
+        <p:nvSpPr>
+          <p:cNvPr id="28" name="Rectangle 27"/>
+          <p:cNvSpPr/>
+          <p:nvPr/>
+        </p:nvSpPr>
+        <p:spPr>
+          <a:xfrm>
+            <a:off x="1143000" y="7581900"/>
+            <a:ext cx="38100" cy="323850"/>
+          </a:xfrm>
+          <a:prstGeom prst="rect">
+            <a:avLst/>
+          </a:prstGeom>
+          <a:solidFill>
+            <a:srgbClr val="BFD3F5"/>
           </a:solidFill>
           <a:ln>
             <a:noFill/>
@@ -10313,14 +11605,14 @@
       </p:sp>
       <p:sp>
         <p:nvSpPr>
-          <p:cNvPr id="26" name="TextBox 25"/>
-          <p:cNvSpPr txBox="1"/>
-          <p:nvPr/>
-        </p:nvSpPr>
-        <p:spPr>
-          <a:xfrm>
-            <a:off x="1390650" y="5557838"/>
-            <a:ext cx="533400" cy="323850"/>
+          <p:cNvPr id="29" name="TextBox 28"/>
+          <p:cNvSpPr txBox="1"/>
+          <p:nvPr/>
+        </p:nvSpPr>
+        <p:spPr>
+          <a:xfrm>
+            <a:off x="1314450" y="7581900"/>
+            <a:ext cx="15830550" cy="342900"/>
           </a:xfrm>
           <a:prstGeom prst="rect">
             <a:avLst/>
@@ -10333,116 +11625,41 @@
           </a:bodyPr>
           <a:lstStyle/>
           <a:p>
-            <a:pPr algn="ctr">
+            <a:pPr algn="l">
               <a:lnSpc>
                 <a:spcPct val="100000"/>
               </a:lnSpc>
             </a:pPr>
             <a:r>
-              <a:rPr sz="2100" b="1">
-                <a:solidFill>
-                  <a:srgbClr val="FFFFFF"/>
-                </a:solidFill>
-                <a:latin typeface="Pretendard"/>
-                <a:ea typeface="Pretendard"/>
-                <a:cs typeface="Pretendard"/>
-              </a:rPr>
-              <a:t>5</a:t>
-            </a:r>
-          </a:p>
-        </p:txBody>
-      </p:sp>
-      <p:sp>
-        <p:nvSpPr>
-          <p:cNvPr id="27" name="TextBox 26"/>
-          <p:cNvSpPr txBox="1"/>
-          <p:nvPr/>
-        </p:nvSpPr>
-        <p:spPr>
-          <a:xfrm>
-            <a:off x="2190750" y="5438775"/>
-            <a:ext cx="14573250" cy="523875"/>
-          </a:xfrm>
-          <a:prstGeom prst="rect">
-            <a:avLst/>
-          </a:prstGeom>
-          <a:noFill/>
-        </p:spPr>
-        <p:txBody>
-          <a:bodyPr wrap="square" lIns="0" rIns="0" tIns="0" bIns="0" anchor="ctr">
-            <a:spAutoFit/>
-          </a:bodyPr>
-          <a:lstStyle/>
-          <a:p>
-            <a:pPr algn="l">
-              <a:lnSpc>
-                <a:spcPct val="100000"/>
-              </a:lnSpc>
-            </a:pPr>
-            <a:r>
-              <a:rPr sz="2100" b="1">
-                <a:solidFill>
-                  <a:srgbClr val="0D2B5E"/>
-                </a:solidFill>
-                <a:latin typeface="Pretendard"/>
-                <a:ea typeface="Pretendard"/>
-                <a:cs typeface="Pretendard"/>
-              </a:rPr>
-              <a:t>조인 전후 행 수와 오른쪽 키의 고유성을 직접 확인했다</a:t>
-            </a:r>
-          </a:p>
-        </p:txBody>
-      </p:sp>
-      <p:sp>
-        <p:nvSpPr>
-          <p:cNvPr id="28" name="Rounded Rectangle 27"/>
-          <p:cNvSpPr/>
-          <p:nvPr/>
-        </p:nvSpPr>
-        <p:spPr>
-          <a:xfrm>
-            <a:off x="1143000" y="6076950"/>
-            <a:ext cx="16002000" cy="523875"/>
-          </a:xfrm>
-          <a:prstGeom prst="roundRect">
-            <a:avLst>
-              <a:gd name="adj" fmla="val 9090"/>
-            </a:avLst>
-          </a:prstGeom>
-          <a:solidFill>
-            <a:srgbClr val="FAFBFD"/>
-          </a:solidFill>
-          <a:ln w="9525">
-            <a:solidFill>
-              <a:srgbClr val="DCE1E8"/>
-            </a:solidFill>
-          </a:ln>
-          <a:effectLst/>
-        </p:spPr>
-        <p:txBody>
-          <a:bodyPr rtlCol="0" anchor="ctr" wrap="square"/>
-          <a:lstStyle/>
-          <a:p>
-            <a:pPr algn="ctr"/>
-          </a:p>
-        </p:txBody>
-      </p:sp>
-      <p:sp>
-        <p:nvSpPr>
-          <p:cNvPr id="29" name="Oval 28"/>
-          <p:cNvSpPr/>
-          <p:nvPr/>
-        </p:nvSpPr>
-        <p:spPr>
-          <a:xfrm>
-            <a:off x="1390650" y="6072188"/>
-            <a:ext cx="533400" cy="533400"/>
-          </a:xfrm>
-          <a:prstGeom prst="ellipse">
-            <a:avLst/>
-          </a:prstGeom>
-          <a:solidFill>
-            <a:srgbClr val="0D2B5E"/>
+              <a:rPr sz="1725" b="1">
+                <a:solidFill>
+                  <a:srgbClr val="7D7D7D"/>
+                </a:solidFill>
+                <a:latin typeface="Pretendard"/>
+                <a:ea typeface="Pretendard"/>
+                <a:cs typeface="Pretendard"/>
+              </a:rPr>
+              <a:t>5-5 는 docker compose start → bash lake-pyspark.sh 로 다시 시작합니다</a:t>
+            </a:r>
+          </a:p>
+        </p:txBody>
+      </p:sp>
+      <p:sp>
+        <p:nvSpPr>
+          <p:cNvPr id="30" name="Rectangle 29"/>
+          <p:cNvSpPr/>
+          <p:nvPr/>
+        </p:nvSpPr>
+        <p:spPr>
+          <a:xfrm>
+            <a:off x="1143000" y="8058150"/>
+            <a:ext cx="16002000" cy="9525"/>
+          </a:xfrm>
+          <a:prstGeom prst="rect">
+            <a:avLst/>
+          </a:prstGeom>
+          <a:solidFill>
+            <a:srgbClr val="DCE1E8"/>
           </a:solidFill>
           <a:ln>
             <a:noFill/>
@@ -10459,411 +11676,7 @@
       </p:sp>
       <p:sp>
         <p:nvSpPr>
-          <p:cNvPr id="30" name="TextBox 29"/>
-          <p:cNvSpPr txBox="1"/>
-          <p:nvPr/>
-        </p:nvSpPr>
-        <p:spPr>
-          <a:xfrm>
-            <a:off x="1390650" y="6196012"/>
-            <a:ext cx="533400" cy="323850"/>
-          </a:xfrm>
-          <a:prstGeom prst="rect">
-            <a:avLst/>
-          </a:prstGeom>
-          <a:noFill/>
-        </p:spPr>
-        <p:txBody>
-          <a:bodyPr wrap="square" lIns="0" rIns="0" tIns="0" bIns="0" anchor="t">
-            <a:spAutoFit/>
-          </a:bodyPr>
-          <a:lstStyle/>
-          <a:p>
-            <a:pPr algn="ctr">
-              <a:lnSpc>
-                <a:spcPct val="100000"/>
-              </a:lnSpc>
-            </a:pPr>
-            <a:r>
-              <a:rPr sz="2100" b="1">
-                <a:solidFill>
-                  <a:srgbClr val="FFFFFF"/>
-                </a:solidFill>
-                <a:latin typeface="Pretendard"/>
-                <a:ea typeface="Pretendard"/>
-                <a:cs typeface="Pretendard"/>
-              </a:rPr>
-              <a:t>6</a:t>
-            </a:r>
-          </a:p>
-        </p:txBody>
-      </p:sp>
-      <p:sp>
-        <p:nvSpPr>
           <p:cNvPr id="31" name="TextBox 30"/>
-          <p:cNvSpPr txBox="1"/>
-          <p:nvPr/>
-        </p:nvSpPr>
-        <p:spPr>
-          <a:xfrm>
-            <a:off x="2190750" y="6076950"/>
-            <a:ext cx="14573250" cy="523875"/>
-          </a:xfrm>
-          <a:prstGeom prst="rect">
-            <a:avLst/>
-          </a:prstGeom>
-          <a:noFill/>
-        </p:spPr>
-        <p:txBody>
-          <a:bodyPr wrap="square" lIns="0" rIns="0" tIns="0" bIns="0" anchor="ctr">
-            <a:spAutoFit/>
-          </a:bodyPr>
-          <a:lstStyle/>
-          <a:p>
-            <a:pPr algn="l">
-              <a:lnSpc>
-                <a:spcPct val="100000"/>
-              </a:lnSpc>
-            </a:pPr>
-            <a:r>
-              <a:rPr sz="2100" b="1">
-                <a:solidFill>
-                  <a:srgbClr val="0D2B5E"/>
-                </a:solidFill>
-                <a:latin typeface="Pretendard"/>
-                <a:ea typeface="Pretendard"/>
-                <a:cs typeface="Pretendard"/>
-              </a:rPr>
-              <a:t>윈도 함수로 날짜별 순위를 매겨 봤다</a:t>
-            </a:r>
-          </a:p>
-        </p:txBody>
-      </p:sp>
-      <p:sp>
-        <p:nvSpPr>
-          <p:cNvPr id="32" name="Rounded Rectangle 31"/>
-          <p:cNvSpPr/>
-          <p:nvPr/>
-        </p:nvSpPr>
-        <p:spPr>
-          <a:xfrm>
-            <a:off x="1143000" y="6715125"/>
-            <a:ext cx="16002000" cy="523875"/>
-          </a:xfrm>
-          <a:prstGeom prst="roundRect">
-            <a:avLst>
-              <a:gd name="adj" fmla="val 9090"/>
-            </a:avLst>
-          </a:prstGeom>
-          <a:solidFill>
-            <a:srgbClr val="FAFBFD"/>
-          </a:solidFill>
-          <a:ln w="9525">
-            <a:solidFill>
-              <a:srgbClr val="DCE1E8"/>
-            </a:solidFill>
-          </a:ln>
-          <a:effectLst/>
-        </p:spPr>
-        <p:txBody>
-          <a:bodyPr rtlCol="0" anchor="ctr" wrap="square"/>
-          <a:lstStyle/>
-          <a:p>
-            <a:pPr algn="ctr"/>
-          </a:p>
-        </p:txBody>
-      </p:sp>
-      <p:sp>
-        <p:nvSpPr>
-          <p:cNvPr id="33" name="Oval 32"/>
-          <p:cNvSpPr/>
-          <p:nvPr/>
-        </p:nvSpPr>
-        <p:spPr>
-          <a:xfrm>
-            <a:off x="1390650" y="6710362"/>
-            <a:ext cx="533400" cy="533400"/>
-          </a:xfrm>
-          <a:prstGeom prst="ellipse">
-            <a:avLst/>
-          </a:prstGeom>
-          <a:solidFill>
-            <a:srgbClr val="0D2B5E"/>
-          </a:solidFill>
-          <a:ln>
-            <a:noFill/>
-          </a:ln>
-          <a:effectLst/>
-        </p:spPr>
-        <p:txBody>
-          <a:bodyPr rtlCol="0" anchor="ctr" wrap="square"/>
-          <a:lstStyle/>
-          <a:p>
-            <a:pPr algn="ctr"/>
-          </a:p>
-        </p:txBody>
-      </p:sp>
-      <p:sp>
-        <p:nvSpPr>
-          <p:cNvPr id="34" name="TextBox 33"/>
-          <p:cNvSpPr txBox="1"/>
-          <p:nvPr/>
-        </p:nvSpPr>
-        <p:spPr>
-          <a:xfrm>
-            <a:off x="1390650" y="6834188"/>
-            <a:ext cx="533400" cy="323850"/>
-          </a:xfrm>
-          <a:prstGeom prst="rect">
-            <a:avLst/>
-          </a:prstGeom>
-          <a:noFill/>
-        </p:spPr>
-        <p:txBody>
-          <a:bodyPr wrap="square" lIns="0" rIns="0" tIns="0" bIns="0" anchor="t">
-            <a:spAutoFit/>
-          </a:bodyPr>
-          <a:lstStyle/>
-          <a:p>
-            <a:pPr algn="ctr">
-              <a:lnSpc>
-                <a:spcPct val="100000"/>
-              </a:lnSpc>
-            </a:pPr>
-            <a:r>
-              <a:rPr sz="2100" b="1">
-                <a:solidFill>
-                  <a:srgbClr val="FFFFFF"/>
-                </a:solidFill>
-                <a:latin typeface="Pretendard"/>
-                <a:ea typeface="Pretendard"/>
-                <a:cs typeface="Pretendard"/>
-              </a:rPr>
-              <a:t>7</a:t>
-            </a:r>
-          </a:p>
-        </p:txBody>
-      </p:sp>
-      <p:sp>
-        <p:nvSpPr>
-          <p:cNvPr id="35" name="TextBox 34"/>
-          <p:cNvSpPr txBox="1"/>
-          <p:nvPr/>
-        </p:nvSpPr>
-        <p:spPr>
-          <a:xfrm>
-            <a:off x="2190750" y="6715125"/>
-            <a:ext cx="14573250" cy="523875"/>
-          </a:xfrm>
-          <a:prstGeom prst="rect">
-            <a:avLst/>
-          </a:prstGeom>
-          <a:noFill/>
-        </p:spPr>
-        <p:txBody>
-          <a:bodyPr wrap="square" lIns="0" rIns="0" tIns="0" bIns="0" anchor="ctr">
-            <a:spAutoFit/>
-          </a:bodyPr>
-          <a:lstStyle/>
-          <a:p>
-            <a:pPr algn="l">
-              <a:lnSpc>
-                <a:spcPct val="100000"/>
-              </a:lnSpc>
-            </a:pPr>
-            <a:r>
-              <a:rPr sz="2100" b="1">
-                <a:solidFill>
-                  <a:srgbClr val="0D2B5E"/>
-                </a:solidFill>
-                <a:latin typeface="Pretendard"/>
-                <a:ea typeface="Pretendard"/>
-                <a:cs typeface="Pretendard"/>
-              </a:rPr>
-              <a:t>같은 집계를 API 와 SQL 로 작성하고 explain() 구조가 같음을 확인했다</a:t>
-            </a:r>
-          </a:p>
-        </p:txBody>
-      </p:sp>
-      <p:sp>
-        <p:nvSpPr>
-          <p:cNvPr id="36" name="Rounded Rectangle 35"/>
-          <p:cNvSpPr/>
-          <p:nvPr/>
-        </p:nvSpPr>
-        <p:spPr>
-          <a:xfrm>
-            <a:off x="1143000" y="7353300"/>
-            <a:ext cx="16002000" cy="523875"/>
-          </a:xfrm>
-          <a:prstGeom prst="roundRect">
-            <a:avLst>
-              <a:gd name="adj" fmla="val 9090"/>
-            </a:avLst>
-          </a:prstGeom>
-          <a:solidFill>
-            <a:srgbClr val="FAFBFD"/>
-          </a:solidFill>
-          <a:ln w="9525">
-            <a:solidFill>
-              <a:srgbClr val="DCE1E8"/>
-            </a:solidFill>
-          </a:ln>
-          <a:effectLst/>
-        </p:spPr>
-        <p:txBody>
-          <a:bodyPr rtlCol="0" anchor="ctr" wrap="square"/>
-          <a:lstStyle/>
-          <a:p>
-            <a:pPr algn="ctr"/>
-          </a:p>
-        </p:txBody>
-      </p:sp>
-      <p:sp>
-        <p:nvSpPr>
-          <p:cNvPr id="37" name="Oval 36"/>
-          <p:cNvSpPr/>
-          <p:nvPr/>
-        </p:nvSpPr>
-        <p:spPr>
-          <a:xfrm>
-            <a:off x="1390650" y="7348538"/>
-            <a:ext cx="533400" cy="533400"/>
-          </a:xfrm>
-          <a:prstGeom prst="ellipse">
-            <a:avLst/>
-          </a:prstGeom>
-          <a:solidFill>
-            <a:srgbClr val="0D2B5E"/>
-          </a:solidFill>
-          <a:ln>
-            <a:noFill/>
-          </a:ln>
-          <a:effectLst/>
-        </p:spPr>
-        <p:txBody>
-          <a:bodyPr rtlCol="0" anchor="ctr" wrap="square"/>
-          <a:lstStyle/>
-          <a:p>
-            <a:pPr algn="ctr"/>
-          </a:p>
-        </p:txBody>
-      </p:sp>
-      <p:sp>
-        <p:nvSpPr>
-          <p:cNvPr id="38" name="TextBox 37"/>
-          <p:cNvSpPr txBox="1"/>
-          <p:nvPr/>
-        </p:nvSpPr>
-        <p:spPr>
-          <a:xfrm>
-            <a:off x="1390650" y="7472362"/>
-            <a:ext cx="533400" cy="323850"/>
-          </a:xfrm>
-          <a:prstGeom prst="rect">
-            <a:avLst/>
-          </a:prstGeom>
-          <a:noFill/>
-        </p:spPr>
-        <p:txBody>
-          <a:bodyPr wrap="square" lIns="0" rIns="0" tIns="0" bIns="0" anchor="t">
-            <a:spAutoFit/>
-          </a:bodyPr>
-          <a:lstStyle/>
-          <a:p>
-            <a:pPr algn="ctr">
-              <a:lnSpc>
-                <a:spcPct val="100000"/>
-              </a:lnSpc>
-            </a:pPr>
-            <a:r>
-              <a:rPr sz="2100" b="1">
-                <a:solidFill>
-                  <a:srgbClr val="FFFFFF"/>
-                </a:solidFill>
-                <a:latin typeface="Pretendard"/>
-                <a:ea typeface="Pretendard"/>
-                <a:cs typeface="Pretendard"/>
-              </a:rPr>
-              <a:t>8</a:t>
-            </a:r>
-          </a:p>
-        </p:txBody>
-      </p:sp>
-      <p:sp>
-        <p:nvSpPr>
-          <p:cNvPr id="39" name="TextBox 38"/>
-          <p:cNvSpPr txBox="1"/>
-          <p:nvPr/>
-        </p:nvSpPr>
-        <p:spPr>
-          <a:xfrm>
-            <a:off x="2190750" y="7353300"/>
-            <a:ext cx="14573250" cy="523875"/>
-          </a:xfrm>
-          <a:prstGeom prst="rect">
-            <a:avLst/>
-          </a:prstGeom>
-          <a:noFill/>
-        </p:spPr>
-        <p:txBody>
-          <a:bodyPr wrap="square" lIns="0" rIns="0" tIns="0" bIns="0" anchor="ctr">
-            <a:spAutoFit/>
-          </a:bodyPr>
-          <a:lstStyle/>
-          <a:p>
-            <a:pPr algn="l">
-              <a:lnSpc>
-                <a:spcPct val="100000"/>
-              </a:lnSpc>
-            </a:pPr>
-            <a:r>
-              <a:rPr sz="2100" b="1">
-                <a:solidFill>
-                  <a:srgbClr val="0D2B5E"/>
-                </a:solidFill>
-                <a:latin typeface="Pretendard"/>
-                <a:ea typeface="Pretendard"/>
-                <a:cs typeface="Pretendard"/>
-              </a:rPr>
-              <a:t>CTE 로 나눈 SQL 을 쓰고 가공 결과를 Iceberg 테이블로 저장했다</a:t>
-            </a:r>
-          </a:p>
-        </p:txBody>
-      </p:sp>
-      <p:sp>
-        <p:nvSpPr>
-          <p:cNvPr id="40" name="Rectangle 39"/>
-          <p:cNvSpPr/>
-          <p:nvPr/>
-        </p:nvSpPr>
-        <p:spPr>
-          <a:xfrm>
-            <a:off x="1143000" y="8058150"/>
-            <a:ext cx="16002000" cy="9525"/>
-          </a:xfrm>
-          <a:prstGeom prst="rect">
-            <a:avLst/>
-          </a:prstGeom>
-          <a:solidFill>
-            <a:srgbClr val="DCE1E8"/>
-          </a:solidFill>
-          <a:ln>
-            <a:noFill/>
-          </a:ln>
-          <a:effectLst/>
-        </p:spPr>
-        <p:txBody>
-          <a:bodyPr rtlCol="0" anchor="ctr" wrap="square"/>
-          <a:lstStyle/>
-          <a:p>
-            <a:pPr algn="ctr"/>
-          </a:p>
-        </p:txBody>
-      </p:sp>
-      <p:sp>
-        <p:nvSpPr>
-          <p:cNvPr id="41" name="TextBox 40"/>
           <p:cNvSpPr txBox="1"/>
           <p:nvPr/>
         </p:nvSpPr>
@@ -10904,7 +11717,7 @@
       </p:sp>
       <p:sp>
         <p:nvSpPr>
-          <p:cNvPr id="42" name="TextBox 41"/>
+          <p:cNvPr id="32" name="TextBox 31"/>
           <p:cNvSpPr txBox="1"/>
           <p:nvPr/>
         </p:nvSpPr>
@@ -10963,7 +11776,7 @@
       <p:grpSpPr/>
       <p:sp>
         <p:nvSpPr>
-          <p:cNvPr id="2" name="Oval 1"/>
+          <p:cNvPr id="2" name="deckgen:decor"/>
           <p:cNvSpPr/>
           <p:nvPr/>
         </p:nvSpPr>
@@ -10993,7 +11806,7 @@
       </p:sp>
       <p:sp>
         <p:nvSpPr>
-          <p:cNvPr id="3" name="Oval 2"/>
+          <p:cNvPr id="3" name="deckgen:decor"/>
           <p:cNvSpPr/>
           <p:nvPr/>
         </p:nvSpPr>
@@ -11023,7 +11836,7 @@
       </p:sp>
       <p:sp>
         <p:nvSpPr>
-          <p:cNvPr id="4" name="Oval 3"/>
+          <p:cNvPr id="4" name="deckgen:decor"/>
           <p:cNvSpPr/>
           <p:nvPr/>
         </p:nvSpPr>
@@ -11087,7 +11900,7 @@
                 <a:ea typeface="Pretendard"/>
                 <a:cs typeface="Pretendard"/>
               </a:rPr>
-              <a:t>자주 겪는 오류</a:t>
+              <a:t>오늘의 체크리스트</a:t>
             </a:r>
           </a:p>
         </p:txBody>
@@ -11128,7 +11941,7 @@
                 <a:ea typeface="Pretendard"/>
                 <a:cs typeface="Pretendard"/>
               </a:rPr>
-              <a:t>증상으로 찾는 원인과 해결</a:t>
+              <a:t>열두 개를 스스로 확인해 보세요</a:t>
             </a:r>
           </a:p>
         </p:txBody>
@@ -11172,7 +11985,7 @@
         <p:spPr>
           <a:xfrm>
             <a:off x="1143000" y="2781300"/>
-            <a:ext cx="4762500" cy="590550"/>
+            <a:ext cx="922020" cy="590550"/>
           </a:xfrm>
           <a:prstGeom prst="rect">
             <a:avLst/>
@@ -11202,7 +12015,7 @@
         <p:spPr>
           <a:xfrm>
             <a:off x="1143000" y="2781300"/>
-            <a:ext cx="4762500" cy="590550"/>
+            <a:ext cx="922020" cy="590550"/>
           </a:xfrm>
           <a:prstGeom prst="rect">
             <a:avLst/>
@@ -11229,7 +12042,7 @@
                 <a:ea typeface="Pretendard"/>
                 <a:cs typeface="Pretendard"/>
               </a:rPr>
-              <a:t>증상</a:t>
+              <a:t>#</a:t>
             </a:r>
           </a:p>
         </p:txBody>
@@ -11242,8 +12055,8 @@
         </p:nvSpPr>
         <p:spPr>
           <a:xfrm>
-            <a:off x="5943600" y="2781300"/>
-            <a:ext cx="5082540" cy="590550"/>
+            <a:off x="2103120" y="2781300"/>
+            <a:ext cx="7002780" cy="590550"/>
           </a:xfrm>
           <a:prstGeom prst="rect">
             <a:avLst/>
@@ -11272,8 +12085,8 @@
         </p:nvSpPr>
         <p:spPr>
           <a:xfrm>
-            <a:off x="5943600" y="2781300"/>
-            <a:ext cx="5082540" cy="590550"/>
+            <a:off x="2103120" y="2781300"/>
+            <a:ext cx="7002780" cy="590550"/>
           </a:xfrm>
           <a:prstGeom prst="rect">
             <a:avLst/>
@@ -11300,7 +12113,7 @@
                 <a:ea typeface="Pretendard"/>
                 <a:cs typeface="Pretendard"/>
               </a:rPr>
-              <a:t>원인</a:t>
+              <a:t>확인한 것</a:t>
             </a:r>
           </a:p>
         </p:txBody>
@@ -11313,8 +12126,8 @@
         </p:nvSpPr>
         <p:spPr>
           <a:xfrm>
-            <a:off x="11064240" y="2781300"/>
-            <a:ext cx="6080760" cy="590550"/>
+            <a:off x="9144000" y="2781300"/>
+            <a:ext cx="922020" cy="590550"/>
           </a:xfrm>
           <a:prstGeom prst="rect">
             <a:avLst/>
@@ -11343,8 +12156,8 @@
         </p:nvSpPr>
         <p:spPr>
           <a:xfrm>
-            <a:off x="11064240" y="2781300"/>
-            <a:ext cx="6080760" cy="590550"/>
+            <a:off x="9144000" y="2781300"/>
+            <a:ext cx="922020" cy="590550"/>
           </a:xfrm>
           <a:prstGeom prst="rect">
             <a:avLst/>
@@ -11371,25 +12184,96 @@
                 <a:ea typeface="Pretendard"/>
                 <a:cs typeface="Pretendard"/>
               </a:rPr>
-              <a:t>해결</a:t>
-            </a:r>
-          </a:p>
-        </p:txBody>
-      </p:sp>
-      <p:sp>
-        <p:nvSpPr>
-          <p:cNvPr id="14" name="Rounded Rectangle 13"/>
+              <a:t>#</a:t>
+            </a:r>
+          </a:p>
+        </p:txBody>
+      </p:sp>
+      <p:sp>
+        <p:nvSpPr>
+          <p:cNvPr id="14" name="Rectangle 13"/>
+          <p:cNvSpPr/>
+          <p:nvPr/>
+        </p:nvSpPr>
+        <p:spPr>
+          <a:xfrm>
+            <a:off x="10104120" y="2781300"/>
+            <a:ext cx="7040880" cy="590550"/>
+          </a:xfrm>
+          <a:prstGeom prst="rect">
+            <a:avLst/>
+          </a:prstGeom>
+          <a:solidFill>
+            <a:srgbClr val="1E5BC6"/>
+          </a:solidFill>
+          <a:ln>
+            <a:noFill/>
+          </a:ln>
+          <a:effectLst/>
+        </p:spPr>
+        <p:txBody>
+          <a:bodyPr rtlCol="0" anchor="ctr" wrap="square"/>
+          <a:lstStyle/>
+          <a:p>
+            <a:pPr algn="ctr"/>
+          </a:p>
+        </p:txBody>
+      </p:sp>
+      <p:sp>
+        <p:nvSpPr>
+          <p:cNvPr id="15" name="TextBox 14"/>
+          <p:cNvSpPr txBox="1"/>
+          <p:nvPr/>
+        </p:nvSpPr>
+        <p:spPr>
+          <a:xfrm>
+            <a:off x="10104120" y="2781300"/>
+            <a:ext cx="7040880" cy="590550"/>
+          </a:xfrm>
+          <a:prstGeom prst="rect">
+            <a:avLst/>
+          </a:prstGeom>
+          <a:noFill/>
+        </p:spPr>
+        <p:txBody>
+          <a:bodyPr wrap="square" lIns="0" rIns="0" tIns="0" bIns="0" anchor="ctr">
+            <a:spAutoFit/>
+          </a:bodyPr>
+          <a:lstStyle/>
+          <a:p>
+            <a:pPr algn="ctr">
+              <a:lnSpc>
+                <a:spcPct val="100000"/>
+              </a:lnSpc>
+            </a:pPr>
+            <a:r>
+              <a:rPr sz="2025" b="1">
+                <a:solidFill>
+                  <a:srgbClr val="FFFFFF"/>
+                </a:solidFill>
+                <a:latin typeface="Pretendard"/>
+                <a:ea typeface="Pretendard"/>
+                <a:cs typeface="Pretendard"/>
+              </a:rPr>
+              <a:t>확인한 것</a:t>
+            </a:r>
+          </a:p>
+        </p:txBody>
+      </p:sp>
+      <p:sp>
+        <p:nvSpPr>
+          <p:cNvPr id="16" name="Rounded Rectangle 15"/>
           <p:cNvSpPr/>
           <p:nvPr/>
         </p:nvSpPr>
         <p:spPr>
           <a:xfrm>
             <a:off x="1143000" y="3448050"/>
-            <a:ext cx="4762500" cy="647700"/>
+            <a:ext cx="922020" cy="619125"/>
           </a:xfrm>
           <a:prstGeom prst="roundRect">
             <a:avLst>
-              <a:gd name="adj" fmla="val 5882"/>
+              <a:gd name="adj" fmla="val 6153"/>
             </a:avLst>
           </a:prstGeom>
           <a:solidFill>
@@ -11412,14 +12296,14 @@
       </p:sp>
       <p:sp>
         <p:nvSpPr>
-          <p:cNvPr id="15" name="TextBox 14"/>
+          <p:cNvPr id="17" name="TextBox 16"/>
           <p:cNvSpPr txBox="1"/>
           <p:nvPr/>
         </p:nvSpPr>
         <p:spPr>
           <a:xfrm>
             <a:off x="1238250" y="3448050"/>
-            <a:ext cx="4572000" cy="647700"/>
+            <a:ext cx="731520" cy="619125"/>
           </a:xfrm>
           <a:prstGeom prst="rect">
             <a:avLst/>
@@ -11446,43 +12330,25 @@
                 <a:ea typeface="Pretendard"/>
                 <a:cs typeface="Pretendard"/>
               </a:rPr>
-              <a:t>cannot resolve</a:t>
-            </a:r>
-          </a:p>
-          <a:p>
-            <a:pPr algn="l">
-              <a:lnSpc>
-                <a:spcPct val="115000"/>
-              </a:lnSpc>
-            </a:pPr>
-            <a:r>
-              <a:rPr sz="1875" b="1">
-                <a:solidFill>
-                  <a:srgbClr val="0D2B5E"/>
-                </a:solidFill>
-                <a:latin typeface="Pretendard"/>
-                <a:ea typeface="Pretendard"/>
-                <a:cs typeface="Pretendard"/>
-              </a:rPr>
-              <a:t>컬럼명</a:t>
-            </a:r>
-          </a:p>
-        </p:txBody>
-      </p:sp>
-      <p:sp>
-        <p:nvSpPr>
-          <p:cNvPr id="16" name="Rounded Rectangle 15"/>
-          <p:cNvSpPr/>
-          <p:nvPr/>
-        </p:nvSpPr>
-        <p:spPr>
-          <a:xfrm>
-            <a:off x="5943600" y="3448050"/>
-            <a:ext cx="5082540" cy="647700"/>
+              <a:t>1</a:t>
+            </a:r>
+          </a:p>
+        </p:txBody>
+      </p:sp>
+      <p:sp>
+        <p:nvSpPr>
+          <p:cNvPr id="18" name="Rounded Rectangle 17"/>
+          <p:cNvSpPr/>
+          <p:nvPr/>
+        </p:nvSpPr>
+        <p:spPr>
+          <a:xfrm>
+            <a:off x="2103120" y="3448050"/>
+            <a:ext cx="7002780" cy="619125"/>
           </a:xfrm>
           <a:prstGeom prst="roundRect">
             <a:avLst>
-              <a:gd name="adj" fmla="val 5882"/>
+              <a:gd name="adj" fmla="val 6153"/>
             </a:avLst>
           </a:prstGeom>
           <a:solidFill>
@@ -11505,14 +12371,14 @@
       </p:sp>
       <p:sp>
         <p:nvSpPr>
-          <p:cNvPr id="17" name="TextBox 16"/>
-          <p:cNvSpPr txBox="1"/>
-          <p:nvPr/>
-        </p:nvSpPr>
-        <p:spPr>
-          <a:xfrm>
-            <a:off x="6038850" y="3448050"/>
-            <a:ext cx="4892040" cy="647700"/>
+          <p:cNvPr id="19" name="TextBox 18"/>
+          <p:cNvSpPr txBox="1"/>
+          <p:nvPr/>
+        </p:nvSpPr>
+        <p:spPr>
+          <a:xfrm>
+            <a:off x="2198370" y="3448050"/>
+            <a:ext cx="6812280" cy="619125"/>
           </a:xfrm>
           <a:prstGeom prst="rect">
             <a:avLst/>
@@ -11539,43 +12405,25 @@
                 <a:ea typeface="Pretendard"/>
                 <a:cs typeface="Pretendard"/>
               </a:rPr>
-              <a:t>오타이거나 가공 전</a:t>
-            </a:r>
-          </a:p>
-          <a:p>
-            <a:pPr algn="ctr">
-              <a:lnSpc>
-                <a:spcPct val="115000"/>
-              </a:lnSpc>
-            </a:pPr>
-            <a:r>
-              <a:rPr sz="1875" b="0">
-                <a:solidFill>
-                  <a:srgbClr val="3D3D3D"/>
-                </a:solidFill>
-                <a:latin typeface="Pretendard"/>
-                <a:ea typeface="Pretendard"/>
-                <a:cs typeface="Pretendard"/>
-              </a:rPr>
-              <a:t>DataFrame 을 참조</a:t>
-            </a:r>
-          </a:p>
-        </p:txBody>
-      </p:sp>
-      <p:sp>
-        <p:nvSpPr>
-          <p:cNvPr id="18" name="Rounded Rectangle 17"/>
-          <p:cNvSpPr/>
-          <p:nvPr/>
-        </p:nvSpPr>
-        <p:spPr>
-          <a:xfrm>
-            <a:off x="11064240" y="3448050"/>
-            <a:ext cx="6080760" cy="647700"/>
+              <a:t>Pandas 와 거의 같은 이름</a:t>
+            </a:r>
+          </a:p>
+        </p:txBody>
+      </p:sp>
+      <p:sp>
+        <p:nvSpPr>
+          <p:cNvPr id="20" name="Rounded Rectangle 19"/>
+          <p:cNvSpPr/>
+          <p:nvPr/>
+        </p:nvSpPr>
+        <p:spPr>
+          <a:xfrm>
+            <a:off x="9144000" y="3448050"/>
+            <a:ext cx="922020" cy="619125"/>
           </a:xfrm>
           <a:prstGeom prst="roundRect">
             <a:avLst>
-              <a:gd name="adj" fmla="val 5882"/>
+              <a:gd name="adj" fmla="val 6153"/>
             </a:avLst>
           </a:prstGeom>
           <a:solidFill>
@@ -11598,14 +12446,14 @@
       </p:sp>
       <p:sp>
         <p:nvSpPr>
-          <p:cNvPr id="19" name="TextBox 18"/>
-          <p:cNvSpPr txBox="1"/>
-          <p:nvPr/>
-        </p:nvSpPr>
-        <p:spPr>
-          <a:xfrm>
-            <a:off x="11159490" y="3448050"/>
-            <a:ext cx="5890260" cy="647700"/>
+          <p:cNvPr id="21" name="TextBox 20"/>
+          <p:cNvSpPr txBox="1"/>
+          <p:nvPr/>
+        </p:nvSpPr>
+        <p:spPr>
+          <a:xfrm>
+            <a:off x="9239250" y="3448050"/>
+            <a:ext cx="731520" cy="619125"/>
           </a:xfrm>
           <a:prstGeom prst="rect">
             <a:avLst/>
@@ -11632,43 +12480,100 @@
                 <a:ea typeface="Pretendard"/>
                 <a:cs typeface="Pretendard"/>
               </a:rPr>
-              <a:t>직전 DataFrame 에</a:t>
-            </a:r>
-          </a:p>
-          <a:p>
-            <a:pPr algn="ctr">
-              <a:lnSpc>
-                <a:spcPct val="115000"/>
-              </a:lnSpc>
-            </a:pPr>
-            <a:r>
-              <a:rPr sz="1875" b="0">
-                <a:solidFill>
-                  <a:srgbClr val="3D3D3D"/>
-                </a:solidFill>
-                <a:latin typeface="Pretendard"/>
-                <a:ea typeface="Pretendard"/>
-                <a:cs typeface="Pretendard"/>
-              </a:rPr>
-              <a:t>printSchema()</a:t>
-            </a:r>
-          </a:p>
-        </p:txBody>
-      </p:sp>
-      <p:sp>
-        <p:nvSpPr>
-          <p:cNvPr id="20" name="Rounded Rectangle 19"/>
-          <p:cNvSpPr/>
-          <p:nvPr/>
-        </p:nvSpPr>
-        <p:spPr>
-          <a:xfrm>
-            <a:off x="1143000" y="4171950"/>
-            <a:ext cx="4762500" cy="647700"/>
+              <a:t>7</a:t>
+            </a:r>
+          </a:p>
+        </p:txBody>
+      </p:sp>
+      <p:sp>
+        <p:nvSpPr>
+          <p:cNvPr id="22" name="Rounded Rectangle 21"/>
+          <p:cNvSpPr/>
+          <p:nvPr/>
+        </p:nvSpPr>
+        <p:spPr>
+          <a:xfrm>
+            <a:off x="10104120" y="3448050"/>
+            <a:ext cx="7040880" cy="619125"/>
           </a:xfrm>
           <a:prstGeom prst="roundRect">
             <a:avLst>
-              <a:gd name="adj" fmla="val 5882"/>
+              <a:gd name="adj" fmla="val 6153"/>
+            </a:avLst>
+          </a:prstGeom>
+          <a:solidFill>
+            <a:srgbClr val="FAFBFD"/>
+          </a:solidFill>
+          <a:ln w="9525">
+            <a:solidFill>
+              <a:srgbClr val="DCE1E8"/>
+            </a:solidFill>
+          </a:ln>
+          <a:effectLst/>
+        </p:spPr>
+        <p:txBody>
+          <a:bodyPr rtlCol="0" anchor="ctr" wrap="square"/>
+          <a:lstStyle/>
+          <a:p>
+            <a:pPr algn="ctr"/>
+          </a:p>
+        </p:txBody>
+      </p:sp>
+      <p:sp>
+        <p:nvSpPr>
+          <p:cNvPr id="23" name="TextBox 22"/>
+          <p:cNvSpPr txBox="1"/>
+          <p:nvPr/>
+        </p:nvSpPr>
+        <p:spPr>
+          <a:xfrm>
+            <a:off x="10199370" y="3448050"/>
+            <a:ext cx="6850380" cy="619125"/>
+          </a:xfrm>
+          <a:prstGeom prst="rect">
+            <a:avLst/>
+          </a:prstGeom>
+          <a:noFill/>
+        </p:spPr>
+        <p:txBody>
+          <a:bodyPr wrap="square" lIns="0" rIns="0" tIns="0" bIns="0" anchor="ctr">
+            <a:spAutoFit/>
+          </a:bodyPr>
+          <a:lstStyle/>
+          <a:p>
+            <a:pPr algn="ctr">
+              <a:lnSpc>
+                <a:spcPct val="115000"/>
+              </a:lnSpc>
+            </a:pPr>
+            <a:r>
+              <a:rPr sz="1875" b="0">
+                <a:solidFill>
+                  <a:srgbClr val="3D3D3D"/>
+                </a:solidFill>
+                <a:latin typeface="Pretendard"/>
+                <a:ea typeface="Pretendard"/>
+                <a:cs typeface="Pretendard"/>
+              </a:rPr>
+              <a:t>윈도 함수로 날짜별 순위</a:t>
+            </a:r>
+          </a:p>
+        </p:txBody>
+      </p:sp>
+      <p:sp>
+        <p:nvSpPr>
+          <p:cNvPr id="24" name="Rounded Rectangle 23"/>
+          <p:cNvSpPr/>
+          <p:nvPr/>
+        </p:nvSpPr>
+        <p:spPr>
+          <a:xfrm>
+            <a:off x="1143000" y="4143375"/>
+            <a:ext cx="922020" cy="619125"/>
+          </a:xfrm>
+          <a:prstGeom prst="roundRect">
+            <a:avLst>
+              <a:gd name="adj" fmla="val 6153"/>
             </a:avLst>
           </a:prstGeom>
           <a:solidFill>
@@ -11691,14 +12596,14 @@
       </p:sp>
       <p:sp>
         <p:nvSpPr>
-          <p:cNvPr id="21" name="TextBox 20"/>
-          <p:cNvSpPr txBox="1"/>
-          <p:nvPr/>
-        </p:nvSpPr>
-        <p:spPr>
-          <a:xfrm>
-            <a:off x="1238250" y="4171950"/>
-            <a:ext cx="4572000" cy="647700"/>
+          <p:cNvPr id="25" name="TextBox 24"/>
+          <p:cNvSpPr txBox="1"/>
+          <p:nvPr/>
+        </p:nvSpPr>
+        <p:spPr>
+          <a:xfrm>
+            <a:off x="1238250" y="4143375"/>
+            <a:ext cx="731520" cy="619125"/>
           </a:xfrm>
           <a:prstGeom prst="rect">
             <a:avLst/>
@@ -11725,43 +12630,25 @@
                 <a:ea typeface="Pretendard"/>
                 <a:cs typeface="Pretendard"/>
               </a:rPr>
-              <a:t>Reference 'product_id'</a:t>
-            </a:r>
-          </a:p>
-          <a:p>
-            <a:pPr algn="l">
-              <a:lnSpc>
-                <a:spcPct val="115000"/>
-              </a:lnSpc>
-            </a:pPr>
-            <a:r>
-              <a:rPr sz="1875" b="1">
-                <a:solidFill>
-                  <a:srgbClr val="0D2B5E"/>
-                </a:solidFill>
-                <a:latin typeface="Pretendard"/>
-                <a:ea typeface="Pretendard"/>
-                <a:cs typeface="Pretendard"/>
-              </a:rPr>
-              <a:t>is ambiguous</a:t>
-            </a:r>
-          </a:p>
-        </p:txBody>
-      </p:sp>
-      <p:sp>
-        <p:nvSpPr>
-          <p:cNvPr id="22" name="Rounded Rectangle 21"/>
-          <p:cNvSpPr/>
-          <p:nvPr/>
-        </p:nvSpPr>
-        <p:spPr>
-          <a:xfrm>
-            <a:off x="5943600" y="4171950"/>
-            <a:ext cx="5082540" cy="647700"/>
+              <a:t>2</a:t>
+            </a:r>
+          </a:p>
+        </p:txBody>
+      </p:sp>
+      <p:sp>
+        <p:nvSpPr>
+          <p:cNvPr id="26" name="Rounded Rectangle 25"/>
+          <p:cNvSpPr/>
+          <p:nvPr/>
+        </p:nvSpPr>
+        <p:spPr>
+          <a:xfrm>
+            <a:off x="2103120" y="4143375"/>
+            <a:ext cx="7002780" cy="619125"/>
           </a:xfrm>
           <a:prstGeom prst="roundRect">
             <a:avLst>
-              <a:gd name="adj" fmla="val 5882"/>
+              <a:gd name="adj" fmla="val 6153"/>
             </a:avLst>
           </a:prstGeom>
           <a:solidFill>
@@ -11784,14 +12671,14 @@
       </p:sp>
       <p:sp>
         <p:nvSpPr>
-          <p:cNvPr id="23" name="TextBox 22"/>
-          <p:cNvSpPr txBox="1"/>
-          <p:nvPr/>
-        </p:nvSpPr>
-        <p:spPr>
-          <a:xfrm>
-            <a:off x="6038850" y="4171950"/>
-            <a:ext cx="4892040" cy="647700"/>
+          <p:cNvPr id="27" name="TextBox 26"/>
+          <p:cNvSpPr txBox="1"/>
+          <p:nvPr/>
+        </p:nvSpPr>
+        <p:spPr>
+          <a:xfrm>
+            <a:off x="2198370" y="4143375"/>
+            <a:ext cx="6812280" cy="619125"/>
           </a:xfrm>
           <a:prstGeom prst="rect">
             <a:avLst/>
@@ -11818,43 +12705,25 @@
                 <a:ea typeface="Pretendard"/>
                 <a:cs typeface="Pretendard"/>
               </a:rPr>
-              <a:t>양쪽에 같은 이름의</a:t>
-            </a:r>
-          </a:p>
-          <a:p>
-            <a:pPr algn="ctr">
-              <a:lnSpc>
-                <a:spcPct val="115000"/>
-              </a:lnSpc>
-            </a:pPr>
-            <a:r>
-              <a:rPr sz="1875" b="0">
-                <a:solidFill>
-                  <a:srgbClr val="3D3D3D"/>
-                </a:solidFill>
-                <a:latin typeface="Pretendard"/>
-                <a:ea typeface="Pretendard"/>
-                <a:cs typeface="Pretendard"/>
-              </a:rPr>
-              <a:t>컬럼이 남았다</a:t>
-            </a:r>
-          </a:p>
-        </p:txBody>
-      </p:sp>
-      <p:sp>
-        <p:nvSpPr>
-          <p:cNvPr id="24" name="Rounded Rectangle 23"/>
-          <p:cNvSpPr/>
-          <p:nvPr/>
-        </p:nvSpPr>
-        <p:spPr>
-          <a:xfrm>
-            <a:off x="11064240" y="4171950"/>
-            <a:ext cx="6080760" cy="647700"/>
+              <a:t>API·SQL 이 같은 논리 계획</a:t>
+            </a:r>
+          </a:p>
+        </p:txBody>
+      </p:sp>
+      <p:sp>
+        <p:nvSpPr>
+          <p:cNvPr id="28" name="Rounded Rectangle 27"/>
+          <p:cNvSpPr/>
+          <p:nvPr/>
+        </p:nvSpPr>
+        <p:spPr>
+          <a:xfrm>
+            <a:off x="9144000" y="4143375"/>
+            <a:ext cx="922020" cy="619125"/>
           </a:xfrm>
           <a:prstGeom prst="roundRect">
             <a:avLst>
-              <a:gd name="adj" fmla="val 5882"/>
+              <a:gd name="adj" fmla="val 6153"/>
             </a:avLst>
           </a:prstGeom>
           <a:solidFill>
@@ -11877,14 +12746,14 @@
       </p:sp>
       <p:sp>
         <p:nvSpPr>
-          <p:cNvPr id="25" name="TextBox 24"/>
-          <p:cNvSpPr txBox="1"/>
-          <p:nvPr/>
-        </p:nvSpPr>
-        <p:spPr>
-          <a:xfrm>
-            <a:off x="11159490" y="4171950"/>
-            <a:ext cx="5890260" cy="647700"/>
+          <p:cNvPr id="29" name="TextBox 28"/>
+          <p:cNvSpPr txBox="1"/>
+          <p:nvPr/>
+        </p:nvSpPr>
+        <p:spPr>
+          <a:xfrm>
+            <a:off x="9239250" y="4143375"/>
+            <a:ext cx="731520" cy="619125"/>
           </a:xfrm>
           <a:prstGeom prst="rect">
             <a:avLst/>
@@ -11911,43 +12780,100 @@
                 <a:ea typeface="Pretendard"/>
                 <a:cs typeface="Pretendard"/>
               </a:rPr>
-              <a:t>on="product_id" 문자열</a:t>
-            </a:r>
-          </a:p>
-          <a:p>
-            <a:pPr algn="ctr">
-              <a:lnSpc>
-                <a:spcPct val="115000"/>
-              </a:lnSpc>
-            </a:pPr>
-            <a:r>
-              <a:rPr sz="1875" b="0">
-                <a:solidFill>
-                  <a:srgbClr val="3D3D3D"/>
-                </a:solidFill>
-                <a:latin typeface="Pretendard"/>
-                <a:ea typeface="Pretendard"/>
-                <a:cs typeface="Pretendard"/>
-              </a:rPr>
-              <a:t>또는 alias("o")·alias("p")</a:t>
-            </a:r>
-          </a:p>
-        </p:txBody>
-      </p:sp>
-      <p:sp>
-        <p:nvSpPr>
-          <p:cNvPr id="26" name="Rounded Rectangle 25"/>
-          <p:cNvSpPr/>
-          <p:nvPr/>
-        </p:nvSpPr>
-        <p:spPr>
-          <a:xfrm>
-            <a:off x="1143000" y="4895850"/>
-            <a:ext cx="4762500" cy="647700"/>
+              <a:t>8</a:t>
+            </a:r>
+          </a:p>
+        </p:txBody>
+      </p:sp>
+      <p:sp>
+        <p:nvSpPr>
+          <p:cNvPr id="30" name="Rounded Rectangle 29"/>
+          <p:cNvSpPr/>
+          <p:nvPr/>
+        </p:nvSpPr>
+        <p:spPr>
+          <a:xfrm>
+            <a:off x="10104120" y="4143375"/>
+            <a:ext cx="7040880" cy="619125"/>
           </a:xfrm>
           <a:prstGeom prst="roundRect">
             <a:avLst>
-              <a:gd name="adj" fmla="val 5882"/>
+              <a:gd name="adj" fmla="val 6153"/>
+            </a:avLst>
+          </a:prstGeom>
+          <a:solidFill>
+            <a:srgbClr val="FAFBFD"/>
+          </a:solidFill>
+          <a:ln w="9525">
+            <a:solidFill>
+              <a:srgbClr val="DCE1E8"/>
+            </a:solidFill>
+          </a:ln>
+          <a:effectLst/>
+        </p:spPr>
+        <p:txBody>
+          <a:bodyPr rtlCol="0" anchor="ctr" wrap="square"/>
+          <a:lstStyle/>
+          <a:p>
+            <a:pPr algn="ctr"/>
+          </a:p>
+        </p:txBody>
+      </p:sp>
+      <p:sp>
+        <p:nvSpPr>
+          <p:cNvPr id="31" name="TextBox 30"/>
+          <p:cNvSpPr txBox="1"/>
+          <p:nvPr/>
+        </p:nvSpPr>
+        <p:spPr>
+          <a:xfrm>
+            <a:off x="10199370" y="4143375"/>
+            <a:ext cx="6850380" cy="619125"/>
+          </a:xfrm>
+          <a:prstGeom prst="rect">
+            <a:avLst/>
+          </a:prstGeom>
+          <a:noFill/>
+        </p:spPr>
+        <p:txBody>
+          <a:bodyPr wrap="square" lIns="0" rIns="0" tIns="0" bIns="0" anchor="ctr">
+            <a:spAutoFit/>
+          </a:bodyPr>
+          <a:lstStyle/>
+          <a:p>
+            <a:pPr algn="ctr">
+              <a:lnSpc>
+                <a:spcPct val="115000"/>
+              </a:lnSpc>
+            </a:pPr>
+            <a:r>
+              <a:rPr sz="1875" b="0">
+                <a:solidFill>
+                  <a:srgbClr val="3D3D3D"/>
+                </a:solidFill>
+                <a:latin typeface="Pretendard"/>
+                <a:ea typeface="Pretendard"/>
+                <a:cs typeface="Pretendard"/>
+              </a:rPr>
+              <a:t>API·SQL 결과 일치 확인</a:t>
+            </a:r>
+          </a:p>
+        </p:txBody>
+      </p:sp>
+      <p:sp>
+        <p:nvSpPr>
+          <p:cNvPr id="32" name="Rounded Rectangle 31"/>
+          <p:cNvSpPr/>
+          <p:nvPr/>
+        </p:nvSpPr>
+        <p:spPr>
+          <a:xfrm>
+            <a:off x="1143000" y="4838700"/>
+            <a:ext cx="922020" cy="619125"/>
+          </a:xfrm>
+          <a:prstGeom prst="roundRect">
+            <a:avLst>
+              <a:gd name="adj" fmla="val 6153"/>
             </a:avLst>
           </a:prstGeom>
           <a:solidFill>
@@ -11970,14 +12896,14 @@
       </p:sp>
       <p:sp>
         <p:nvSpPr>
-          <p:cNvPr id="27" name="TextBox 26"/>
-          <p:cNvSpPr txBox="1"/>
-          <p:nvPr/>
-        </p:nvSpPr>
-        <p:spPr>
-          <a:xfrm>
-            <a:off x="1238250" y="4895850"/>
-            <a:ext cx="4572000" cy="647700"/>
+          <p:cNvPr id="33" name="TextBox 32"/>
+          <p:cNvSpPr txBox="1"/>
+          <p:nvPr/>
+        </p:nvSpPr>
+        <p:spPr>
+          <a:xfrm>
+            <a:off x="1238250" y="4838700"/>
+            <a:ext cx="731520" cy="619125"/>
           </a:xfrm>
           <a:prstGeom prst="rect">
             <a:avLst/>
@@ -12004,43 +12930,25 @@
                 <a:ea typeface="Pretendard"/>
                 <a:cs typeface="Pretendard"/>
               </a:rPr>
-              <a:t>결과가 없거나</a:t>
-            </a:r>
-          </a:p>
-          <a:p>
-            <a:pPr algn="l">
-              <a:lnSpc>
-                <a:spcPct val="115000"/>
-              </a:lnSpc>
-            </a:pPr>
-            <a:r>
-              <a:rPr sz="1875" b="1">
-                <a:solidFill>
-                  <a:srgbClr val="0D2B5E"/>
-                </a:solidFill>
-                <a:latin typeface="Pretendard"/>
-                <a:ea typeface="Pretendard"/>
-                <a:cs typeface="Pretendard"/>
-              </a:rPr>
-              <a:t>… 으로 잘림</a:t>
-            </a:r>
-          </a:p>
-        </p:txBody>
-      </p:sp>
-      <p:sp>
-        <p:nvSpPr>
-          <p:cNvPr id="28" name="Rounded Rectangle 27"/>
-          <p:cNvSpPr/>
-          <p:nvPr/>
-        </p:nvSpPr>
-        <p:spPr>
-          <a:xfrm>
-            <a:off x="5943600" y="4895850"/>
-            <a:ext cx="5082540" cy="647700"/>
+              <a:t>3</a:t>
+            </a:r>
+          </a:p>
+        </p:txBody>
+      </p:sp>
+      <p:sp>
+        <p:nvSpPr>
+          <p:cNvPr id="34" name="Rounded Rectangle 33"/>
+          <p:cNvSpPr/>
+          <p:nvPr/>
+        </p:nvSpPr>
+        <p:spPr>
+          <a:xfrm>
+            <a:off x="2103120" y="4838700"/>
+            <a:ext cx="7002780" cy="619125"/>
           </a:xfrm>
           <a:prstGeom prst="roundRect">
             <a:avLst>
-              <a:gd name="adj" fmla="val 5882"/>
+              <a:gd name="adj" fmla="val 6153"/>
             </a:avLst>
           </a:prstGeom>
           <a:solidFill>
@@ -12063,14 +12971,14 @@
       </p:sp>
       <p:sp>
         <p:nvSpPr>
-          <p:cNvPr id="29" name="TextBox 28"/>
-          <p:cNvSpPr txBox="1"/>
-          <p:nvPr/>
-        </p:nvSpPr>
-        <p:spPr>
-          <a:xfrm>
-            <a:off x="6038850" y="4895850"/>
-            <a:ext cx="4892040" cy="647700"/>
+          <p:cNvPr id="35" name="TextBox 34"/>
+          <p:cNvSpPr txBox="1"/>
+          <p:nvPr/>
+        </p:nvSpPr>
+        <p:spPr>
+          <a:xfrm>
+            <a:off x="2198370" y="4838700"/>
+            <a:ext cx="6812280" cy="619125"/>
           </a:xfrm>
           <a:prstGeom prst="rect">
             <a:avLst/>
@@ -12097,43 +13005,25 @@
                 <a:ea typeface="Pretendard"/>
                 <a:cs typeface="Pretendard"/>
               </a:rPr>
-              <a:t>action 미호출 ·</a:t>
-            </a:r>
-          </a:p>
-          <a:p>
-            <a:pPr algn="ctr">
-              <a:lnSpc>
-                <a:spcPct val="115000"/>
-              </a:lnSpc>
-            </a:pPr>
-            <a:r>
-              <a:rPr sz="1875" b="0">
-                <a:solidFill>
-                  <a:srgbClr val="3D3D3D"/>
-                </a:solidFill>
-                <a:latin typeface="Pretendard"/>
-                <a:ea typeface="Pretendard"/>
-                <a:cs typeface="Pretendard"/>
-              </a:rPr>
-              <a:t>show() 기본 20행</a:t>
-            </a:r>
-          </a:p>
-        </p:txBody>
-      </p:sp>
-      <p:sp>
-        <p:nvSpPr>
-          <p:cNvPr id="30" name="Rounded Rectangle 29"/>
-          <p:cNvSpPr/>
-          <p:nvPr/>
-        </p:nvSpPr>
-        <p:spPr>
-          <a:xfrm>
-            <a:off x="11064240" y="4895850"/>
-            <a:ext cx="6080760" cy="647700"/>
+              <a:t>F.col 로 컬럼 가리키기</a:t>
+            </a:r>
+          </a:p>
+        </p:txBody>
+      </p:sp>
+      <p:sp>
+        <p:nvSpPr>
+          <p:cNvPr id="36" name="Rounded Rectangle 35"/>
+          <p:cNvSpPr/>
+          <p:nvPr/>
+        </p:nvSpPr>
+        <p:spPr>
+          <a:xfrm>
+            <a:off x="9144000" y="4838700"/>
+            <a:ext cx="922020" cy="619125"/>
           </a:xfrm>
           <a:prstGeom prst="roundRect">
             <a:avLst>
-              <a:gd name="adj" fmla="val 5882"/>
+              <a:gd name="adj" fmla="val 6153"/>
             </a:avLst>
           </a:prstGeom>
           <a:solidFill>
@@ -12156,14 +13046,14 @@
       </p:sp>
       <p:sp>
         <p:nvSpPr>
-          <p:cNvPr id="31" name="TextBox 30"/>
-          <p:cNvSpPr txBox="1"/>
-          <p:nvPr/>
-        </p:nvSpPr>
-        <p:spPr>
-          <a:xfrm>
-            <a:off x="11159490" y="4895850"/>
-            <a:ext cx="5890260" cy="647700"/>
+          <p:cNvPr id="37" name="TextBox 36"/>
+          <p:cNvSpPr txBox="1"/>
+          <p:nvPr/>
+        </p:nvSpPr>
+        <p:spPr>
+          <a:xfrm>
+            <a:off x="9239250" y="4838700"/>
+            <a:ext cx="731520" cy="619125"/>
           </a:xfrm>
           <a:prstGeom prst="rect">
             <a:avLst/>
@@ -12190,43 +13080,100 @@
                 <a:ea typeface="Pretendard"/>
                 <a:cs typeface="Pretendard"/>
               </a:rPr>
-              <a:t>show() 붙이기 ·</a:t>
-            </a:r>
-          </a:p>
-          <a:p>
-            <a:pPr algn="ctr">
-              <a:lnSpc>
-                <a:spcPct val="115000"/>
-              </a:lnSpc>
-            </a:pPr>
-            <a:r>
-              <a:rPr sz="1875" b="0">
-                <a:solidFill>
-                  <a:srgbClr val="3D3D3D"/>
-                </a:solidFill>
-                <a:latin typeface="Pretendard"/>
-                <a:ea typeface="Pretendard"/>
-                <a:cs typeface="Pretendard"/>
-              </a:rPr>
-              <a:t>show(truncate=False)</a:t>
-            </a:r>
-          </a:p>
-        </p:txBody>
-      </p:sp>
-      <p:sp>
-        <p:nvSpPr>
-          <p:cNvPr id="32" name="Rounded Rectangle 31"/>
-          <p:cNvSpPr/>
-          <p:nvPr/>
-        </p:nvSpPr>
-        <p:spPr>
-          <a:xfrm>
-            <a:off x="1143000" y="5619750"/>
-            <a:ext cx="4762500" cy="647700"/>
+              <a:t>9</a:t>
+            </a:r>
+          </a:p>
+        </p:txBody>
+      </p:sp>
+      <p:sp>
+        <p:nvSpPr>
+          <p:cNvPr id="38" name="Rounded Rectangle 37"/>
+          <p:cNvSpPr/>
+          <p:nvPr/>
+        </p:nvSpPr>
+        <p:spPr>
+          <a:xfrm>
+            <a:off x="10104120" y="4838700"/>
+            <a:ext cx="7040880" cy="619125"/>
           </a:xfrm>
           <a:prstGeom prst="roundRect">
             <a:avLst>
-              <a:gd name="adj" fmla="val 5882"/>
+              <a:gd name="adj" fmla="val 6153"/>
+            </a:avLst>
+          </a:prstGeom>
+          <a:solidFill>
+            <a:srgbClr val="FAFBFD"/>
+          </a:solidFill>
+          <a:ln w="9525">
+            <a:solidFill>
+              <a:srgbClr val="DCE1E8"/>
+            </a:solidFill>
+          </a:ln>
+          <a:effectLst/>
+        </p:spPr>
+        <p:txBody>
+          <a:bodyPr rtlCol="0" anchor="ctr" wrap="square"/>
+          <a:lstStyle/>
+          <a:p>
+            <a:pPr algn="ctr"/>
+          </a:p>
+        </p:txBody>
+      </p:sp>
+      <p:sp>
+        <p:nvSpPr>
+          <p:cNvPr id="39" name="TextBox 38"/>
+          <p:cNvSpPr txBox="1"/>
+          <p:nvPr/>
+        </p:nvSpPr>
+        <p:spPr>
+          <a:xfrm>
+            <a:off x="10199370" y="4838700"/>
+            <a:ext cx="6850380" cy="619125"/>
+          </a:xfrm>
+          <a:prstGeom prst="rect">
+            <a:avLst/>
+          </a:prstGeom>
+          <a:noFill/>
+        </p:spPr>
+        <p:txBody>
+          <a:bodyPr wrap="square" lIns="0" rIns="0" tIns="0" bIns="0" anchor="ctr">
+            <a:spAutoFit/>
+          </a:bodyPr>
+          <a:lstStyle/>
+          <a:p>
+            <a:pPr algn="ctr">
+              <a:lnSpc>
+                <a:spcPct val="115000"/>
+              </a:lnSpc>
+            </a:pPr>
+            <a:r>
+              <a:rPr sz="1875" b="0">
+                <a:solidFill>
+                  <a:srgbClr val="3D3D3D"/>
+                </a:solidFill>
+                <a:latin typeface="Pretendard"/>
+                <a:ea typeface="Pretendard"/>
+                <a:cs typeface="Pretendard"/>
+              </a:rPr>
+              <a:t>explain() 두 방식 같은 구조</a:t>
+            </a:r>
+          </a:p>
+        </p:txBody>
+      </p:sp>
+      <p:sp>
+        <p:nvSpPr>
+          <p:cNvPr id="40" name="Rounded Rectangle 39"/>
+          <p:cNvSpPr/>
+          <p:nvPr/>
+        </p:nvSpPr>
+        <p:spPr>
+          <a:xfrm>
+            <a:off x="1143000" y="5534025"/>
+            <a:ext cx="922020" cy="619125"/>
+          </a:xfrm>
+          <a:prstGeom prst="roundRect">
+            <a:avLst>
+              <a:gd name="adj" fmla="val 6153"/>
             </a:avLst>
           </a:prstGeom>
           <a:solidFill>
@@ -12249,14 +13196,14 @@
       </p:sp>
       <p:sp>
         <p:nvSpPr>
-          <p:cNvPr id="33" name="TextBox 32"/>
-          <p:cNvSpPr txBox="1"/>
-          <p:nvPr/>
-        </p:nvSpPr>
-        <p:spPr>
-          <a:xfrm>
-            <a:off x="1238250" y="5619750"/>
-            <a:ext cx="4572000" cy="647700"/>
+          <p:cNvPr id="41" name="TextBox 40"/>
+          <p:cNvSpPr txBox="1"/>
+          <p:nvPr/>
+        </p:nvSpPr>
+        <p:spPr>
+          <a:xfrm>
+            <a:off x="1238250" y="5534025"/>
+            <a:ext cx="731520" cy="619125"/>
           </a:xfrm>
           <a:prstGeom prst="rect">
             <a:avLst/>
@@ -12283,43 +13230,25 @@
                 <a:ea typeface="Pretendard"/>
                 <a:cs typeface="Pretendard"/>
               </a:rPr>
-              <a:t>조인 후 행 수가</a:t>
-            </a:r>
-          </a:p>
-          <a:p>
-            <a:pPr algn="l">
-              <a:lnSpc>
-                <a:spcPct val="115000"/>
-              </a:lnSpc>
-            </a:pPr>
-            <a:r>
-              <a:rPr sz="1875" b="1">
-                <a:solidFill>
-                  <a:srgbClr val="0D2B5E"/>
-                </a:solidFill>
-                <a:latin typeface="Pretendard"/>
-                <a:ea typeface="Pretendard"/>
-                <a:cs typeface="Pretendard"/>
-              </a:rPr>
-              <a:t>원본보다 많다</a:t>
-            </a:r>
-          </a:p>
-        </p:txBody>
-      </p:sp>
-      <p:sp>
-        <p:nvSpPr>
-          <p:cNvPr id="34" name="Rounded Rectangle 33"/>
-          <p:cNvSpPr/>
-          <p:nvPr/>
-        </p:nvSpPr>
-        <p:spPr>
-          <a:xfrm>
-            <a:off x="5943600" y="5619750"/>
-            <a:ext cx="5082540" cy="647700"/>
+              <a:t>4</a:t>
+            </a:r>
+          </a:p>
+        </p:txBody>
+      </p:sp>
+      <p:sp>
+        <p:nvSpPr>
+          <p:cNvPr id="42" name="Rounded Rectangle 41"/>
+          <p:cNvSpPr/>
+          <p:nvPr/>
+        </p:nvSpPr>
+        <p:spPr>
+          <a:xfrm>
+            <a:off x="2103120" y="5534025"/>
+            <a:ext cx="7002780" cy="619125"/>
           </a:xfrm>
           <a:prstGeom prst="roundRect">
             <a:avLst>
-              <a:gd name="adj" fmla="val 5882"/>
+              <a:gd name="adj" fmla="val 6153"/>
             </a:avLst>
           </a:prstGeom>
           <a:solidFill>
@@ -12342,14 +13271,14 @@
       </p:sp>
       <p:sp>
         <p:nvSpPr>
-          <p:cNvPr id="35" name="TextBox 34"/>
-          <p:cNvSpPr txBox="1"/>
-          <p:nvPr/>
-        </p:nvSpPr>
-        <p:spPr>
-          <a:xfrm>
-            <a:off x="6038850" y="5619750"/>
-            <a:ext cx="4892040" cy="647700"/>
+          <p:cNvPr id="43" name="TextBox 42"/>
+          <p:cNvSpPr txBox="1"/>
+          <p:nvPr/>
+        </p:nvSpPr>
+        <p:spPr>
+          <a:xfrm>
+            <a:off x="2198370" y="5534025"/>
+            <a:ext cx="6812280" cy="619125"/>
           </a:xfrm>
           <a:prstGeom prst="rect">
             <a:avLst/>
@@ -12376,25 +13305,25 @@
                 <a:ea typeface="Pretendard"/>
                 <a:cs typeface="Pretendard"/>
               </a:rPr>
-              <a:t>오른쪽 키에 중복</a:t>
-            </a:r>
-          </a:p>
-        </p:txBody>
-      </p:sp>
-      <p:sp>
-        <p:nvSpPr>
-          <p:cNvPr id="36" name="Rounded Rectangle 35"/>
-          <p:cNvSpPr/>
-          <p:nvPr/>
-        </p:nvSpPr>
-        <p:spPr>
-          <a:xfrm>
-            <a:off x="11064240" y="5619750"/>
-            <a:ext cx="6080760" cy="647700"/>
+              <a:t>변환을 체인으로 파이프라인</a:t>
+            </a:r>
+          </a:p>
+        </p:txBody>
+      </p:sp>
+      <p:sp>
+        <p:nvSpPr>
+          <p:cNvPr id="44" name="Rounded Rectangle 43"/>
+          <p:cNvSpPr/>
+          <p:nvPr/>
+        </p:nvSpPr>
+        <p:spPr>
+          <a:xfrm>
+            <a:off x="9144000" y="5534025"/>
+            <a:ext cx="922020" cy="619125"/>
           </a:xfrm>
           <a:prstGeom prst="roundRect">
             <a:avLst>
-              <a:gd name="adj" fmla="val 5882"/>
+              <a:gd name="adj" fmla="val 6153"/>
             </a:avLst>
           </a:prstGeom>
           <a:solidFill>
@@ -12417,14 +13346,14 @@
       </p:sp>
       <p:sp>
         <p:nvSpPr>
-          <p:cNvPr id="37" name="TextBox 36"/>
-          <p:cNvSpPr txBox="1"/>
-          <p:nvPr/>
-        </p:nvSpPr>
-        <p:spPr>
-          <a:xfrm>
-            <a:off x="11159490" y="5619750"/>
-            <a:ext cx="5890260" cy="647700"/>
+          <p:cNvPr id="45" name="TextBox 44"/>
+          <p:cNvSpPr txBox="1"/>
+          <p:nvPr/>
+        </p:nvSpPr>
+        <p:spPr>
+          <a:xfrm>
+            <a:off x="9239250" y="5534025"/>
+            <a:ext cx="731520" cy="619125"/>
           </a:xfrm>
           <a:prstGeom prst="rect">
             <a:avLst/>
@@ -12451,9 +13380,66 @@
                 <a:ea typeface="Pretendard"/>
                 <a:cs typeface="Pretendard"/>
               </a:rPr>
-              <a:t>count 와 distinct().count()</a:t>
-            </a:r>
-          </a:p>
+              <a:t>10</a:t>
+            </a:r>
+          </a:p>
+        </p:txBody>
+      </p:sp>
+      <p:sp>
+        <p:nvSpPr>
+          <p:cNvPr id="46" name="Rounded Rectangle 45"/>
+          <p:cNvSpPr/>
+          <p:nvPr/>
+        </p:nvSpPr>
+        <p:spPr>
+          <a:xfrm>
+            <a:off x="10104120" y="5534025"/>
+            <a:ext cx="7040880" cy="619125"/>
+          </a:xfrm>
+          <a:prstGeom prst="roundRect">
+            <a:avLst>
+              <a:gd name="adj" fmla="val 6153"/>
+            </a:avLst>
+          </a:prstGeom>
+          <a:solidFill>
+            <a:srgbClr val="FAFBFD"/>
+          </a:solidFill>
+          <a:ln w="9525">
+            <a:solidFill>
+              <a:srgbClr val="DCE1E8"/>
+            </a:solidFill>
+          </a:ln>
+          <a:effectLst/>
+        </p:spPr>
+        <p:txBody>
+          <a:bodyPr rtlCol="0" anchor="ctr" wrap="square"/>
+          <a:lstStyle/>
+          <a:p>
+            <a:pPr algn="ctr"/>
+          </a:p>
+        </p:txBody>
+      </p:sp>
+      <p:sp>
+        <p:nvSpPr>
+          <p:cNvPr id="47" name="TextBox 46"/>
+          <p:cNvSpPr txBox="1"/>
+          <p:nvPr/>
+        </p:nvSpPr>
+        <p:spPr>
+          <a:xfrm>
+            <a:off x="10199370" y="5534025"/>
+            <a:ext cx="6850380" cy="619125"/>
+          </a:xfrm>
+          <a:prstGeom prst="rect">
+            <a:avLst/>
+          </a:prstGeom>
+          <a:noFill/>
+        </p:spPr>
+        <p:txBody>
+          <a:bodyPr wrap="square" lIns="0" rIns="0" tIns="0" bIns="0" anchor="ctr">
+            <a:spAutoFit/>
+          </a:bodyPr>
+          <a:lstStyle/>
           <a:p>
             <a:pPr algn="ctr">
               <a:lnSpc>
@@ -12469,55 +13455,614 @@
                 <a:ea typeface="Pretendard"/>
                 <a:cs typeface="Pretendard"/>
               </a:rPr>
-              <a:t>비교 · 4-3 방식으로 정리</a:t>
-            </a:r>
-          </a:p>
-        </p:txBody>
-      </p:sp>
-      <p:sp>
-        <p:nvSpPr>
-          <p:cNvPr id="38" name="TextBox 37"/>
-          <p:cNvSpPr txBox="1"/>
-          <p:nvPr/>
-        </p:nvSpPr>
-        <p:spPr>
-          <a:xfrm>
-            <a:off x="1143000" y="7620000"/>
-            <a:ext cx="16002000" cy="342900"/>
-          </a:xfrm>
-          <a:prstGeom prst="rect">
-            <a:avLst/>
-          </a:prstGeom>
-          <a:noFill/>
-        </p:spPr>
-        <p:txBody>
-          <a:bodyPr wrap="square" lIns="0" rIns="0" tIns="0" bIns="0" anchor="t">
+              <a:t>SortMergeJoin 읽고 F.broadcast</a:t>
+            </a:r>
+          </a:p>
+        </p:txBody>
+      </p:sp>
+      <p:sp>
+        <p:nvSpPr>
+          <p:cNvPr id="48" name="Rounded Rectangle 47"/>
+          <p:cNvSpPr/>
+          <p:nvPr/>
+        </p:nvSpPr>
+        <p:spPr>
+          <a:xfrm>
+            <a:off x="1143000" y="6229350"/>
+            <a:ext cx="922020" cy="619125"/>
+          </a:xfrm>
+          <a:prstGeom prst="roundRect">
+            <a:avLst>
+              <a:gd name="adj" fmla="val 6153"/>
+            </a:avLst>
+          </a:prstGeom>
+          <a:solidFill>
+            <a:srgbClr val="EDF3FD"/>
+          </a:solidFill>
+          <a:ln w="9525">
+            <a:solidFill>
+              <a:srgbClr val="BFD3F5"/>
+            </a:solidFill>
+          </a:ln>
+          <a:effectLst/>
+        </p:spPr>
+        <p:txBody>
+          <a:bodyPr rtlCol="0" anchor="ctr" wrap="square"/>
+          <a:lstStyle/>
+          <a:p>
+            <a:pPr algn="ctr"/>
+          </a:p>
+        </p:txBody>
+      </p:sp>
+      <p:sp>
+        <p:nvSpPr>
+          <p:cNvPr id="49" name="TextBox 48"/>
+          <p:cNvSpPr txBox="1"/>
+          <p:nvPr/>
+        </p:nvSpPr>
+        <p:spPr>
+          <a:xfrm>
+            <a:off x="1238250" y="6229350"/>
+            <a:ext cx="731520" cy="619125"/>
+          </a:xfrm>
+          <a:prstGeom prst="rect">
+            <a:avLst/>
+          </a:prstGeom>
+          <a:noFill/>
+        </p:spPr>
+        <p:txBody>
+          <a:bodyPr wrap="square" lIns="0" rIns="0" tIns="0" bIns="0" anchor="ctr">
             <a:spAutoFit/>
           </a:bodyPr>
           <a:lstStyle/>
           <a:p>
             <a:pPr algn="l">
               <a:lnSpc>
-                <a:spcPct val="100000"/>
+                <a:spcPct val="115000"/>
               </a:lnSpc>
             </a:pPr>
             <a:r>
               <a:rPr sz="1875" b="1">
                 <a:solidFill>
-                  <a:srgbClr val="7D7D7D"/>
-                </a:solidFill>
-                <a:latin typeface="Pretendard"/>
-                <a:ea typeface="Pretendard"/>
-                <a:cs typeface="Pretendard"/>
-              </a:rPr>
-              <a:t>네 가지 모두 「그 시점의 DataFrame 에 무엇이 있나」를 printSchema() · count() 로 먼저 보면 잡힌다</a:t>
-            </a:r>
-          </a:p>
-        </p:txBody>
-      </p:sp>
-      <p:sp>
-        <p:nvSpPr>
-          <p:cNvPr id="39" name="Rectangle 38"/>
+                  <a:srgbClr val="0D2B5E"/>
+                </a:solidFill>
+                <a:latin typeface="Pretendard"/>
+                <a:ea typeface="Pretendard"/>
+                <a:cs typeface="Pretendard"/>
+              </a:rPr>
+              <a:t>5</a:t>
+            </a:r>
+          </a:p>
+        </p:txBody>
+      </p:sp>
+      <p:sp>
+        <p:nvSpPr>
+          <p:cNvPr id="50" name="Rounded Rectangle 49"/>
+          <p:cNvSpPr/>
+          <p:nvPr/>
+        </p:nvSpPr>
+        <p:spPr>
+          <a:xfrm>
+            <a:off x="2103120" y="6229350"/>
+            <a:ext cx="7002780" cy="619125"/>
+          </a:xfrm>
+          <a:prstGeom prst="roundRect">
+            <a:avLst>
+              <a:gd name="adj" fmla="val 6153"/>
+            </a:avLst>
+          </a:prstGeom>
+          <a:solidFill>
+            <a:srgbClr val="FAFBFD"/>
+          </a:solidFill>
+          <a:ln w="9525">
+            <a:solidFill>
+              <a:srgbClr val="DCE1E8"/>
+            </a:solidFill>
+          </a:ln>
+          <a:effectLst/>
+        </p:spPr>
+        <p:txBody>
+          <a:bodyPr rtlCol="0" anchor="ctr" wrap="square"/>
+          <a:lstStyle/>
+          <a:p>
+            <a:pPr algn="ctr"/>
+          </a:p>
+        </p:txBody>
+      </p:sp>
+      <p:sp>
+        <p:nvSpPr>
+          <p:cNvPr id="51" name="TextBox 50"/>
+          <p:cNvSpPr txBox="1"/>
+          <p:nvPr/>
+        </p:nvSpPr>
+        <p:spPr>
+          <a:xfrm>
+            <a:off x="2198370" y="6229350"/>
+            <a:ext cx="6812280" cy="619125"/>
+          </a:xfrm>
+          <a:prstGeom prst="rect">
+            <a:avLst/>
+          </a:prstGeom>
+          <a:noFill/>
+        </p:spPr>
+        <p:txBody>
+          <a:bodyPr wrap="square" lIns="0" rIns="0" tIns="0" bIns="0" anchor="ctr">
+            <a:spAutoFit/>
+          </a:bodyPr>
+          <a:lstStyle/>
+          <a:p>
+            <a:pPr algn="ctr">
+              <a:lnSpc>
+                <a:spcPct val="115000"/>
+              </a:lnSpc>
+            </a:pPr>
+            <a:r>
+              <a:rPr sz="1875" b="0">
+                <a:solidFill>
+                  <a:srgbClr val="3D3D3D"/>
+                </a:solidFill>
+                <a:latin typeface="Pretendard"/>
+                <a:ea typeface="Pretendard"/>
+                <a:cs typeface="Pretendard"/>
+              </a:rPr>
+              <a:t>조인 키 문자열 — 중복 없음</a:t>
+            </a:r>
+          </a:p>
+        </p:txBody>
+      </p:sp>
+      <p:sp>
+        <p:nvSpPr>
+          <p:cNvPr id="52" name="Rounded Rectangle 51"/>
+          <p:cNvSpPr/>
+          <p:nvPr/>
+        </p:nvSpPr>
+        <p:spPr>
+          <a:xfrm>
+            <a:off x="9144000" y="6229350"/>
+            <a:ext cx="922020" cy="619125"/>
+          </a:xfrm>
+          <a:prstGeom prst="roundRect">
+            <a:avLst>
+              <a:gd name="adj" fmla="val 6153"/>
+            </a:avLst>
+          </a:prstGeom>
+          <a:solidFill>
+            <a:srgbClr val="FAFBFD"/>
+          </a:solidFill>
+          <a:ln w="9525">
+            <a:solidFill>
+              <a:srgbClr val="DCE1E8"/>
+            </a:solidFill>
+          </a:ln>
+          <a:effectLst/>
+        </p:spPr>
+        <p:txBody>
+          <a:bodyPr rtlCol="0" anchor="ctr" wrap="square"/>
+          <a:lstStyle/>
+          <a:p>
+            <a:pPr algn="ctr"/>
+          </a:p>
+        </p:txBody>
+      </p:sp>
+      <p:sp>
+        <p:nvSpPr>
+          <p:cNvPr id="53" name="TextBox 52"/>
+          <p:cNvSpPr txBox="1"/>
+          <p:nvPr/>
+        </p:nvSpPr>
+        <p:spPr>
+          <a:xfrm>
+            <a:off x="9239250" y="6229350"/>
+            <a:ext cx="731520" cy="619125"/>
+          </a:xfrm>
+          <a:prstGeom prst="rect">
+            <a:avLst/>
+          </a:prstGeom>
+          <a:noFill/>
+        </p:spPr>
+        <p:txBody>
+          <a:bodyPr wrap="square" lIns="0" rIns="0" tIns="0" bIns="0" anchor="ctr">
+            <a:spAutoFit/>
+          </a:bodyPr>
+          <a:lstStyle/>
+          <a:p>
+            <a:pPr algn="ctr">
+              <a:lnSpc>
+                <a:spcPct val="115000"/>
+              </a:lnSpc>
+            </a:pPr>
+            <a:r>
+              <a:rPr sz="1875" b="0">
+                <a:solidFill>
+                  <a:srgbClr val="3D3D3D"/>
+                </a:solidFill>
+                <a:latin typeface="Pretendard"/>
+                <a:ea typeface="Pretendard"/>
+                <a:cs typeface="Pretendard"/>
+              </a:rPr>
+              <a:t>11</a:t>
+            </a:r>
+          </a:p>
+        </p:txBody>
+      </p:sp>
+      <p:sp>
+        <p:nvSpPr>
+          <p:cNvPr id="54" name="Rounded Rectangle 53"/>
+          <p:cNvSpPr/>
+          <p:nvPr/>
+        </p:nvSpPr>
+        <p:spPr>
+          <a:xfrm>
+            <a:off x="10104120" y="6229350"/>
+            <a:ext cx="7040880" cy="619125"/>
+          </a:xfrm>
+          <a:prstGeom prst="roundRect">
+            <a:avLst>
+              <a:gd name="adj" fmla="val 6153"/>
+            </a:avLst>
+          </a:prstGeom>
+          <a:solidFill>
+            <a:srgbClr val="FAFBFD"/>
+          </a:solidFill>
+          <a:ln w="9525">
+            <a:solidFill>
+              <a:srgbClr val="DCE1E8"/>
+            </a:solidFill>
+          </a:ln>
+          <a:effectLst/>
+        </p:spPr>
+        <p:txBody>
+          <a:bodyPr rtlCol="0" anchor="ctr" wrap="square"/>
+          <a:lstStyle/>
+          <a:p>
+            <a:pPr algn="ctr"/>
+          </a:p>
+        </p:txBody>
+      </p:sp>
+      <p:sp>
+        <p:nvSpPr>
+          <p:cNvPr id="55" name="TextBox 54"/>
+          <p:cNvSpPr txBox="1"/>
+          <p:nvPr/>
+        </p:nvSpPr>
+        <p:spPr>
+          <a:xfrm>
+            <a:off x="10199370" y="6229350"/>
+            <a:ext cx="6850380" cy="619125"/>
+          </a:xfrm>
+          <a:prstGeom prst="rect">
+            <a:avLst/>
+          </a:prstGeom>
+          <a:noFill/>
+        </p:spPr>
+        <p:txBody>
+          <a:bodyPr wrap="square" lIns="0" rIns="0" tIns="0" bIns="0" anchor="ctr">
+            <a:spAutoFit/>
+          </a:bodyPr>
+          <a:lstStyle/>
+          <a:p>
+            <a:pPr algn="ctr">
+              <a:lnSpc>
+                <a:spcPct val="115000"/>
+              </a:lnSpc>
+            </a:pPr>
+            <a:r>
+              <a:rPr sz="1875" b="0">
+                <a:solidFill>
+                  <a:srgbClr val="3D3D3D"/>
+                </a:solidFill>
+                <a:latin typeface="Pretendard"/>
+                <a:ea typeface="Pretendard"/>
+                <a:cs typeface="Pretendard"/>
+              </a:rPr>
+              <a:t>CTE 로 단계를 나눈 SQL</a:t>
+            </a:r>
+          </a:p>
+        </p:txBody>
+      </p:sp>
+      <p:sp>
+        <p:nvSpPr>
+          <p:cNvPr id="56" name="Rounded Rectangle 55"/>
+          <p:cNvSpPr/>
+          <p:nvPr/>
+        </p:nvSpPr>
+        <p:spPr>
+          <a:xfrm>
+            <a:off x="1143000" y="6924675"/>
+            <a:ext cx="922020" cy="619125"/>
+          </a:xfrm>
+          <a:prstGeom prst="roundRect">
+            <a:avLst>
+              <a:gd name="adj" fmla="val 6153"/>
+            </a:avLst>
+          </a:prstGeom>
+          <a:solidFill>
+            <a:srgbClr val="EDF3FD"/>
+          </a:solidFill>
+          <a:ln w="9525">
+            <a:solidFill>
+              <a:srgbClr val="BFD3F5"/>
+            </a:solidFill>
+          </a:ln>
+          <a:effectLst/>
+        </p:spPr>
+        <p:txBody>
+          <a:bodyPr rtlCol="0" anchor="ctr" wrap="square"/>
+          <a:lstStyle/>
+          <a:p>
+            <a:pPr algn="ctr"/>
+          </a:p>
+        </p:txBody>
+      </p:sp>
+      <p:sp>
+        <p:nvSpPr>
+          <p:cNvPr id="57" name="TextBox 56"/>
+          <p:cNvSpPr txBox="1"/>
+          <p:nvPr/>
+        </p:nvSpPr>
+        <p:spPr>
+          <a:xfrm>
+            <a:off x="1238250" y="6924675"/>
+            <a:ext cx="731520" cy="619125"/>
+          </a:xfrm>
+          <a:prstGeom prst="rect">
+            <a:avLst/>
+          </a:prstGeom>
+          <a:noFill/>
+        </p:spPr>
+        <p:txBody>
+          <a:bodyPr wrap="square" lIns="0" rIns="0" tIns="0" bIns="0" anchor="ctr">
+            <a:spAutoFit/>
+          </a:bodyPr>
+          <a:lstStyle/>
+          <a:p>
+            <a:pPr algn="l">
+              <a:lnSpc>
+                <a:spcPct val="115000"/>
+              </a:lnSpc>
+            </a:pPr>
+            <a:r>
+              <a:rPr sz="1875" b="1">
+                <a:solidFill>
+                  <a:srgbClr val="0D2B5E"/>
+                </a:solidFill>
+                <a:latin typeface="Pretendard"/>
+                <a:ea typeface="Pretendard"/>
+                <a:cs typeface="Pretendard"/>
+              </a:rPr>
+              <a:t>6</a:t>
+            </a:r>
+          </a:p>
+        </p:txBody>
+      </p:sp>
+      <p:sp>
+        <p:nvSpPr>
+          <p:cNvPr id="58" name="Rounded Rectangle 57"/>
+          <p:cNvSpPr/>
+          <p:nvPr/>
+        </p:nvSpPr>
+        <p:spPr>
+          <a:xfrm>
+            <a:off x="2103120" y="6924675"/>
+            <a:ext cx="7002780" cy="619125"/>
+          </a:xfrm>
+          <a:prstGeom prst="roundRect">
+            <a:avLst>
+              <a:gd name="adj" fmla="val 6153"/>
+            </a:avLst>
+          </a:prstGeom>
+          <a:solidFill>
+            <a:srgbClr val="FAFBFD"/>
+          </a:solidFill>
+          <a:ln w="9525">
+            <a:solidFill>
+              <a:srgbClr val="DCE1E8"/>
+            </a:solidFill>
+          </a:ln>
+          <a:effectLst/>
+        </p:spPr>
+        <p:txBody>
+          <a:bodyPr rtlCol="0" anchor="ctr" wrap="square"/>
+          <a:lstStyle/>
+          <a:p>
+            <a:pPr algn="ctr"/>
+          </a:p>
+        </p:txBody>
+      </p:sp>
+      <p:sp>
+        <p:nvSpPr>
+          <p:cNvPr id="59" name="TextBox 58"/>
+          <p:cNvSpPr txBox="1"/>
+          <p:nvPr/>
+        </p:nvSpPr>
+        <p:spPr>
+          <a:xfrm>
+            <a:off x="2198370" y="6924675"/>
+            <a:ext cx="6812280" cy="619125"/>
+          </a:xfrm>
+          <a:prstGeom prst="rect">
+            <a:avLst/>
+          </a:prstGeom>
+          <a:noFill/>
+        </p:spPr>
+        <p:txBody>
+          <a:bodyPr wrap="square" lIns="0" rIns="0" tIns="0" bIns="0" anchor="ctr">
+            <a:spAutoFit/>
+          </a:bodyPr>
+          <a:lstStyle/>
+          <a:p>
+            <a:pPr algn="ctr">
+              <a:lnSpc>
+                <a:spcPct val="115000"/>
+              </a:lnSpc>
+            </a:pPr>
+            <a:r>
+              <a:rPr sz="1875" b="0">
+                <a:solidFill>
+                  <a:srgbClr val="3D3D3D"/>
+                </a:solidFill>
+                <a:latin typeface="Pretendard"/>
+                <a:ea typeface="Pretendard"/>
+                <a:cs typeface="Pretendard"/>
+              </a:rPr>
+              <a:t>조인 전후 행 수·키 고유성</a:t>
+            </a:r>
+          </a:p>
+        </p:txBody>
+      </p:sp>
+      <p:sp>
+        <p:nvSpPr>
+          <p:cNvPr id="60" name="Rounded Rectangle 59"/>
+          <p:cNvSpPr/>
+          <p:nvPr/>
+        </p:nvSpPr>
+        <p:spPr>
+          <a:xfrm>
+            <a:off x="9144000" y="6924675"/>
+            <a:ext cx="922020" cy="619125"/>
+          </a:xfrm>
+          <a:prstGeom prst="roundRect">
+            <a:avLst>
+              <a:gd name="adj" fmla="val 6153"/>
+            </a:avLst>
+          </a:prstGeom>
+          <a:solidFill>
+            <a:srgbClr val="FAFBFD"/>
+          </a:solidFill>
+          <a:ln w="9525">
+            <a:solidFill>
+              <a:srgbClr val="DCE1E8"/>
+            </a:solidFill>
+          </a:ln>
+          <a:effectLst/>
+        </p:spPr>
+        <p:txBody>
+          <a:bodyPr rtlCol="0" anchor="ctr" wrap="square"/>
+          <a:lstStyle/>
+          <a:p>
+            <a:pPr algn="ctr"/>
+          </a:p>
+        </p:txBody>
+      </p:sp>
+      <p:sp>
+        <p:nvSpPr>
+          <p:cNvPr id="61" name="TextBox 60"/>
+          <p:cNvSpPr txBox="1"/>
+          <p:nvPr/>
+        </p:nvSpPr>
+        <p:spPr>
+          <a:xfrm>
+            <a:off x="9239250" y="6924675"/>
+            <a:ext cx="731520" cy="619125"/>
+          </a:xfrm>
+          <a:prstGeom prst="rect">
+            <a:avLst/>
+          </a:prstGeom>
+          <a:noFill/>
+        </p:spPr>
+        <p:txBody>
+          <a:bodyPr wrap="square" lIns="0" rIns="0" tIns="0" bIns="0" anchor="ctr">
+            <a:spAutoFit/>
+          </a:bodyPr>
+          <a:lstStyle/>
+          <a:p>
+            <a:pPr algn="ctr">
+              <a:lnSpc>
+                <a:spcPct val="115000"/>
+              </a:lnSpc>
+            </a:pPr>
+            <a:r>
+              <a:rPr sz="1875" b="0">
+                <a:solidFill>
+                  <a:srgbClr val="3D3D3D"/>
+                </a:solidFill>
+                <a:latin typeface="Pretendard"/>
+                <a:ea typeface="Pretendard"/>
+                <a:cs typeface="Pretendard"/>
+              </a:rPr>
+              <a:t>12</a:t>
+            </a:r>
+          </a:p>
+        </p:txBody>
+      </p:sp>
+      <p:sp>
+        <p:nvSpPr>
+          <p:cNvPr id="62" name="Rounded Rectangle 61"/>
+          <p:cNvSpPr/>
+          <p:nvPr/>
+        </p:nvSpPr>
+        <p:spPr>
+          <a:xfrm>
+            <a:off x="10104120" y="6924675"/>
+            <a:ext cx="7040880" cy="619125"/>
+          </a:xfrm>
+          <a:prstGeom prst="roundRect">
+            <a:avLst>
+              <a:gd name="adj" fmla="val 6153"/>
+            </a:avLst>
+          </a:prstGeom>
+          <a:solidFill>
+            <a:srgbClr val="FAFBFD"/>
+          </a:solidFill>
+          <a:ln w="9525">
+            <a:solidFill>
+              <a:srgbClr val="DCE1E8"/>
+            </a:solidFill>
+          </a:ln>
+          <a:effectLst/>
+        </p:spPr>
+        <p:txBody>
+          <a:bodyPr rtlCol="0" anchor="ctr" wrap="square"/>
+          <a:lstStyle/>
+          <a:p>
+            <a:pPr algn="ctr"/>
+          </a:p>
+        </p:txBody>
+      </p:sp>
+      <p:sp>
+        <p:nvSpPr>
+          <p:cNvPr id="63" name="TextBox 62"/>
+          <p:cNvSpPr txBox="1"/>
+          <p:nvPr/>
+        </p:nvSpPr>
+        <p:spPr>
+          <a:xfrm>
+            <a:off x="10199370" y="6924675"/>
+            <a:ext cx="6850380" cy="619125"/>
+          </a:xfrm>
+          <a:prstGeom prst="rect">
+            <a:avLst/>
+          </a:prstGeom>
+          <a:noFill/>
+        </p:spPr>
+        <p:txBody>
+          <a:bodyPr wrap="square" lIns="0" rIns="0" tIns="0" bIns="0" anchor="ctr">
+            <a:spAutoFit/>
+          </a:bodyPr>
+          <a:lstStyle/>
+          <a:p>
+            <a:pPr algn="ctr">
+              <a:lnSpc>
+                <a:spcPct val="115000"/>
+              </a:lnSpc>
+            </a:pPr>
+            <a:r>
+              <a:rPr sz="1875" b="0">
+                <a:solidFill>
+                  <a:srgbClr val="3D3D3D"/>
+                </a:solidFill>
+                <a:latin typeface="Pretendard"/>
+                <a:ea typeface="Pretendard"/>
+                <a:cs typeface="Pretendard"/>
+              </a:rPr>
+              <a:t>결과를 Iceberg 테이블로 저장</a:t>
+            </a:r>
+          </a:p>
+        </p:txBody>
+      </p:sp>
+      <p:sp>
+        <p:nvSpPr>
+          <p:cNvPr id="64" name="Rectangle 63"/>
           <p:cNvSpPr/>
           <p:nvPr/>
         </p:nvSpPr>
@@ -12547,7 +14092,7 @@
       </p:sp>
       <p:sp>
         <p:nvSpPr>
-          <p:cNvPr id="40" name="TextBox 39"/>
+          <p:cNvPr id="65" name="TextBox 64"/>
           <p:cNvSpPr txBox="1"/>
           <p:nvPr/>
         </p:nvSpPr>
@@ -12588,7 +14133,7 @@
       </p:sp>
       <p:sp>
         <p:nvSpPr>
-          <p:cNvPr id="41" name="TextBox 40"/>
+          <p:cNvPr id="66" name="TextBox 65"/>
           <p:cNvSpPr txBox="1"/>
           <p:nvPr/>
         </p:nvSpPr>
@@ -12647,7 +14192,7 @@
       <p:grpSpPr/>
       <p:sp>
         <p:nvSpPr>
-          <p:cNvPr id="2" name="Oval 1"/>
+          <p:cNvPr id="2" name="deckgen:decor"/>
           <p:cNvSpPr/>
           <p:nvPr/>
         </p:nvSpPr>
@@ -12677,7 +14222,7 @@
       </p:sp>
       <p:sp>
         <p:nvSpPr>
-          <p:cNvPr id="3" name="Oval 2"/>
+          <p:cNvPr id="3" name="deckgen:decor"/>
           <p:cNvSpPr/>
           <p:nvPr/>
         </p:nvSpPr>
@@ -12707,7 +14252,7 @@
       </p:sp>
       <p:sp>
         <p:nvSpPr>
-          <p:cNvPr id="4" name="Oval 3"/>
+          <p:cNvPr id="4" name="deckgen:decor"/>
           <p:cNvSpPr/>
           <p:nvPr/>
         </p:nvSpPr>
@@ -12771,7 +14316,7 @@
                 <a:ea typeface="Pretendard"/>
                 <a:cs typeface="Pretendard"/>
               </a:rPr>
-              <a:t>예상 질문</a:t>
+              <a:t>자주 겪는 오류</a:t>
             </a:r>
           </a:p>
         </p:txBody>
@@ -12812,7 +14357,7 @@
                 <a:ea typeface="Pretendard"/>
                 <a:cs typeface="Pretendard"/>
               </a:rPr>
-              <a:t>자주 나오는 질문 네 가지</a:t>
+              <a:t>증상으로 찾는 원인과 해결 — 여섯 가지</a:t>
             </a:r>
           </a:p>
         </p:txBody>
@@ -12849,18 +14394,306 @@
       </p:sp>
       <p:sp>
         <p:nvSpPr>
-          <p:cNvPr id="8" name="Rounded Rectangle 7"/>
-          <p:cNvSpPr/>
-          <p:nvPr/>
-        </p:nvSpPr>
-        <p:spPr>
-          <a:xfrm>
-            <a:off x="1143000" y="3352800"/>
-            <a:ext cx="16002000" cy="914400"/>
+          <p:cNvPr id="8" name="Rectangle 7"/>
+          <p:cNvSpPr/>
+          <p:nvPr/>
+        </p:nvSpPr>
+        <p:spPr>
+          <a:xfrm>
+            <a:off x="1143000" y="2781300"/>
+            <a:ext cx="5402580" cy="590550"/>
+          </a:xfrm>
+          <a:prstGeom prst="rect">
+            <a:avLst/>
+          </a:prstGeom>
+          <a:solidFill>
+            <a:srgbClr val="0D2B5E"/>
+          </a:solidFill>
+          <a:ln>
+            <a:noFill/>
+          </a:ln>
+          <a:effectLst/>
+        </p:spPr>
+        <p:txBody>
+          <a:bodyPr rtlCol="0" anchor="ctr" wrap="square"/>
+          <a:lstStyle/>
+          <a:p>
+            <a:pPr algn="ctr"/>
+          </a:p>
+        </p:txBody>
+      </p:sp>
+      <p:sp>
+        <p:nvSpPr>
+          <p:cNvPr id="9" name="TextBox 8"/>
+          <p:cNvSpPr txBox="1"/>
+          <p:nvPr/>
+        </p:nvSpPr>
+        <p:spPr>
+          <a:xfrm>
+            <a:off x="1143000" y="2781300"/>
+            <a:ext cx="5402580" cy="590550"/>
+          </a:xfrm>
+          <a:prstGeom prst="rect">
+            <a:avLst/>
+          </a:prstGeom>
+          <a:noFill/>
+        </p:spPr>
+        <p:txBody>
+          <a:bodyPr wrap="square" lIns="0" rIns="0" tIns="0" bIns="0" anchor="ctr">
+            <a:spAutoFit/>
+          </a:bodyPr>
+          <a:lstStyle/>
+          <a:p>
+            <a:pPr algn="ctr">
+              <a:lnSpc>
+                <a:spcPct val="100000"/>
+              </a:lnSpc>
+            </a:pPr>
+            <a:r>
+              <a:rPr sz="2025" b="1">
+                <a:solidFill>
+                  <a:srgbClr val="FFFFFF"/>
+                </a:solidFill>
+                <a:latin typeface="Pretendard"/>
+                <a:ea typeface="Pretendard"/>
+                <a:cs typeface="Pretendard"/>
+              </a:rPr>
+              <a:t>증상</a:t>
+            </a:r>
+          </a:p>
+        </p:txBody>
+      </p:sp>
+      <p:sp>
+        <p:nvSpPr>
+          <p:cNvPr id="10" name="Rectangle 9"/>
+          <p:cNvSpPr/>
+          <p:nvPr/>
+        </p:nvSpPr>
+        <p:spPr>
+          <a:xfrm>
+            <a:off x="6583680" y="2781300"/>
+            <a:ext cx="5082540" cy="590550"/>
+          </a:xfrm>
+          <a:prstGeom prst="rect">
+            <a:avLst/>
+          </a:prstGeom>
+          <a:solidFill>
+            <a:srgbClr val="1E5BC6"/>
+          </a:solidFill>
+          <a:ln>
+            <a:noFill/>
+          </a:ln>
+          <a:effectLst/>
+        </p:spPr>
+        <p:txBody>
+          <a:bodyPr rtlCol="0" anchor="ctr" wrap="square"/>
+          <a:lstStyle/>
+          <a:p>
+            <a:pPr algn="ctr"/>
+          </a:p>
+        </p:txBody>
+      </p:sp>
+      <p:sp>
+        <p:nvSpPr>
+          <p:cNvPr id="11" name="TextBox 10"/>
+          <p:cNvSpPr txBox="1"/>
+          <p:nvPr/>
+        </p:nvSpPr>
+        <p:spPr>
+          <a:xfrm>
+            <a:off x="6583680" y="2781300"/>
+            <a:ext cx="5082540" cy="590550"/>
+          </a:xfrm>
+          <a:prstGeom prst="rect">
+            <a:avLst/>
+          </a:prstGeom>
+          <a:noFill/>
+        </p:spPr>
+        <p:txBody>
+          <a:bodyPr wrap="square" lIns="0" rIns="0" tIns="0" bIns="0" anchor="ctr">
+            <a:spAutoFit/>
+          </a:bodyPr>
+          <a:lstStyle/>
+          <a:p>
+            <a:pPr algn="ctr">
+              <a:lnSpc>
+                <a:spcPct val="100000"/>
+              </a:lnSpc>
+            </a:pPr>
+            <a:r>
+              <a:rPr sz="2025" b="1">
+                <a:solidFill>
+                  <a:srgbClr val="FFFFFF"/>
+                </a:solidFill>
+                <a:latin typeface="Pretendard"/>
+                <a:ea typeface="Pretendard"/>
+                <a:cs typeface="Pretendard"/>
+              </a:rPr>
+              <a:t>원인</a:t>
+            </a:r>
+          </a:p>
+        </p:txBody>
+      </p:sp>
+      <p:sp>
+        <p:nvSpPr>
+          <p:cNvPr id="12" name="Rectangle 11"/>
+          <p:cNvSpPr/>
+          <p:nvPr/>
+        </p:nvSpPr>
+        <p:spPr>
+          <a:xfrm>
+            <a:off x="11704320" y="2781300"/>
+            <a:ext cx="5440680" cy="590550"/>
+          </a:xfrm>
+          <a:prstGeom prst="rect">
+            <a:avLst/>
+          </a:prstGeom>
+          <a:solidFill>
+            <a:srgbClr val="1E5BC6"/>
+          </a:solidFill>
+          <a:ln>
+            <a:noFill/>
+          </a:ln>
+          <a:effectLst/>
+        </p:spPr>
+        <p:txBody>
+          <a:bodyPr rtlCol="0" anchor="ctr" wrap="square"/>
+          <a:lstStyle/>
+          <a:p>
+            <a:pPr algn="ctr"/>
+          </a:p>
+        </p:txBody>
+      </p:sp>
+      <p:sp>
+        <p:nvSpPr>
+          <p:cNvPr id="13" name="TextBox 12"/>
+          <p:cNvSpPr txBox="1"/>
+          <p:nvPr/>
+        </p:nvSpPr>
+        <p:spPr>
+          <a:xfrm>
+            <a:off x="11704320" y="2781300"/>
+            <a:ext cx="5440680" cy="590550"/>
+          </a:xfrm>
+          <a:prstGeom prst="rect">
+            <a:avLst/>
+          </a:prstGeom>
+          <a:noFill/>
+        </p:spPr>
+        <p:txBody>
+          <a:bodyPr wrap="square" lIns="0" rIns="0" tIns="0" bIns="0" anchor="ctr">
+            <a:spAutoFit/>
+          </a:bodyPr>
+          <a:lstStyle/>
+          <a:p>
+            <a:pPr algn="ctr">
+              <a:lnSpc>
+                <a:spcPct val="100000"/>
+              </a:lnSpc>
+            </a:pPr>
+            <a:r>
+              <a:rPr sz="2025" b="1">
+                <a:solidFill>
+                  <a:srgbClr val="FFFFFF"/>
+                </a:solidFill>
+                <a:latin typeface="Pretendard"/>
+                <a:ea typeface="Pretendard"/>
+                <a:cs typeface="Pretendard"/>
+              </a:rPr>
+              <a:t>해결</a:t>
+            </a:r>
+          </a:p>
+        </p:txBody>
+      </p:sp>
+      <p:sp>
+        <p:nvSpPr>
+          <p:cNvPr id="14" name="Rounded Rectangle 13"/>
+          <p:cNvSpPr/>
+          <p:nvPr/>
+        </p:nvSpPr>
+        <p:spPr>
+          <a:xfrm>
+            <a:off x="1143000" y="3448050"/>
+            <a:ext cx="5402580" cy="619125"/>
           </a:xfrm>
           <a:prstGeom prst="roundRect">
             <a:avLst>
-              <a:gd name="adj" fmla="val 5208"/>
+              <a:gd name="adj" fmla="val 6153"/>
+            </a:avLst>
+          </a:prstGeom>
+          <a:solidFill>
+            <a:srgbClr val="EDF3FD"/>
+          </a:solidFill>
+          <a:ln w="9525">
+            <a:solidFill>
+              <a:srgbClr val="BFD3F5"/>
+            </a:solidFill>
+          </a:ln>
+          <a:effectLst/>
+        </p:spPr>
+        <p:txBody>
+          <a:bodyPr rtlCol="0" anchor="ctr" wrap="square"/>
+          <a:lstStyle/>
+          <a:p>
+            <a:pPr algn="ctr"/>
+          </a:p>
+        </p:txBody>
+      </p:sp>
+      <p:sp>
+        <p:nvSpPr>
+          <p:cNvPr id="15" name="TextBox 14"/>
+          <p:cNvSpPr txBox="1"/>
+          <p:nvPr/>
+        </p:nvSpPr>
+        <p:spPr>
+          <a:xfrm>
+            <a:off x="1238250" y="3448050"/>
+            <a:ext cx="5212080" cy="619125"/>
+          </a:xfrm>
+          <a:prstGeom prst="rect">
+            <a:avLst/>
+          </a:prstGeom>
+          <a:noFill/>
+        </p:spPr>
+        <p:txBody>
+          <a:bodyPr wrap="square" lIns="0" rIns="0" tIns="0" bIns="0" anchor="ctr">
+            <a:spAutoFit/>
+          </a:bodyPr>
+          <a:lstStyle/>
+          <a:p>
+            <a:pPr algn="l">
+              <a:lnSpc>
+                <a:spcPct val="115000"/>
+              </a:lnSpc>
+            </a:pPr>
+            <a:r>
+              <a:rPr sz="1875" b="1">
+                <a:solidFill>
+                  <a:srgbClr val="0D2B5E"/>
+                </a:solidFill>
+                <a:latin typeface="Pretendard"/>
+                <a:ea typeface="Pretendard"/>
+                <a:cs typeface="Pretendard"/>
+              </a:rPr>
+              <a:t>cannot resolve 컬럼명</a:t>
+            </a:r>
+          </a:p>
+        </p:txBody>
+      </p:sp>
+      <p:sp>
+        <p:nvSpPr>
+          <p:cNvPr id="16" name="Rounded Rectangle 15"/>
+          <p:cNvSpPr/>
+          <p:nvPr/>
+        </p:nvSpPr>
+        <p:spPr>
+          <a:xfrm>
+            <a:off x="6583680" y="3448050"/>
+            <a:ext cx="5082540" cy="619125"/>
+          </a:xfrm>
+          <a:prstGeom prst="roundRect">
+            <a:avLst>
+              <a:gd name="adj" fmla="val 6153"/>
             </a:avLst>
           </a:prstGeom>
           <a:solidFill>
@@ -12883,152 +14716,30 @@
       </p:sp>
       <p:sp>
         <p:nvSpPr>
-          <p:cNvPr id="9" name="Rectangle 8"/>
-          <p:cNvSpPr/>
-          <p:nvPr/>
-        </p:nvSpPr>
-        <p:spPr>
-          <a:xfrm>
-            <a:off x="1143000" y="3352800"/>
-            <a:ext cx="47625" cy="914400"/>
-          </a:xfrm>
-          <a:prstGeom prst="rect">
-            <a:avLst/>
-          </a:prstGeom>
-          <a:solidFill>
-            <a:srgbClr val="1E5BC6"/>
-          </a:solidFill>
-          <a:ln>
-            <a:noFill/>
-          </a:ln>
-          <a:effectLst/>
-        </p:spPr>
-        <p:txBody>
-          <a:bodyPr rtlCol="0" anchor="ctr" wrap="square"/>
-          <a:lstStyle/>
-          <a:p>
-            <a:pPr algn="ctr"/>
-          </a:p>
-        </p:txBody>
-      </p:sp>
-      <p:sp>
-        <p:nvSpPr>
-          <p:cNvPr id="10" name="Oval 9"/>
-          <p:cNvSpPr/>
-          <p:nvPr/>
-        </p:nvSpPr>
-        <p:spPr>
-          <a:xfrm>
-            <a:off x="1428750" y="3600450"/>
-            <a:ext cx="419100" cy="419100"/>
-          </a:xfrm>
-          <a:prstGeom prst="ellipse">
-            <a:avLst/>
-          </a:prstGeom>
-          <a:solidFill>
-            <a:srgbClr val="0D2B5E"/>
-          </a:solidFill>
-          <a:ln>
-            <a:noFill/>
-          </a:ln>
-          <a:effectLst/>
-        </p:spPr>
-        <p:txBody>
-          <a:bodyPr rtlCol="0" anchor="ctr" wrap="square"/>
-          <a:lstStyle/>
-          <a:p>
-            <a:pPr algn="ctr"/>
-          </a:p>
-        </p:txBody>
-      </p:sp>
-      <p:sp>
-        <p:nvSpPr>
-          <p:cNvPr id="11" name="TextBox 10"/>
-          <p:cNvSpPr txBox="1"/>
-          <p:nvPr/>
-        </p:nvSpPr>
-        <p:spPr>
-          <a:xfrm>
-            <a:off x="1428750" y="3667125"/>
-            <a:ext cx="419100" cy="304800"/>
-          </a:xfrm>
-          <a:prstGeom prst="rect">
-            <a:avLst/>
-          </a:prstGeom>
-          <a:noFill/>
-        </p:spPr>
-        <p:txBody>
-          <a:bodyPr wrap="square" lIns="0" rIns="0" tIns="0" bIns="0" anchor="t">
+          <p:cNvPr id="17" name="TextBox 16"/>
+          <p:cNvSpPr txBox="1"/>
+          <p:nvPr/>
+        </p:nvSpPr>
+        <p:spPr>
+          <a:xfrm>
+            <a:off x="6678930" y="3448050"/>
+            <a:ext cx="4892040" cy="619125"/>
+          </a:xfrm>
+          <a:prstGeom prst="rect">
+            <a:avLst/>
+          </a:prstGeom>
+          <a:noFill/>
+        </p:spPr>
+        <p:txBody>
+          <a:bodyPr wrap="square" lIns="0" rIns="0" tIns="0" bIns="0" anchor="ctr">
             <a:spAutoFit/>
           </a:bodyPr>
           <a:lstStyle/>
           <a:p>
             <a:pPr algn="ctr">
               <a:lnSpc>
-                <a:spcPct val="100000"/>
-              </a:lnSpc>
-            </a:pPr>
-            <a:r>
-              <a:rPr sz="1875" b="1">
-                <a:solidFill>
-                  <a:srgbClr val="FFFFFF"/>
-                </a:solidFill>
-                <a:latin typeface="Pretendard"/>
-                <a:ea typeface="Pretendard"/>
-                <a:cs typeface="Pretendard"/>
-              </a:rPr>
-              <a:t>1</a:t>
-            </a:r>
-          </a:p>
-        </p:txBody>
-      </p:sp>
-      <p:sp>
-        <p:nvSpPr>
-          <p:cNvPr id="12" name="TextBox 11"/>
-          <p:cNvSpPr txBox="1"/>
-          <p:nvPr/>
-        </p:nvSpPr>
-        <p:spPr>
-          <a:xfrm>
-            <a:off x="2057400" y="3448050"/>
-            <a:ext cx="14763750" cy="723900"/>
-          </a:xfrm>
-          <a:prstGeom prst="rect">
-            <a:avLst/>
-          </a:prstGeom>
-          <a:noFill/>
-        </p:spPr>
-        <p:txBody>
-          <a:bodyPr wrap="square" lIns="0" rIns="0" tIns="0" bIns="0" anchor="ctr">
-            <a:spAutoFit/>
-          </a:bodyPr>
-          <a:lstStyle/>
-          <a:p>
-            <a:pPr>
-              <a:lnSpc>
-                <a:spcPct val="120000"/>
-              </a:lnSpc>
-            </a:pPr>
-            <a:r>
-              <a:rPr sz="2175" b="1">
-                <a:solidFill>
-                  <a:srgbClr val="0D2B5E"/>
-                </a:solidFill>
-                <a:latin typeface="Pretendard"/>
-                <a:ea typeface="Pretendard"/>
-                <a:cs typeface="Pretendard"/>
-              </a:rPr>
-              <a:t>API 와 SQL 중 뭘 배워야 하나요?</a:t>
-            </a:r>
-          </a:p>
-          <a:p>
-            <a:pPr>
-              <a:lnSpc>
-                <a:spcPct val="130000"/>
-              </a:lnSpc>
-              <a:spcBef>
-                <a:spcPts val="300"/>
-              </a:spcBef>
+                <a:spcPct val="115000"/>
+              </a:lnSpc>
             </a:pPr>
             <a:r>
               <a:rPr sz="1875" b="0">
@@ -13039,25 +14750,25 @@
                 <a:ea typeface="Pretendard"/>
                 <a:cs typeface="Pretendard"/>
               </a:rPr>
-              <a:t>둘 다 — SQL 은 2주차 MySQL · 3주차 DuckDB · 4주차 Trino 에서도 쓰이니 투자 대비 효과가 크다</a:t>
-            </a:r>
-          </a:p>
-        </p:txBody>
-      </p:sp>
-      <p:sp>
-        <p:nvSpPr>
-          <p:cNvPr id="13" name="Rounded Rectangle 12"/>
-          <p:cNvSpPr/>
-          <p:nvPr/>
-        </p:nvSpPr>
-        <p:spPr>
-          <a:xfrm>
-            <a:off x="1143000" y="4400550"/>
-            <a:ext cx="16002000" cy="914400"/>
+              <a:t>오타 · 가공 전 DataFrame</a:t>
+            </a:r>
+          </a:p>
+        </p:txBody>
+      </p:sp>
+      <p:sp>
+        <p:nvSpPr>
+          <p:cNvPr id="18" name="Rounded Rectangle 17"/>
+          <p:cNvSpPr/>
+          <p:nvPr/>
+        </p:nvSpPr>
+        <p:spPr>
+          <a:xfrm>
+            <a:off x="11704320" y="3448050"/>
+            <a:ext cx="5440680" cy="619125"/>
           </a:xfrm>
           <a:prstGeom prst="roundRect">
             <a:avLst>
-              <a:gd name="adj" fmla="val 5208"/>
+              <a:gd name="adj" fmla="val 6153"/>
             </a:avLst>
           </a:prstGeom>
           <a:solidFill>
@@ -13080,152 +14791,30 @@
       </p:sp>
       <p:sp>
         <p:nvSpPr>
-          <p:cNvPr id="14" name="Rectangle 13"/>
-          <p:cNvSpPr/>
-          <p:nvPr/>
-        </p:nvSpPr>
-        <p:spPr>
-          <a:xfrm>
-            <a:off x="1143000" y="4400550"/>
-            <a:ext cx="47625" cy="914400"/>
-          </a:xfrm>
-          <a:prstGeom prst="rect">
-            <a:avLst/>
-          </a:prstGeom>
-          <a:solidFill>
-            <a:srgbClr val="1E5BC6"/>
-          </a:solidFill>
-          <a:ln>
-            <a:noFill/>
-          </a:ln>
-          <a:effectLst/>
-        </p:spPr>
-        <p:txBody>
-          <a:bodyPr rtlCol="0" anchor="ctr" wrap="square"/>
-          <a:lstStyle/>
-          <a:p>
-            <a:pPr algn="ctr"/>
-          </a:p>
-        </p:txBody>
-      </p:sp>
-      <p:sp>
-        <p:nvSpPr>
-          <p:cNvPr id="15" name="Oval 14"/>
-          <p:cNvSpPr/>
-          <p:nvPr/>
-        </p:nvSpPr>
-        <p:spPr>
-          <a:xfrm>
-            <a:off x="1428750" y="4648200"/>
-            <a:ext cx="419100" cy="419100"/>
-          </a:xfrm>
-          <a:prstGeom prst="ellipse">
-            <a:avLst/>
-          </a:prstGeom>
-          <a:solidFill>
-            <a:srgbClr val="0D2B5E"/>
-          </a:solidFill>
-          <a:ln>
-            <a:noFill/>
-          </a:ln>
-          <a:effectLst/>
-        </p:spPr>
-        <p:txBody>
-          <a:bodyPr rtlCol="0" anchor="ctr" wrap="square"/>
-          <a:lstStyle/>
-          <a:p>
-            <a:pPr algn="ctr"/>
-          </a:p>
-        </p:txBody>
-      </p:sp>
-      <p:sp>
-        <p:nvSpPr>
-          <p:cNvPr id="16" name="TextBox 15"/>
-          <p:cNvSpPr txBox="1"/>
-          <p:nvPr/>
-        </p:nvSpPr>
-        <p:spPr>
-          <a:xfrm>
-            <a:off x="1428750" y="4714875"/>
-            <a:ext cx="419100" cy="304800"/>
-          </a:xfrm>
-          <a:prstGeom prst="rect">
-            <a:avLst/>
-          </a:prstGeom>
-          <a:noFill/>
-        </p:spPr>
-        <p:txBody>
-          <a:bodyPr wrap="square" lIns="0" rIns="0" tIns="0" bIns="0" anchor="t">
+          <p:cNvPr id="19" name="TextBox 18"/>
+          <p:cNvSpPr txBox="1"/>
+          <p:nvPr/>
+        </p:nvSpPr>
+        <p:spPr>
+          <a:xfrm>
+            <a:off x="11799570" y="3448050"/>
+            <a:ext cx="5250180" cy="619125"/>
+          </a:xfrm>
+          <a:prstGeom prst="rect">
+            <a:avLst/>
+          </a:prstGeom>
+          <a:noFill/>
+        </p:spPr>
+        <p:txBody>
+          <a:bodyPr wrap="square" lIns="0" rIns="0" tIns="0" bIns="0" anchor="ctr">
             <a:spAutoFit/>
           </a:bodyPr>
           <a:lstStyle/>
           <a:p>
             <a:pPr algn="ctr">
               <a:lnSpc>
-                <a:spcPct val="100000"/>
-              </a:lnSpc>
-            </a:pPr>
-            <a:r>
-              <a:rPr sz="1875" b="1">
-                <a:solidFill>
-                  <a:srgbClr val="FFFFFF"/>
-                </a:solidFill>
-                <a:latin typeface="Pretendard"/>
-                <a:ea typeface="Pretendard"/>
-                <a:cs typeface="Pretendard"/>
-              </a:rPr>
-              <a:t>2</a:t>
-            </a:r>
-          </a:p>
-        </p:txBody>
-      </p:sp>
-      <p:sp>
-        <p:nvSpPr>
-          <p:cNvPr id="17" name="TextBox 16"/>
-          <p:cNvSpPr txBox="1"/>
-          <p:nvPr/>
-        </p:nvSpPr>
-        <p:spPr>
-          <a:xfrm>
-            <a:off x="2057400" y="4495800"/>
-            <a:ext cx="14763750" cy="723900"/>
-          </a:xfrm>
-          <a:prstGeom prst="rect">
-            <a:avLst/>
-          </a:prstGeom>
-          <a:noFill/>
-        </p:spPr>
-        <p:txBody>
-          <a:bodyPr wrap="square" lIns="0" rIns="0" tIns="0" bIns="0" anchor="ctr">
-            <a:spAutoFit/>
-          </a:bodyPr>
-          <a:lstStyle/>
-          <a:p>
-            <a:pPr>
-              <a:lnSpc>
-                <a:spcPct val="120000"/>
-              </a:lnSpc>
-            </a:pPr>
-            <a:r>
-              <a:rPr sz="2175" b="1">
-                <a:solidFill>
-                  <a:srgbClr val="0D2B5E"/>
-                </a:solidFill>
-                <a:latin typeface="Pretendard"/>
-                <a:ea typeface="Pretendard"/>
-                <a:cs typeface="Pretendard"/>
-              </a:rPr>
-              <a:t>임시 뷰와 Iceberg 테이블은 뭐가 다른가요?</a:t>
-            </a:r>
-          </a:p>
-          <a:p>
-            <a:pPr>
-              <a:lnSpc>
-                <a:spcPct val="130000"/>
-              </a:lnSpc>
-              <a:spcBef>
-                <a:spcPts val="300"/>
-              </a:spcBef>
+                <a:spcPct val="115000"/>
+              </a:lnSpc>
             </a:pPr>
             <a:r>
               <a:rPr sz="1875" b="0">
@@ -13236,25 +14825,100 @@
                 <a:ea typeface="Pretendard"/>
                 <a:cs typeface="Pretendard"/>
               </a:rPr>
-              <a:t>임시 뷰는 세션이 끝나면 사라진다 — Iceberg 테이블은 MinIO 에 파일로 남는다</a:t>
-            </a:r>
-          </a:p>
-        </p:txBody>
-      </p:sp>
-      <p:sp>
-        <p:nvSpPr>
-          <p:cNvPr id="18" name="Rounded Rectangle 17"/>
-          <p:cNvSpPr/>
-          <p:nvPr/>
-        </p:nvSpPr>
-        <p:spPr>
-          <a:xfrm>
-            <a:off x="1143000" y="5448300"/>
-            <a:ext cx="16002000" cy="914400"/>
+              <a:t>직전 DataFrame printSchema()</a:t>
+            </a:r>
+          </a:p>
+        </p:txBody>
+      </p:sp>
+      <p:sp>
+        <p:nvSpPr>
+          <p:cNvPr id="20" name="Rounded Rectangle 19"/>
+          <p:cNvSpPr/>
+          <p:nvPr/>
+        </p:nvSpPr>
+        <p:spPr>
+          <a:xfrm>
+            <a:off x="1143000" y="4143375"/>
+            <a:ext cx="5402580" cy="619125"/>
           </a:xfrm>
           <a:prstGeom prst="roundRect">
             <a:avLst>
-              <a:gd name="adj" fmla="val 5208"/>
+              <a:gd name="adj" fmla="val 6153"/>
+            </a:avLst>
+          </a:prstGeom>
+          <a:solidFill>
+            <a:srgbClr val="EDF3FD"/>
+          </a:solidFill>
+          <a:ln w="9525">
+            <a:solidFill>
+              <a:srgbClr val="BFD3F5"/>
+            </a:solidFill>
+          </a:ln>
+          <a:effectLst/>
+        </p:spPr>
+        <p:txBody>
+          <a:bodyPr rtlCol="0" anchor="ctr" wrap="square"/>
+          <a:lstStyle/>
+          <a:p>
+            <a:pPr algn="ctr"/>
+          </a:p>
+        </p:txBody>
+      </p:sp>
+      <p:sp>
+        <p:nvSpPr>
+          <p:cNvPr id="21" name="TextBox 20"/>
+          <p:cNvSpPr txBox="1"/>
+          <p:nvPr/>
+        </p:nvSpPr>
+        <p:spPr>
+          <a:xfrm>
+            <a:off x="1238250" y="4143375"/>
+            <a:ext cx="5212080" cy="619125"/>
+          </a:xfrm>
+          <a:prstGeom prst="rect">
+            <a:avLst/>
+          </a:prstGeom>
+          <a:noFill/>
+        </p:spPr>
+        <p:txBody>
+          <a:bodyPr wrap="square" lIns="0" rIns="0" tIns="0" bIns="0" anchor="ctr">
+            <a:spAutoFit/>
+          </a:bodyPr>
+          <a:lstStyle/>
+          <a:p>
+            <a:pPr algn="l">
+              <a:lnSpc>
+                <a:spcPct val="115000"/>
+              </a:lnSpc>
+            </a:pPr>
+            <a:r>
+              <a:rPr sz="1875" b="1">
+                <a:solidFill>
+                  <a:srgbClr val="0D2B5E"/>
+                </a:solidFill>
+                <a:latin typeface="Pretendard"/>
+                <a:ea typeface="Pretendard"/>
+                <a:cs typeface="Pretendard"/>
+              </a:rPr>
+              <a:t>product_id is ambiguous</a:t>
+            </a:r>
+          </a:p>
+        </p:txBody>
+      </p:sp>
+      <p:sp>
+        <p:nvSpPr>
+          <p:cNvPr id="22" name="Rounded Rectangle 21"/>
+          <p:cNvSpPr/>
+          <p:nvPr/>
+        </p:nvSpPr>
+        <p:spPr>
+          <a:xfrm>
+            <a:off x="6583680" y="4143375"/>
+            <a:ext cx="5082540" cy="619125"/>
+          </a:xfrm>
+          <a:prstGeom prst="roundRect">
+            <a:avLst>
+              <a:gd name="adj" fmla="val 6153"/>
             </a:avLst>
           </a:prstGeom>
           <a:solidFill>
@@ -13277,152 +14941,30 @@
       </p:sp>
       <p:sp>
         <p:nvSpPr>
-          <p:cNvPr id="19" name="Rectangle 18"/>
-          <p:cNvSpPr/>
-          <p:nvPr/>
-        </p:nvSpPr>
-        <p:spPr>
-          <a:xfrm>
-            <a:off x="1143000" y="5448300"/>
-            <a:ext cx="47625" cy="914400"/>
-          </a:xfrm>
-          <a:prstGeom prst="rect">
-            <a:avLst/>
-          </a:prstGeom>
-          <a:solidFill>
-            <a:srgbClr val="1E5BC6"/>
-          </a:solidFill>
-          <a:ln>
-            <a:noFill/>
-          </a:ln>
-          <a:effectLst/>
-        </p:spPr>
-        <p:txBody>
-          <a:bodyPr rtlCol="0" anchor="ctr" wrap="square"/>
-          <a:lstStyle/>
-          <a:p>
-            <a:pPr algn="ctr"/>
-          </a:p>
-        </p:txBody>
-      </p:sp>
-      <p:sp>
-        <p:nvSpPr>
-          <p:cNvPr id="20" name="Oval 19"/>
-          <p:cNvSpPr/>
-          <p:nvPr/>
-        </p:nvSpPr>
-        <p:spPr>
-          <a:xfrm>
-            <a:off x="1428750" y="5695950"/>
-            <a:ext cx="419100" cy="419100"/>
-          </a:xfrm>
-          <a:prstGeom prst="ellipse">
-            <a:avLst/>
-          </a:prstGeom>
-          <a:solidFill>
-            <a:srgbClr val="0D2B5E"/>
-          </a:solidFill>
-          <a:ln>
-            <a:noFill/>
-          </a:ln>
-          <a:effectLst/>
-        </p:spPr>
-        <p:txBody>
-          <a:bodyPr rtlCol="0" anchor="ctr" wrap="square"/>
-          <a:lstStyle/>
-          <a:p>
-            <a:pPr algn="ctr"/>
-          </a:p>
-        </p:txBody>
-      </p:sp>
-      <p:sp>
-        <p:nvSpPr>
-          <p:cNvPr id="21" name="TextBox 20"/>
-          <p:cNvSpPr txBox="1"/>
-          <p:nvPr/>
-        </p:nvSpPr>
-        <p:spPr>
-          <a:xfrm>
-            <a:off x="1428750" y="5762625"/>
-            <a:ext cx="419100" cy="304800"/>
-          </a:xfrm>
-          <a:prstGeom prst="rect">
-            <a:avLst/>
-          </a:prstGeom>
-          <a:noFill/>
-        </p:spPr>
-        <p:txBody>
-          <a:bodyPr wrap="square" lIns="0" rIns="0" tIns="0" bIns="0" anchor="t">
+          <p:cNvPr id="23" name="TextBox 22"/>
+          <p:cNvSpPr txBox="1"/>
+          <p:nvPr/>
+        </p:nvSpPr>
+        <p:spPr>
+          <a:xfrm>
+            <a:off x="6678930" y="4143375"/>
+            <a:ext cx="4892040" cy="619125"/>
+          </a:xfrm>
+          <a:prstGeom prst="rect">
+            <a:avLst/>
+          </a:prstGeom>
+          <a:noFill/>
+        </p:spPr>
+        <p:txBody>
+          <a:bodyPr wrap="square" lIns="0" rIns="0" tIns="0" bIns="0" anchor="ctr">
             <a:spAutoFit/>
           </a:bodyPr>
           <a:lstStyle/>
           <a:p>
             <a:pPr algn="ctr">
               <a:lnSpc>
-                <a:spcPct val="100000"/>
-              </a:lnSpc>
-            </a:pPr>
-            <a:r>
-              <a:rPr sz="1875" b="1">
-                <a:solidFill>
-                  <a:srgbClr val="FFFFFF"/>
-                </a:solidFill>
-                <a:latin typeface="Pretendard"/>
-                <a:ea typeface="Pretendard"/>
-                <a:cs typeface="Pretendard"/>
-              </a:rPr>
-              <a:t>3</a:t>
-            </a:r>
-          </a:p>
-        </p:txBody>
-      </p:sp>
-      <p:sp>
-        <p:nvSpPr>
-          <p:cNvPr id="22" name="TextBox 21"/>
-          <p:cNvSpPr txBox="1"/>
-          <p:nvPr/>
-        </p:nvSpPr>
-        <p:spPr>
-          <a:xfrm>
-            <a:off x="2057400" y="5543550"/>
-            <a:ext cx="14763750" cy="723900"/>
-          </a:xfrm>
-          <a:prstGeom prst="rect">
-            <a:avLst/>
-          </a:prstGeom>
-          <a:noFill/>
-        </p:spPr>
-        <p:txBody>
-          <a:bodyPr wrap="square" lIns="0" rIns="0" tIns="0" bIns="0" anchor="ctr">
-            <a:spAutoFit/>
-          </a:bodyPr>
-          <a:lstStyle/>
-          <a:p>
-            <a:pPr>
-              <a:lnSpc>
-                <a:spcPct val="120000"/>
-              </a:lnSpc>
-            </a:pPr>
-            <a:r>
-              <a:rPr sz="2175" b="1">
-                <a:solidFill>
-                  <a:srgbClr val="0D2B5E"/>
-                </a:solidFill>
-                <a:latin typeface="Pretendard"/>
-                <a:ea typeface="Pretendard"/>
-                <a:cs typeface="Pretendard"/>
-              </a:rPr>
-              <a:t>F.col 없이 문자열로 써도 되나요?</a:t>
-            </a:r>
-          </a:p>
-          <a:p>
-            <a:pPr>
-              <a:lnSpc>
-                <a:spcPct val="130000"/>
-              </a:lnSpc>
-              <a:spcBef>
-                <a:spcPts val="300"/>
-              </a:spcBef>
+                <a:spcPct val="115000"/>
+              </a:lnSpc>
             </a:pPr>
             <a:r>
               <a:rPr sz="1875" b="0">
@@ -13433,25 +14975,25 @@
                 <a:ea typeface="Pretendard"/>
                 <a:cs typeface="Pretendard"/>
               </a:rPr>
-              <a:t>간단한 조건은 된다 — 이름에 공백이 있거나 복잡한 식에서는 F.col 이 안전</a:t>
-            </a:r>
-          </a:p>
-        </p:txBody>
-      </p:sp>
-      <p:sp>
-        <p:nvSpPr>
-          <p:cNvPr id="23" name="Rounded Rectangle 22"/>
-          <p:cNvSpPr/>
-          <p:nvPr/>
-        </p:nvSpPr>
-        <p:spPr>
-          <a:xfrm>
-            <a:off x="1143000" y="6496050"/>
-            <a:ext cx="16002000" cy="914400"/>
+              <a:t>양쪽에 같은 이름 컬럼</a:t>
+            </a:r>
+          </a:p>
+        </p:txBody>
+      </p:sp>
+      <p:sp>
+        <p:nvSpPr>
+          <p:cNvPr id="24" name="Rounded Rectangle 23"/>
+          <p:cNvSpPr/>
+          <p:nvPr/>
+        </p:nvSpPr>
+        <p:spPr>
+          <a:xfrm>
+            <a:off x="11704320" y="4143375"/>
+            <a:ext cx="5440680" cy="619125"/>
           </a:xfrm>
           <a:prstGeom prst="roundRect">
             <a:avLst>
-              <a:gd name="adj" fmla="val 5208"/>
+              <a:gd name="adj" fmla="val 6153"/>
             </a:avLst>
           </a:prstGeom>
           <a:solidFill>
@@ -13474,20 +15016,1002 @@
       </p:sp>
       <p:sp>
         <p:nvSpPr>
-          <p:cNvPr id="24" name="Rectangle 23"/>
-          <p:cNvSpPr/>
-          <p:nvPr/>
-        </p:nvSpPr>
-        <p:spPr>
-          <a:xfrm>
-            <a:off x="1143000" y="6496050"/>
-            <a:ext cx="47625" cy="914400"/>
-          </a:xfrm>
-          <a:prstGeom prst="rect">
-            <a:avLst/>
-          </a:prstGeom>
-          <a:solidFill>
-            <a:srgbClr val="1E5BC6"/>
+          <p:cNvPr id="25" name="TextBox 24"/>
+          <p:cNvSpPr txBox="1"/>
+          <p:nvPr/>
+        </p:nvSpPr>
+        <p:spPr>
+          <a:xfrm>
+            <a:off x="11799570" y="4143375"/>
+            <a:ext cx="5250180" cy="619125"/>
+          </a:xfrm>
+          <a:prstGeom prst="rect">
+            <a:avLst/>
+          </a:prstGeom>
+          <a:noFill/>
+        </p:spPr>
+        <p:txBody>
+          <a:bodyPr wrap="square" lIns="0" rIns="0" tIns="0" bIns="0" anchor="ctr">
+            <a:spAutoFit/>
+          </a:bodyPr>
+          <a:lstStyle/>
+          <a:p>
+            <a:pPr algn="ctr">
+              <a:lnSpc>
+                <a:spcPct val="115000"/>
+              </a:lnSpc>
+            </a:pPr>
+            <a:r>
+              <a:rPr sz="1875" b="0">
+                <a:solidFill>
+                  <a:srgbClr val="3D3D3D"/>
+                </a:solidFill>
+                <a:latin typeface="Pretendard"/>
+                <a:ea typeface="Pretendard"/>
+                <a:cs typeface="Pretendard"/>
+              </a:rPr>
+              <a:t>on="product_id" · alias</a:t>
+            </a:r>
+          </a:p>
+        </p:txBody>
+      </p:sp>
+      <p:sp>
+        <p:nvSpPr>
+          <p:cNvPr id="26" name="Rounded Rectangle 25"/>
+          <p:cNvSpPr/>
+          <p:nvPr/>
+        </p:nvSpPr>
+        <p:spPr>
+          <a:xfrm>
+            <a:off x="1143000" y="4838700"/>
+            <a:ext cx="5402580" cy="619125"/>
+          </a:xfrm>
+          <a:prstGeom prst="roundRect">
+            <a:avLst>
+              <a:gd name="adj" fmla="val 6153"/>
+            </a:avLst>
+          </a:prstGeom>
+          <a:solidFill>
+            <a:srgbClr val="EDF3FD"/>
+          </a:solidFill>
+          <a:ln w="9525">
+            <a:solidFill>
+              <a:srgbClr val="BFD3F5"/>
+            </a:solidFill>
+          </a:ln>
+          <a:effectLst/>
+        </p:spPr>
+        <p:txBody>
+          <a:bodyPr rtlCol="0" anchor="ctr" wrap="square"/>
+          <a:lstStyle/>
+          <a:p>
+            <a:pPr algn="ctr"/>
+          </a:p>
+        </p:txBody>
+      </p:sp>
+      <p:sp>
+        <p:nvSpPr>
+          <p:cNvPr id="27" name="TextBox 26"/>
+          <p:cNvSpPr txBox="1"/>
+          <p:nvPr/>
+        </p:nvSpPr>
+        <p:spPr>
+          <a:xfrm>
+            <a:off x="1238250" y="4838700"/>
+            <a:ext cx="5212080" cy="619125"/>
+          </a:xfrm>
+          <a:prstGeom prst="rect">
+            <a:avLst/>
+          </a:prstGeom>
+          <a:noFill/>
+        </p:spPr>
+        <p:txBody>
+          <a:bodyPr wrap="square" lIns="0" rIns="0" tIns="0" bIns="0" anchor="ctr">
+            <a:spAutoFit/>
+          </a:bodyPr>
+          <a:lstStyle/>
+          <a:p>
+            <a:pPr algn="l">
+              <a:lnSpc>
+                <a:spcPct val="115000"/>
+              </a:lnSpc>
+            </a:pPr>
+            <a:r>
+              <a:rPr sz="1875" b="1">
+                <a:solidFill>
+                  <a:srgbClr val="0D2B5E"/>
+                </a:solidFill>
+                <a:latin typeface="Pretendard"/>
+                <a:ea typeface="Pretendard"/>
+                <a:cs typeface="Pretendard"/>
+              </a:rPr>
+              <a:t>결과 없음 · …으로 잘림</a:t>
+            </a:r>
+          </a:p>
+        </p:txBody>
+      </p:sp>
+      <p:sp>
+        <p:nvSpPr>
+          <p:cNvPr id="28" name="Rounded Rectangle 27"/>
+          <p:cNvSpPr/>
+          <p:nvPr/>
+        </p:nvSpPr>
+        <p:spPr>
+          <a:xfrm>
+            <a:off x="6583680" y="4838700"/>
+            <a:ext cx="5082540" cy="619125"/>
+          </a:xfrm>
+          <a:prstGeom prst="roundRect">
+            <a:avLst>
+              <a:gd name="adj" fmla="val 6153"/>
+            </a:avLst>
+          </a:prstGeom>
+          <a:solidFill>
+            <a:srgbClr val="FAFBFD"/>
+          </a:solidFill>
+          <a:ln w="9525">
+            <a:solidFill>
+              <a:srgbClr val="DCE1E8"/>
+            </a:solidFill>
+          </a:ln>
+          <a:effectLst/>
+        </p:spPr>
+        <p:txBody>
+          <a:bodyPr rtlCol="0" anchor="ctr" wrap="square"/>
+          <a:lstStyle/>
+          <a:p>
+            <a:pPr algn="ctr"/>
+          </a:p>
+        </p:txBody>
+      </p:sp>
+      <p:sp>
+        <p:nvSpPr>
+          <p:cNvPr id="29" name="TextBox 28"/>
+          <p:cNvSpPr txBox="1"/>
+          <p:nvPr/>
+        </p:nvSpPr>
+        <p:spPr>
+          <a:xfrm>
+            <a:off x="6678930" y="4838700"/>
+            <a:ext cx="4892040" cy="619125"/>
+          </a:xfrm>
+          <a:prstGeom prst="rect">
+            <a:avLst/>
+          </a:prstGeom>
+          <a:noFill/>
+        </p:spPr>
+        <p:txBody>
+          <a:bodyPr wrap="square" lIns="0" rIns="0" tIns="0" bIns="0" anchor="ctr">
+            <a:spAutoFit/>
+          </a:bodyPr>
+          <a:lstStyle/>
+          <a:p>
+            <a:pPr algn="ctr">
+              <a:lnSpc>
+                <a:spcPct val="115000"/>
+              </a:lnSpc>
+            </a:pPr>
+            <a:r>
+              <a:rPr sz="1875" b="0">
+                <a:solidFill>
+                  <a:srgbClr val="3D3D3D"/>
+                </a:solidFill>
+                <a:latin typeface="Pretendard"/>
+                <a:ea typeface="Pretendard"/>
+                <a:cs typeface="Pretendard"/>
+              </a:rPr>
+              <a:t>action 없음 · show 기본값</a:t>
+            </a:r>
+          </a:p>
+        </p:txBody>
+      </p:sp>
+      <p:sp>
+        <p:nvSpPr>
+          <p:cNvPr id="30" name="Rounded Rectangle 29"/>
+          <p:cNvSpPr/>
+          <p:nvPr/>
+        </p:nvSpPr>
+        <p:spPr>
+          <a:xfrm>
+            <a:off x="11704320" y="4838700"/>
+            <a:ext cx="5440680" cy="619125"/>
+          </a:xfrm>
+          <a:prstGeom prst="roundRect">
+            <a:avLst>
+              <a:gd name="adj" fmla="val 6153"/>
+            </a:avLst>
+          </a:prstGeom>
+          <a:solidFill>
+            <a:srgbClr val="FAFBFD"/>
+          </a:solidFill>
+          <a:ln w="9525">
+            <a:solidFill>
+              <a:srgbClr val="DCE1E8"/>
+            </a:solidFill>
+          </a:ln>
+          <a:effectLst/>
+        </p:spPr>
+        <p:txBody>
+          <a:bodyPr rtlCol="0" anchor="ctr" wrap="square"/>
+          <a:lstStyle/>
+          <a:p>
+            <a:pPr algn="ctr"/>
+          </a:p>
+        </p:txBody>
+      </p:sp>
+      <p:sp>
+        <p:nvSpPr>
+          <p:cNvPr id="31" name="TextBox 30"/>
+          <p:cNvSpPr txBox="1"/>
+          <p:nvPr/>
+        </p:nvSpPr>
+        <p:spPr>
+          <a:xfrm>
+            <a:off x="11799570" y="4838700"/>
+            <a:ext cx="5250180" cy="619125"/>
+          </a:xfrm>
+          <a:prstGeom prst="rect">
+            <a:avLst/>
+          </a:prstGeom>
+          <a:noFill/>
+        </p:spPr>
+        <p:txBody>
+          <a:bodyPr wrap="square" lIns="0" rIns="0" tIns="0" bIns="0" anchor="ctr">
+            <a:spAutoFit/>
+          </a:bodyPr>
+          <a:lstStyle/>
+          <a:p>
+            <a:pPr algn="ctr">
+              <a:lnSpc>
+                <a:spcPct val="115000"/>
+              </a:lnSpc>
+            </a:pPr>
+            <a:r>
+              <a:rPr sz="1875" b="0">
+                <a:solidFill>
+                  <a:srgbClr val="3D3D3D"/>
+                </a:solidFill>
+                <a:latin typeface="Pretendard"/>
+                <a:ea typeface="Pretendard"/>
+                <a:cs typeface="Pretendard"/>
+              </a:rPr>
+              <a:t>show(truncate=False)</a:t>
+            </a:r>
+          </a:p>
+        </p:txBody>
+      </p:sp>
+      <p:sp>
+        <p:nvSpPr>
+          <p:cNvPr id="32" name="Rounded Rectangle 31"/>
+          <p:cNvSpPr/>
+          <p:nvPr/>
+        </p:nvSpPr>
+        <p:spPr>
+          <a:xfrm>
+            <a:off x="1143000" y="5534025"/>
+            <a:ext cx="5402580" cy="619125"/>
+          </a:xfrm>
+          <a:prstGeom prst="roundRect">
+            <a:avLst>
+              <a:gd name="adj" fmla="val 6153"/>
+            </a:avLst>
+          </a:prstGeom>
+          <a:solidFill>
+            <a:srgbClr val="EDF3FD"/>
+          </a:solidFill>
+          <a:ln w="9525">
+            <a:solidFill>
+              <a:srgbClr val="BFD3F5"/>
+            </a:solidFill>
+          </a:ln>
+          <a:effectLst/>
+        </p:spPr>
+        <p:txBody>
+          <a:bodyPr rtlCol="0" anchor="ctr" wrap="square"/>
+          <a:lstStyle/>
+          <a:p>
+            <a:pPr algn="ctr"/>
+          </a:p>
+        </p:txBody>
+      </p:sp>
+      <p:sp>
+        <p:nvSpPr>
+          <p:cNvPr id="33" name="TextBox 32"/>
+          <p:cNvSpPr txBox="1"/>
+          <p:nvPr/>
+        </p:nvSpPr>
+        <p:spPr>
+          <a:xfrm>
+            <a:off x="1238250" y="5534025"/>
+            <a:ext cx="5212080" cy="619125"/>
+          </a:xfrm>
+          <a:prstGeom prst="rect">
+            <a:avLst/>
+          </a:prstGeom>
+          <a:noFill/>
+        </p:spPr>
+        <p:txBody>
+          <a:bodyPr wrap="square" lIns="0" rIns="0" tIns="0" bIns="0" anchor="ctr">
+            <a:spAutoFit/>
+          </a:bodyPr>
+          <a:lstStyle/>
+          <a:p>
+            <a:pPr algn="l">
+              <a:lnSpc>
+                <a:spcPct val="115000"/>
+              </a:lnSpc>
+            </a:pPr>
+            <a:r>
+              <a:rPr sz="1875" b="1">
+                <a:solidFill>
+                  <a:srgbClr val="0D2B5E"/>
+                </a:solidFill>
+                <a:latin typeface="Pretendard"/>
+                <a:ea typeface="Pretendard"/>
+                <a:cs typeface="Pretendard"/>
+              </a:rPr>
+              <a:t>SHOW VIEWS AssertionError</a:t>
+            </a:r>
+          </a:p>
+        </p:txBody>
+      </p:sp>
+      <p:sp>
+        <p:nvSpPr>
+          <p:cNvPr id="34" name="Rounded Rectangle 33"/>
+          <p:cNvSpPr/>
+          <p:nvPr/>
+        </p:nvSpPr>
+        <p:spPr>
+          <a:xfrm>
+            <a:off x="6583680" y="5534025"/>
+            <a:ext cx="5082540" cy="619125"/>
+          </a:xfrm>
+          <a:prstGeom prst="roundRect">
+            <a:avLst>
+              <a:gd name="adj" fmla="val 6153"/>
+            </a:avLst>
+          </a:prstGeom>
+          <a:solidFill>
+            <a:srgbClr val="FAFBFD"/>
+          </a:solidFill>
+          <a:ln w="9525">
+            <a:solidFill>
+              <a:srgbClr val="DCE1E8"/>
+            </a:solidFill>
+          </a:ln>
+          <a:effectLst/>
+        </p:spPr>
+        <p:txBody>
+          <a:bodyPr rtlCol="0" anchor="ctr" wrap="square"/>
+          <a:lstStyle/>
+          <a:p>
+            <a:pPr algn="ctr"/>
+          </a:p>
+        </p:txBody>
+      </p:sp>
+      <p:sp>
+        <p:nvSpPr>
+          <p:cNvPr id="35" name="TextBox 34"/>
+          <p:cNvSpPr txBox="1"/>
+          <p:nvPr/>
+        </p:nvSpPr>
+        <p:spPr>
+          <a:xfrm>
+            <a:off x="6678930" y="5534025"/>
+            <a:ext cx="4892040" cy="619125"/>
+          </a:xfrm>
+          <a:prstGeom prst="rect">
+            <a:avLst/>
+          </a:prstGeom>
+          <a:noFill/>
+        </p:spPr>
+        <p:txBody>
+          <a:bodyPr wrap="square" lIns="0" rIns="0" tIns="0" bIns="0" anchor="ctr">
+            <a:spAutoFit/>
+          </a:bodyPr>
+          <a:lstStyle/>
+          <a:p>
+            <a:pPr algn="ctr">
+              <a:lnSpc>
+                <a:spcPct val="115000"/>
+              </a:lnSpc>
+            </a:pPr>
+            <a:r>
+              <a:rPr sz="1875" b="0">
+                <a:solidFill>
+                  <a:srgbClr val="3D3D3D"/>
+                </a:solidFill>
+                <a:latin typeface="Pretendard"/>
+                <a:ea typeface="Pretendard"/>
+                <a:cs typeface="Pretendard"/>
+              </a:rPr>
+              <a:t>Iceberg 확장이 가로챔</a:t>
+            </a:r>
+          </a:p>
+        </p:txBody>
+      </p:sp>
+      <p:sp>
+        <p:nvSpPr>
+          <p:cNvPr id="36" name="Rounded Rectangle 35"/>
+          <p:cNvSpPr/>
+          <p:nvPr/>
+        </p:nvSpPr>
+        <p:spPr>
+          <a:xfrm>
+            <a:off x="11704320" y="5534025"/>
+            <a:ext cx="5440680" cy="619125"/>
+          </a:xfrm>
+          <a:prstGeom prst="roundRect">
+            <a:avLst>
+              <a:gd name="adj" fmla="val 6153"/>
+            </a:avLst>
+          </a:prstGeom>
+          <a:solidFill>
+            <a:srgbClr val="FAFBFD"/>
+          </a:solidFill>
+          <a:ln w="9525">
+            <a:solidFill>
+              <a:srgbClr val="DCE1E8"/>
+            </a:solidFill>
+          </a:ln>
+          <a:effectLst/>
+        </p:spPr>
+        <p:txBody>
+          <a:bodyPr rtlCol="0" anchor="ctr" wrap="square"/>
+          <a:lstStyle/>
+          <a:p>
+            <a:pPr algn="ctr"/>
+          </a:p>
+        </p:txBody>
+      </p:sp>
+      <p:sp>
+        <p:nvSpPr>
+          <p:cNvPr id="37" name="TextBox 36"/>
+          <p:cNvSpPr txBox="1"/>
+          <p:nvPr/>
+        </p:nvSpPr>
+        <p:spPr>
+          <a:xfrm>
+            <a:off x="11799570" y="5534025"/>
+            <a:ext cx="5250180" cy="619125"/>
+          </a:xfrm>
+          <a:prstGeom prst="rect">
+            <a:avLst/>
+          </a:prstGeom>
+          <a:noFill/>
+        </p:spPr>
+        <p:txBody>
+          <a:bodyPr wrap="square" lIns="0" rIns="0" tIns="0" bIns="0" anchor="ctr">
+            <a:spAutoFit/>
+          </a:bodyPr>
+          <a:lstStyle/>
+          <a:p>
+            <a:pPr algn="ctr">
+              <a:lnSpc>
+                <a:spcPct val="115000"/>
+              </a:lnSpc>
+            </a:pPr>
+            <a:r>
+              <a:rPr sz="1875" b="0">
+                <a:solidFill>
+                  <a:srgbClr val="3D3D3D"/>
+                </a:solidFill>
+                <a:latin typeface="Pretendard"/>
+                <a:ea typeface="Pretendard"/>
+                <a:cs typeface="Pretendard"/>
+              </a:rPr>
+              <a:t>SHOW VIEWS IN default</a:t>
+            </a:r>
+          </a:p>
+        </p:txBody>
+      </p:sp>
+      <p:sp>
+        <p:nvSpPr>
+          <p:cNvPr id="38" name="Rounded Rectangle 37"/>
+          <p:cNvSpPr/>
+          <p:nvPr/>
+        </p:nvSpPr>
+        <p:spPr>
+          <a:xfrm>
+            <a:off x="1143000" y="6229350"/>
+            <a:ext cx="5402580" cy="619125"/>
+          </a:xfrm>
+          <a:prstGeom prst="roundRect">
+            <a:avLst>
+              <a:gd name="adj" fmla="val 6153"/>
+            </a:avLst>
+          </a:prstGeom>
+          <a:solidFill>
+            <a:srgbClr val="EDF3FD"/>
+          </a:solidFill>
+          <a:ln w="9525">
+            <a:solidFill>
+              <a:srgbClr val="BFD3F5"/>
+            </a:solidFill>
+          </a:ln>
+          <a:effectLst/>
+        </p:spPr>
+        <p:txBody>
+          <a:bodyPr rtlCol="0" anchor="ctr" wrap="square"/>
+          <a:lstStyle/>
+          <a:p>
+            <a:pPr algn="ctr"/>
+          </a:p>
+        </p:txBody>
+      </p:sp>
+      <p:sp>
+        <p:nvSpPr>
+          <p:cNvPr id="39" name="TextBox 38"/>
+          <p:cNvSpPr txBox="1"/>
+          <p:nvPr/>
+        </p:nvSpPr>
+        <p:spPr>
+          <a:xfrm>
+            <a:off x="1238250" y="6229350"/>
+            <a:ext cx="5212080" cy="619125"/>
+          </a:xfrm>
+          <a:prstGeom prst="rect">
+            <a:avLst/>
+          </a:prstGeom>
+          <a:noFill/>
+        </p:spPr>
+        <p:txBody>
+          <a:bodyPr wrap="square" lIns="0" rIns="0" tIns="0" bIns="0" anchor="ctr">
+            <a:spAutoFit/>
+          </a:bodyPr>
+          <a:lstStyle/>
+          <a:p>
+            <a:pPr algn="l">
+              <a:lnSpc>
+                <a:spcPct val="115000"/>
+              </a:lnSpc>
+            </a:pPr>
+            <a:r>
+              <a:rPr sz="1875" b="1">
+                <a:solidFill>
+                  <a:srgbClr val="0D2B5E"/>
+                </a:solidFill>
+                <a:latin typeface="Pretendard"/>
+                <a:ea typeface="Pretendard"/>
+                <a:cs typeface="Pretendard"/>
+              </a:rPr>
+              <a:t>NameError: 'orders'</a:t>
+            </a:r>
+          </a:p>
+        </p:txBody>
+      </p:sp>
+      <p:sp>
+        <p:nvSpPr>
+          <p:cNvPr id="40" name="Rounded Rectangle 39"/>
+          <p:cNvSpPr/>
+          <p:nvPr/>
+        </p:nvSpPr>
+        <p:spPr>
+          <a:xfrm>
+            <a:off x="6583680" y="6229350"/>
+            <a:ext cx="5082540" cy="619125"/>
+          </a:xfrm>
+          <a:prstGeom prst="roundRect">
+            <a:avLst>
+              <a:gd name="adj" fmla="val 6153"/>
+            </a:avLst>
+          </a:prstGeom>
+          <a:solidFill>
+            <a:srgbClr val="FAFBFD"/>
+          </a:solidFill>
+          <a:ln w="9525">
+            <a:solidFill>
+              <a:srgbClr val="DCE1E8"/>
+            </a:solidFill>
+          </a:ln>
+          <a:effectLst/>
+        </p:spPr>
+        <p:txBody>
+          <a:bodyPr rtlCol="0" anchor="ctr" wrap="square"/>
+          <a:lstStyle/>
+          <a:p>
+            <a:pPr algn="ctr"/>
+          </a:p>
+        </p:txBody>
+      </p:sp>
+      <p:sp>
+        <p:nvSpPr>
+          <p:cNvPr id="41" name="TextBox 40"/>
+          <p:cNvSpPr txBox="1"/>
+          <p:nvPr/>
+        </p:nvSpPr>
+        <p:spPr>
+          <a:xfrm>
+            <a:off x="6678930" y="6229350"/>
+            <a:ext cx="4892040" cy="619125"/>
+          </a:xfrm>
+          <a:prstGeom prst="rect">
+            <a:avLst/>
+          </a:prstGeom>
+          <a:noFill/>
+        </p:spPr>
+        <p:txBody>
+          <a:bodyPr wrap="square" lIns="0" rIns="0" tIns="0" bIns="0" anchor="ctr">
+            <a:spAutoFit/>
+          </a:bodyPr>
+          <a:lstStyle/>
+          <a:p>
+            <a:pPr algn="ctr">
+              <a:lnSpc>
+                <a:spcPct val="115000"/>
+              </a:lnSpc>
+            </a:pPr>
+            <a:r>
+              <a:rPr sz="1875" b="0">
+                <a:solidFill>
+                  <a:srgbClr val="3D3D3D"/>
+                </a:solidFill>
+                <a:latin typeface="Pretendard"/>
+                <a:ea typeface="Pretendard"/>
+                <a:cs typeface="Pretendard"/>
+              </a:rPr>
+              <a:t>셸 재시작 — 변수·뷰 소멸</a:t>
+            </a:r>
+          </a:p>
+        </p:txBody>
+      </p:sp>
+      <p:sp>
+        <p:nvSpPr>
+          <p:cNvPr id="42" name="Rounded Rectangle 41"/>
+          <p:cNvSpPr/>
+          <p:nvPr/>
+        </p:nvSpPr>
+        <p:spPr>
+          <a:xfrm>
+            <a:off x="11704320" y="6229350"/>
+            <a:ext cx="5440680" cy="619125"/>
+          </a:xfrm>
+          <a:prstGeom prst="roundRect">
+            <a:avLst>
+              <a:gd name="adj" fmla="val 6153"/>
+            </a:avLst>
+          </a:prstGeom>
+          <a:solidFill>
+            <a:srgbClr val="FAFBFD"/>
+          </a:solidFill>
+          <a:ln w="9525">
+            <a:solidFill>
+              <a:srgbClr val="DCE1E8"/>
+            </a:solidFill>
+          </a:ln>
+          <a:effectLst/>
+        </p:spPr>
+        <p:txBody>
+          <a:bodyPr rtlCol="0" anchor="ctr" wrap="square"/>
+          <a:lstStyle/>
+          <a:p>
+            <a:pPr algn="ctr"/>
+          </a:p>
+        </p:txBody>
+      </p:sp>
+      <p:sp>
+        <p:nvSpPr>
+          <p:cNvPr id="43" name="TextBox 42"/>
+          <p:cNvSpPr txBox="1"/>
+          <p:nvPr/>
+        </p:nvSpPr>
+        <p:spPr>
+          <a:xfrm>
+            <a:off x="11799570" y="6229350"/>
+            <a:ext cx="5250180" cy="619125"/>
+          </a:xfrm>
+          <a:prstGeom prst="rect">
+            <a:avLst/>
+          </a:prstGeom>
+          <a:noFill/>
+        </p:spPr>
+        <p:txBody>
+          <a:bodyPr wrap="square" lIns="0" rIns="0" tIns="0" bIns="0" anchor="ctr">
+            <a:spAutoFit/>
+          </a:bodyPr>
+          <a:lstStyle/>
+          <a:p>
+            <a:pPr algn="ctr">
+              <a:lnSpc>
+                <a:spcPct val="115000"/>
+              </a:lnSpc>
+            </a:pPr>
+            <a:r>
+              <a:rPr sz="1875" b="0">
+                <a:solidFill>
+                  <a:srgbClr val="3D3D3D"/>
+                </a:solidFill>
+                <a:latin typeface="Pretendard"/>
+                <a:ea typeface="Pretendard"/>
+                <a:cs typeface="Pretendard"/>
+              </a:rPr>
+              <a:t>1~3·6단계 다시 실행</a:t>
+            </a:r>
+          </a:p>
+        </p:txBody>
+      </p:sp>
+      <p:sp>
+        <p:nvSpPr>
+          <p:cNvPr id="44" name="Rounded Rectangle 43"/>
+          <p:cNvSpPr/>
+          <p:nvPr/>
+        </p:nvSpPr>
+        <p:spPr>
+          <a:xfrm>
+            <a:off x="1143000" y="6924675"/>
+            <a:ext cx="5402580" cy="619125"/>
+          </a:xfrm>
+          <a:prstGeom prst="roundRect">
+            <a:avLst>
+              <a:gd name="adj" fmla="val 6153"/>
+            </a:avLst>
+          </a:prstGeom>
+          <a:solidFill>
+            <a:srgbClr val="EDF3FD"/>
+          </a:solidFill>
+          <a:ln w="9525">
+            <a:solidFill>
+              <a:srgbClr val="BFD3F5"/>
+            </a:solidFill>
+          </a:ln>
+          <a:effectLst/>
+        </p:spPr>
+        <p:txBody>
+          <a:bodyPr rtlCol="0" anchor="ctr" wrap="square"/>
+          <a:lstStyle/>
+          <a:p>
+            <a:pPr algn="ctr"/>
+          </a:p>
+        </p:txBody>
+      </p:sp>
+      <p:sp>
+        <p:nvSpPr>
+          <p:cNvPr id="45" name="TextBox 44"/>
+          <p:cNvSpPr txBox="1"/>
+          <p:nvPr/>
+        </p:nvSpPr>
+        <p:spPr>
+          <a:xfrm>
+            <a:off x="1238250" y="6924675"/>
+            <a:ext cx="5212080" cy="619125"/>
+          </a:xfrm>
+          <a:prstGeom prst="rect">
+            <a:avLst/>
+          </a:prstGeom>
+          <a:noFill/>
+        </p:spPr>
+        <p:txBody>
+          <a:bodyPr wrap="square" lIns="0" rIns="0" tIns="0" bIns="0" anchor="ctr">
+            <a:spAutoFit/>
+          </a:bodyPr>
+          <a:lstStyle/>
+          <a:p>
+            <a:pPr algn="l">
+              <a:lnSpc>
+                <a:spcPct val="115000"/>
+              </a:lnSpc>
+            </a:pPr>
+            <a:r>
+              <a:rPr sz="1875" b="1">
+                <a:solidFill>
+                  <a:srgbClr val="0D2B5E"/>
+                </a:solidFill>
+                <a:latin typeface="Pretendard"/>
+                <a:ea typeface="Pretendard"/>
+                <a:cs typeface="Pretendard"/>
+              </a:rPr>
+              <a:t>조인 후 행 수가 늘어남</a:t>
+            </a:r>
+          </a:p>
+        </p:txBody>
+      </p:sp>
+      <p:sp>
+        <p:nvSpPr>
+          <p:cNvPr id="46" name="Rounded Rectangle 45"/>
+          <p:cNvSpPr/>
+          <p:nvPr/>
+        </p:nvSpPr>
+        <p:spPr>
+          <a:xfrm>
+            <a:off x="6583680" y="6924675"/>
+            <a:ext cx="5082540" cy="619125"/>
+          </a:xfrm>
+          <a:prstGeom prst="roundRect">
+            <a:avLst>
+              <a:gd name="adj" fmla="val 6153"/>
+            </a:avLst>
+          </a:prstGeom>
+          <a:solidFill>
+            <a:srgbClr val="FAFBFD"/>
+          </a:solidFill>
+          <a:ln w="9525">
+            <a:solidFill>
+              <a:srgbClr val="DCE1E8"/>
+            </a:solidFill>
+          </a:ln>
+          <a:effectLst/>
+        </p:spPr>
+        <p:txBody>
+          <a:bodyPr rtlCol="0" anchor="ctr" wrap="square"/>
+          <a:lstStyle/>
+          <a:p>
+            <a:pPr algn="ctr"/>
+          </a:p>
+        </p:txBody>
+      </p:sp>
+      <p:sp>
+        <p:nvSpPr>
+          <p:cNvPr id="47" name="TextBox 46"/>
+          <p:cNvSpPr txBox="1"/>
+          <p:nvPr/>
+        </p:nvSpPr>
+        <p:spPr>
+          <a:xfrm>
+            <a:off x="6678930" y="6924675"/>
+            <a:ext cx="4892040" cy="619125"/>
+          </a:xfrm>
+          <a:prstGeom prst="rect">
+            <a:avLst/>
+          </a:prstGeom>
+          <a:noFill/>
+        </p:spPr>
+        <p:txBody>
+          <a:bodyPr wrap="square" lIns="0" rIns="0" tIns="0" bIns="0" anchor="ctr">
+            <a:spAutoFit/>
+          </a:bodyPr>
+          <a:lstStyle/>
+          <a:p>
+            <a:pPr algn="ctr">
+              <a:lnSpc>
+                <a:spcPct val="115000"/>
+              </a:lnSpc>
+            </a:pPr>
+            <a:r>
+              <a:rPr sz="1875" b="0">
+                <a:solidFill>
+                  <a:srgbClr val="3D3D3D"/>
+                </a:solidFill>
+                <a:latin typeface="Pretendard"/>
+                <a:ea typeface="Pretendard"/>
+                <a:cs typeface="Pretendard"/>
+              </a:rPr>
+              <a:t>오른쪽 키에 중복</a:t>
+            </a:r>
+          </a:p>
+        </p:txBody>
+      </p:sp>
+      <p:sp>
+        <p:nvSpPr>
+          <p:cNvPr id="48" name="Rounded Rectangle 47"/>
+          <p:cNvSpPr/>
+          <p:nvPr/>
+        </p:nvSpPr>
+        <p:spPr>
+          <a:xfrm>
+            <a:off x="11704320" y="6924675"/>
+            <a:ext cx="5440680" cy="619125"/>
+          </a:xfrm>
+          <a:prstGeom prst="roundRect">
+            <a:avLst>
+              <a:gd name="adj" fmla="val 6153"/>
+            </a:avLst>
+          </a:prstGeom>
+          <a:solidFill>
+            <a:srgbClr val="FAFBFD"/>
+          </a:solidFill>
+          <a:ln w="9525">
+            <a:solidFill>
+              <a:srgbClr val="DCE1E8"/>
+            </a:solidFill>
+          </a:ln>
+          <a:effectLst/>
+        </p:spPr>
+        <p:txBody>
+          <a:bodyPr rtlCol="0" anchor="ctr" wrap="square"/>
+          <a:lstStyle/>
+          <a:p>
+            <a:pPr algn="ctr"/>
+          </a:p>
+        </p:txBody>
+      </p:sp>
+      <p:sp>
+        <p:nvSpPr>
+          <p:cNvPr id="49" name="TextBox 48"/>
+          <p:cNvSpPr txBox="1"/>
+          <p:nvPr/>
+        </p:nvSpPr>
+        <p:spPr>
+          <a:xfrm>
+            <a:off x="11799570" y="6924675"/>
+            <a:ext cx="5250180" cy="619125"/>
+          </a:xfrm>
+          <a:prstGeom prst="rect">
+            <a:avLst/>
+          </a:prstGeom>
+          <a:noFill/>
+        </p:spPr>
+        <p:txBody>
+          <a:bodyPr wrap="square" lIns="0" rIns="0" tIns="0" bIns="0" anchor="ctr">
+            <a:spAutoFit/>
+          </a:bodyPr>
+          <a:lstStyle/>
+          <a:p>
+            <a:pPr algn="ctr">
+              <a:lnSpc>
+                <a:spcPct val="115000"/>
+              </a:lnSpc>
+            </a:pPr>
+            <a:r>
+              <a:rPr sz="1875" b="0">
+                <a:solidFill>
+                  <a:srgbClr val="3D3D3D"/>
+                </a:solidFill>
+                <a:latin typeface="Pretendard"/>
+                <a:ea typeface="Pretendard"/>
+                <a:cs typeface="Pretendard"/>
+              </a:rPr>
+              <a:t>count · distinct().count()</a:t>
+            </a:r>
+          </a:p>
+        </p:txBody>
+      </p:sp>
+      <p:sp>
+        <p:nvSpPr>
+          <p:cNvPr id="50" name="TextBox 49"/>
+          <p:cNvSpPr txBox="1"/>
+          <p:nvPr/>
+        </p:nvSpPr>
+        <p:spPr>
+          <a:xfrm>
+            <a:off x="1143000" y="7620000"/>
+            <a:ext cx="16002000" cy="342900"/>
+          </a:xfrm>
+          <a:prstGeom prst="rect">
+            <a:avLst/>
+          </a:prstGeom>
+          <a:noFill/>
+        </p:spPr>
+        <p:txBody>
+          <a:bodyPr wrap="square" lIns="0" rIns="0" tIns="0" bIns="0" anchor="t">
+            <a:spAutoFit/>
+          </a:bodyPr>
+          <a:lstStyle/>
+          <a:p>
+            <a:pPr algn="l">
+              <a:lnSpc>
+                <a:spcPct val="100000"/>
+              </a:lnSpc>
+            </a:pPr>
+            <a:r>
+              <a:rPr sz="1875" b="1">
+                <a:solidFill>
+                  <a:srgbClr val="7D7D7D"/>
+                </a:solidFill>
+                <a:latin typeface="Pretendard"/>
+                <a:ea typeface="Pretendard"/>
+                <a:cs typeface="Pretendard"/>
+              </a:rPr>
+              <a:t>먼저 「그 시점에 무엇이 있나」를 printSchema() · count() 로 보세요</a:t>
+            </a:r>
+          </a:p>
+        </p:txBody>
+      </p:sp>
+      <p:sp>
+        <p:nvSpPr>
+          <p:cNvPr id="51" name="Rectangle 50"/>
+          <p:cNvSpPr/>
+          <p:nvPr/>
+        </p:nvSpPr>
+        <p:spPr>
+          <a:xfrm>
+            <a:off x="1143000" y="8058150"/>
+            <a:ext cx="16002000" cy="9525"/>
+          </a:xfrm>
+          <a:prstGeom prst="rect">
+            <a:avLst/>
+          </a:prstGeom>
+          <a:solidFill>
+            <a:srgbClr val="DCE1E8"/>
           </a:solidFill>
           <a:ln>
             <a:noFill/>
@@ -13504,170 +16028,7 @@
       </p:sp>
       <p:sp>
         <p:nvSpPr>
-          <p:cNvPr id="25" name="Oval 24"/>
-          <p:cNvSpPr/>
-          <p:nvPr/>
-        </p:nvSpPr>
-        <p:spPr>
-          <a:xfrm>
-            <a:off x="1428750" y="6743700"/>
-            <a:ext cx="419100" cy="419100"/>
-          </a:xfrm>
-          <a:prstGeom prst="ellipse">
-            <a:avLst/>
-          </a:prstGeom>
-          <a:solidFill>
-            <a:srgbClr val="0D2B5E"/>
-          </a:solidFill>
-          <a:ln>
-            <a:noFill/>
-          </a:ln>
-          <a:effectLst/>
-        </p:spPr>
-        <p:txBody>
-          <a:bodyPr rtlCol="0" anchor="ctr" wrap="square"/>
-          <a:lstStyle/>
-          <a:p>
-            <a:pPr algn="ctr"/>
-          </a:p>
-        </p:txBody>
-      </p:sp>
-      <p:sp>
-        <p:nvSpPr>
-          <p:cNvPr id="26" name="TextBox 25"/>
-          <p:cNvSpPr txBox="1"/>
-          <p:nvPr/>
-        </p:nvSpPr>
-        <p:spPr>
-          <a:xfrm>
-            <a:off x="1428750" y="6810375"/>
-            <a:ext cx="419100" cy="304800"/>
-          </a:xfrm>
-          <a:prstGeom prst="rect">
-            <a:avLst/>
-          </a:prstGeom>
-          <a:noFill/>
-        </p:spPr>
-        <p:txBody>
-          <a:bodyPr wrap="square" lIns="0" rIns="0" tIns="0" bIns="0" anchor="t">
-            <a:spAutoFit/>
-          </a:bodyPr>
-          <a:lstStyle/>
-          <a:p>
-            <a:pPr algn="ctr">
-              <a:lnSpc>
-                <a:spcPct val="100000"/>
-              </a:lnSpc>
-            </a:pPr>
-            <a:r>
-              <a:rPr sz="1875" b="1">
-                <a:solidFill>
-                  <a:srgbClr val="FFFFFF"/>
-                </a:solidFill>
-                <a:latin typeface="Pretendard"/>
-                <a:ea typeface="Pretendard"/>
-                <a:cs typeface="Pretendard"/>
-              </a:rPr>
-              <a:t>4</a:t>
-            </a:r>
-          </a:p>
-        </p:txBody>
-      </p:sp>
-      <p:sp>
-        <p:nvSpPr>
-          <p:cNvPr id="27" name="TextBox 26"/>
-          <p:cNvSpPr txBox="1"/>
-          <p:nvPr/>
-        </p:nvSpPr>
-        <p:spPr>
-          <a:xfrm>
-            <a:off x="2057400" y="6591300"/>
-            <a:ext cx="14763750" cy="723900"/>
-          </a:xfrm>
-          <a:prstGeom prst="rect">
-            <a:avLst/>
-          </a:prstGeom>
-          <a:noFill/>
-        </p:spPr>
-        <p:txBody>
-          <a:bodyPr wrap="square" lIns="0" rIns="0" tIns="0" bIns="0" anchor="ctr">
-            <a:spAutoFit/>
-          </a:bodyPr>
-          <a:lstStyle/>
-          <a:p>
-            <a:pPr>
-              <a:lnSpc>
-                <a:spcPct val="120000"/>
-              </a:lnSpc>
-            </a:pPr>
-            <a:r>
-              <a:rPr sz="2175" b="1">
-                <a:solidFill>
-                  <a:srgbClr val="0D2B5E"/>
-                </a:solidFill>
-                <a:latin typeface="Pretendard"/>
-                <a:ea typeface="Pretendard"/>
-                <a:cs typeface="Pretendard"/>
-              </a:rPr>
-              <a:t>Pandas 코드를 그대로 옮길 수 있나요?</a:t>
-            </a:r>
-          </a:p>
-          <a:p>
-            <a:pPr>
-              <a:lnSpc>
-                <a:spcPct val="130000"/>
-              </a:lnSpc>
-              <a:spcBef>
-                <a:spcPts val="300"/>
-              </a:spcBef>
-            </a:pPr>
-            <a:r>
-              <a:rPr sz="1875" b="0">
-                <a:solidFill>
-                  <a:srgbClr val="3D3D3D"/>
-                </a:solidFill>
-                <a:latin typeface="Pretendard"/>
-                <a:ea typeface="Pretendard"/>
-                <a:cs typeface="Pretendard"/>
-              </a:rPr>
-              <a:t>거의 — 인덱스가 없고, apply 같은 행 단위 함수는 느리니 내장 함수로</a:t>
-            </a:r>
-          </a:p>
-        </p:txBody>
-      </p:sp>
-      <p:sp>
-        <p:nvSpPr>
-          <p:cNvPr id="28" name="Rectangle 27"/>
-          <p:cNvSpPr/>
-          <p:nvPr/>
-        </p:nvSpPr>
-        <p:spPr>
-          <a:xfrm>
-            <a:off x="1143000" y="8058150"/>
-            <a:ext cx="16002000" cy="9525"/>
-          </a:xfrm>
-          <a:prstGeom prst="rect">
-            <a:avLst/>
-          </a:prstGeom>
-          <a:solidFill>
-            <a:srgbClr val="DCE1E8"/>
-          </a:solidFill>
-          <a:ln>
-            <a:noFill/>
-          </a:ln>
-          <a:effectLst/>
-        </p:spPr>
-        <p:txBody>
-          <a:bodyPr rtlCol="0" anchor="ctr" wrap="square"/>
-          <a:lstStyle/>
-          <a:p>
-            <a:pPr algn="ctr"/>
-          </a:p>
-        </p:txBody>
-      </p:sp>
-      <p:sp>
-        <p:nvSpPr>
-          <p:cNvPr id="29" name="TextBox 28"/>
+          <p:cNvPr id="52" name="TextBox 51"/>
           <p:cNvSpPr txBox="1"/>
           <p:nvPr/>
         </p:nvSpPr>
@@ -13708,7 +16069,7 @@
       </p:sp>
       <p:sp>
         <p:nvSpPr>
-          <p:cNvPr id="30" name="TextBox 29"/>
+          <p:cNvPr id="53" name="TextBox 52"/>
           <p:cNvSpPr txBox="1"/>
           <p:nvPr/>
         </p:nvSpPr>
@@ -13767,7 +16128,7 @@
       <p:grpSpPr/>
       <p:sp>
         <p:nvSpPr>
-          <p:cNvPr id="2" name="Oval 1"/>
+          <p:cNvPr id="2" name="deckgen:decor"/>
           <p:cNvSpPr/>
           <p:nvPr/>
         </p:nvSpPr>
@@ -13797,7 +16158,7 @@
       </p:sp>
       <p:sp>
         <p:nvSpPr>
-          <p:cNvPr id="3" name="Oval 2"/>
+          <p:cNvPr id="3" name="deckgen:decor"/>
           <p:cNvSpPr/>
           <p:nvPr/>
         </p:nvSpPr>
@@ -13827,7 +16188,7 @@
       </p:sp>
       <p:sp>
         <p:nvSpPr>
-          <p:cNvPr id="4" name="Oval 3"/>
+          <p:cNvPr id="4" name="deckgen:decor"/>
           <p:cNvSpPr/>
           <p:nvPr/>
         </p:nvSpPr>
@@ -13891,7 +16252,7 @@
                 <a:ea typeface="Pretendard"/>
                 <a:cs typeface="Pretendard"/>
               </a:rPr>
-              <a:t>심화 과제 (선택)</a:t>
+              <a:t>예상 질문</a:t>
             </a:r>
           </a:p>
         </p:txBody>
@@ -13932,7 +16293,7 @@
                 <a:ea typeface="Pretendard"/>
                 <a:cs typeface="Pretendard"/>
               </a:rPr>
-              <a:t>더 해 볼 것 넷 — 5-5 예습</a:t>
+              <a:t>자주 나오는 질문 다섯 가지</a:t>
             </a:r>
           </a:p>
         </p:txBody>
@@ -13975,12 +16336,12 @@
         </p:nvSpPr>
         <p:spPr>
           <a:xfrm>
-            <a:off x="1143000" y="3429000"/>
-            <a:ext cx="3714750" cy="2476500"/>
+            <a:off x="1143000" y="2857500"/>
+            <a:ext cx="16002000" cy="902970"/>
           </a:xfrm>
           <a:prstGeom prst="roundRect">
             <a:avLst>
-              <a:gd name="adj" fmla="val 1923"/>
+              <a:gd name="adj" fmla="val 5274"/>
             </a:avLst>
           </a:prstGeom>
           <a:solidFill>
@@ -14009,8 +16370,8 @@
         </p:nvSpPr>
         <p:spPr>
           <a:xfrm>
-            <a:off x="1143000" y="3429000"/>
-            <a:ext cx="3714750" cy="47625"/>
+            <a:off x="1143000" y="2857500"/>
+            <a:ext cx="47625" cy="902970"/>
           </a:xfrm>
           <a:prstGeom prst="rect">
             <a:avLst/>
@@ -14033,14 +16394,44 @@
       </p:sp>
       <p:sp>
         <p:nvSpPr>
-          <p:cNvPr id="10" name="TextBox 9"/>
-          <p:cNvSpPr txBox="1"/>
-          <p:nvPr/>
-        </p:nvSpPr>
-        <p:spPr>
-          <a:xfrm>
-            <a:off x="4000500" y="3638550"/>
-            <a:ext cx="590550" cy="400050"/>
+          <p:cNvPr id="10" name="Oval 9"/>
+          <p:cNvSpPr/>
+          <p:nvPr/>
+        </p:nvSpPr>
+        <p:spPr>
+          <a:xfrm>
+            <a:off x="1428750" y="3099435"/>
+            <a:ext cx="419100" cy="419100"/>
+          </a:xfrm>
+          <a:prstGeom prst="ellipse">
+            <a:avLst/>
+          </a:prstGeom>
+          <a:solidFill>
+            <a:srgbClr val="0D2B5E"/>
+          </a:solidFill>
+          <a:ln>
+            <a:noFill/>
+          </a:ln>
+          <a:effectLst/>
+        </p:spPr>
+        <p:txBody>
+          <a:bodyPr rtlCol="0" anchor="ctr" wrap="square"/>
+          <a:lstStyle/>
+          <a:p>
+            <a:pPr algn="ctr"/>
+          </a:p>
+        </p:txBody>
+      </p:sp>
+      <p:sp>
+        <p:nvSpPr>
+          <p:cNvPr id="11" name="TextBox 10"/>
+          <p:cNvSpPr txBox="1"/>
+          <p:nvPr/>
+        </p:nvSpPr>
+        <p:spPr>
+          <a:xfrm>
+            <a:off x="1428750" y="3166110"/>
+            <a:ext cx="419100" cy="304800"/>
           </a:xfrm>
           <a:prstGeom prst="rect">
             <a:avLst/>
@@ -14053,35 +16444,35 @@
           </a:bodyPr>
           <a:lstStyle/>
           <a:p>
-            <a:pPr algn="r">
+            <a:pPr algn="ctr">
               <a:lnSpc>
                 <a:spcPct val="100000"/>
               </a:lnSpc>
             </a:pPr>
             <a:r>
-              <a:rPr sz="2550" b="1">
-                <a:solidFill>
-                  <a:srgbClr val="E4EBF4"/>
-                </a:solidFill>
-                <a:latin typeface="Pretendard"/>
-                <a:ea typeface="Pretendard"/>
-                <a:cs typeface="Pretendard"/>
-              </a:rPr>
-              <a:t>01</a:t>
-            </a:r>
-          </a:p>
-        </p:txBody>
-      </p:sp>
-      <p:sp>
-        <p:nvSpPr>
-          <p:cNvPr id="11" name="TextBox 10"/>
-          <p:cNvSpPr txBox="1"/>
-          <p:nvPr/>
-        </p:nvSpPr>
-        <p:spPr>
-          <a:xfrm>
-            <a:off x="1466850" y="3752850"/>
-            <a:ext cx="3067050" cy="1828800"/>
+              <a:rPr sz="1875" b="1">
+                <a:solidFill>
+                  <a:srgbClr val="FFFFFF"/>
+                </a:solidFill>
+                <a:latin typeface="Pretendard"/>
+                <a:ea typeface="Pretendard"/>
+                <a:cs typeface="Pretendard"/>
+              </a:rPr>
+              <a:t>1</a:t>
+            </a:r>
+          </a:p>
+        </p:txBody>
+      </p:sp>
+      <p:sp>
+        <p:nvSpPr>
+          <p:cNvPr id="12" name="TextBox 11"/>
+          <p:cNvSpPr txBox="1"/>
+          <p:nvPr/>
+        </p:nvSpPr>
+        <p:spPr>
+          <a:xfrm>
+            <a:off x="2057400" y="2952750"/>
+            <a:ext cx="14763750" cy="712470"/>
           </a:xfrm>
           <a:prstGeom prst="rect">
             <a:avLst/>
@@ -14096,11 +16487,11 @@
           <a:p>
             <a:pPr>
               <a:lnSpc>
-                <a:spcPct val="115000"/>
-              </a:lnSpc>
-            </a:pPr>
-            <a:r>
-              <a:rPr sz="2700" b="1">
+                <a:spcPct val="120000"/>
+              </a:lnSpc>
+            </a:pPr>
+            <a:r>
+              <a:rPr sz="2175" b="1">
                 <a:solidFill>
                   <a:srgbClr val="0D2B5E"/>
                 </a:solidFill>
@@ -14108,20 +16499,20 @@
                 <a:ea typeface="Pretendard"/>
                 <a:cs typeface="Pretendard"/>
               </a:rPr>
-              <a:t>날짜별 매출 두 방식</a:t>
+              <a:t>API 와 SQL 중 뭘 배워야 하나요?</a:t>
             </a:r>
           </a:p>
           <a:p>
             <a:pPr>
               <a:lnSpc>
-                <a:spcPct val="146000"/>
+                <a:spcPct val="130000"/>
               </a:lnSpc>
               <a:spcBef>
-                <a:spcPts val="1050"/>
+                <a:spcPts val="300"/>
               </a:spcBef>
             </a:pPr>
             <a:r>
-              <a:rPr sz="2025" b="0">
+              <a:rPr sz="1875" b="0">
                 <a:solidFill>
                   <a:srgbClr val="3D3D3D"/>
                 </a:solidFill>
@@ -14129,43 +16520,25 @@
                 <a:ea typeface="Pretendard"/>
                 <a:cs typeface="Pretendard"/>
               </a:rPr>
-              <a:t>API · SQL</a:t>
-            </a:r>
-          </a:p>
-          <a:p>
-            <a:pPr>
-              <a:lnSpc>
-                <a:spcPct val="146000"/>
-              </a:lnSpc>
-            </a:pPr>
-            <a:r>
-              <a:rPr sz="2025" b="0">
-                <a:solidFill>
-                  <a:srgbClr val="3D3D3D"/>
-                </a:solidFill>
-                <a:latin typeface="Pretendard"/>
-                <a:ea typeface="Pretendard"/>
-                <a:cs typeface="Pretendard"/>
-              </a:rPr>
-              <a:t>결과 대조</a:t>
-            </a:r>
-          </a:p>
-        </p:txBody>
-      </p:sp>
-      <p:sp>
-        <p:nvSpPr>
-          <p:cNvPr id="12" name="Rounded Rectangle 11"/>
-          <p:cNvSpPr/>
-          <p:nvPr/>
-        </p:nvSpPr>
-        <p:spPr>
-          <a:xfrm>
-            <a:off x="5238750" y="3429000"/>
-            <a:ext cx="3714750" cy="2476500"/>
+              <a:t>둘 다 — SQL 은 2주차 MySQL · 3주차 DuckDB · 4주차 Trino 에서도 쓰이니 투자 대비 효과가 크다</a:t>
+            </a:r>
+          </a:p>
+        </p:txBody>
+      </p:sp>
+      <p:sp>
+        <p:nvSpPr>
+          <p:cNvPr id="13" name="Rounded Rectangle 12"/>
+          <p:cNvSpPr/>
+          <p:nvPr/>
+        </p:nvSpPr>
+        <p:spPr>
+          <a:xfrm>
+            <a:off x="1143000" y="3893820"/>
+            <a:ext cx="16002000" cy="902970"/>
           </a:xfrm>
           <a:prstGeom prst="roundRect">
             <a:avLst>
-              <a:gd name="adj" fmla="val 1923"/>
+              <a:gd name="adj" fmla="val 5274"/>
             </a:avLst>
           </a:prstGeom>
           <a:solidFill>
@@ -14188,14 +16561,14 @@
       </p:sp>
       <p:sp>
         <p:nvSpPr>
-          <p:cNvPr id="13" name="Rectangle 12"/>
-          <p:cNvSpPr/>
-          <p:nvPr/>
-        </p:nvSpPr>
-        <p:spPr>
-          <a:xfrm>
-            <a:off x="5238750" y="3429000"/>
-            <a:ext cx="3714750" cy="47625"/>
+          <p:cNvPr id="14" name="Rectangle 13"/>
+          <p:cNvSpPr/>
+          <p:nvPr/>
+        </p:nvSpPr>
+        <p:spPr>
+          <a:xfrm>
+            <a:off x="1143000" y="3893820"/>
+            <a:ext cx="47625" cy="902970"/>
           </a:xfrm>
           <a:prstGeom prst="rect">
             <a:avLst/>
@@ -14218,14 +16591,44 @@
       </p:sp>
       <p:sp>
         <p:nvSpPr>
-          <p:cNvPr id="14" name="TextBox 13"/>
-          <p:cNvSpPr txBox="1"/>
-          <p:nvPr/>
-        </p:nvSpPr>
-        <p:spPr>
-          <a:xfrm>
-            <a:off x="8096250" y="3638550"/>
-            <a:ext cx="590550" cy="400050"/>
+          <p:cNvPr id="15" name="Oval 14"/>
+          <p:cNvSpPr/>
+          <p:nvPr/>
+        </p:nvSpPr>
+        <p:spPr>
+          <a:xfrm>
+            <a:off x="1428750" y="4135755"/>
+            <a:ext cx="419100" cy="419100"/>
+          </a:xfrm>
+          <a:prstGeom prst="ellipse">
+            <a:avLst/>
+          </a:prstGeom>
+          <a:solidFill>
+            <a:srgbClr val="0D2B5E"/>
+          </a:solidFill>
+          <a:ln>
+            <a:noFill/>
+          </a:ln>
+          <a:effectLst/>
+        </p:spPr>
+        <p:txBody>
+          <a:bodyPr rtlCol="0" anchor="ctr" wrap="square"/>
+          <a:lstStyle/>
+          <a:p>
+            <a:pPr algn="ctr"/>
+          </a:p>
+        </p:txBody>
+      </p:sp>
+      <p:sp>
+        <p:nvSpPr>
+          <p:cNvPr id="16" name="TextBox 15"/>
+          <p:cNvSpPr txBox="1"/>
+          <p:nvPr/>
+        </p:nvSpPr>
+        <p:spPr>
+          <a:xfrm>
+            <a:off x="1428750" y="4202430"/>
+            <a:ext cx="419100" cy="304800"/>
           </a:xfrm>
           <a:prstGeom prst="rect">
             <a:avLst/>
@@ -14238,35 +16641,35 @@
           </a:bodyPr>
           <a:lstStyle/>
           <a:p>
-            <a:pPr algn="r">
+            <a:pPr algn="ctr">
               <a:lnSpc>
                 <a:spcPct val="100000"/>
               </a:lnSpc>
             </a:pPr>
             <a:r>
-              <a:rPr sz="2550" b="1">
-                <a:solidFill>
-                  <a:srgbClr val="E4EBF4"/>
-                </a:solidFill>
-                <a:latin typeface="Pretendard"/>
-                <a:ea typeface="Pretendard"/>
-                <a:cs typeface="Pretendard"/>
-              </a:rPr>
-              <a:t>02</a:t>
-            </a:r>
-          </a:p>
-        </p:txBody>
-      </p:sp>
-      <p:sp>
-        <p:nvSpPr>
-          <p:cNvPr id="15" name="TextBox 14"/>
-          <p:cNvSpPr txBox="1"/>
-          <p:nvPr/>
-        </p:nvSpPr>
-        <p:spPr>
-          <a:xfrm>
-            <a:off x="5562600" y="3752850"/>
-            <a:ext cx="3067050" cy="1828800"/>
+              <a:rPr sz="1875" b="1">
+                <a:solidFill>
+                  <a:srgbClr val="FFFFFF"/>
+                </a:solidFill>
+                <a:latin typeface="Pretendard"/>
+                <a:ea typeface="Pretendard"/>
+                <a:cs typeface="Pretendard"/>
+              </a:rPr>
+              <a:t>2</a:t>
+            </a:r>
+          </a:p>
+        </p:txBody>
+      </p:sp>
+      <p:sp>
+        <p:nvSpPr>
+          <p:cNvPr id="17" name="TextBox 16"/>
+          <p:cNvSpPr txBox="1"/>
+          <p:nvPr/>
+        </p:nvSpPr>
+        <p:spPr>
+          <a:xfrm>
+            <a:off x="2057400" y="3989070"/>
+            <a:ext cx="14763750" cy="712470"/>
           </a:xfrm>
           <a:prstGeom prst="rect">
             <a:avLst/>
@@ -14281,11 +16684,11 @@
           <a:p>
             <a:pPr>
               <a:lnSpc>
-                <a:spcPct val="115000"/>
-              </a:lnSpc>
-            </a:pPr>
-            <a:r>
-              <a:rPr sz="2700" b="1">
+                <a:spcPct val="120000"/>
+              </a:lnSpc>
+            </a:pPr>
+            <a:r>
+              <a:rPr sz="2175" b="1">
                 <a:solidFill>
                   <a:srgbClr val="0D2B5E"/>
                 </a:solidFill>
@@ -14293,20 +16696,20 @@
                 <a:ea typeface="Pretendard"/>
                 <a:cs typeface="Pretendard"/>
               </a:rPr>
-              <a:t>Spark UI 그래프</a:t>
+              <a:t>임시 뷰와 Iceberg 테이블은 뭐가 다른가요?</a:t>
             </a:r>
           </a:p>
           <a:p>
             <a:pPr>
               <a:lnSpc>
-                <a:spcPct val="146000"/>
+                <a:spcPct val="130000"/>
               </a:lnSpc>
               <a:spcBef>
-                <a:spcPts val="1050"/>
+                <a:spcPts val="300"/>
               </a:spcBef>
             </a:pPr>
             <a:r>
-              <a:rPr sz="2025" b="0">
+              <a:rPr sz="1875" b="0">
                 <a:solidFill>
                   <a:srgbClr val="3D3D3D"/>
                 </a:solidFill>
@@ -14314,43 +16717,25 @@
                 <a:ea typeface="Pretendard"/>
                 <a:cs typeface="Pretendard"/>
               </a:rPr>
-              <a:t>SQL 탭에서</a:t>
-            </a:r>
-          </a:p>
-          <a:p>
-            <a:pPr>
-              <a:lnSpc>
-                <a:spcPct val="146000"/>
-              </a:lnSpc>
-            </a:pPr>
-            <a:r>
-              <a:rPr sz="2025" b="0">
-                <a:solidFill>
-                  <a:srgbClr val="3D3D3D"/>
-                </a:solidFill>
-                <a:latin typeface="Pretendard"/>
-                <a:ea typeface="Pretendard"/>
-                <a:cs typeface="Pretendard"/>
-              </a:rPr>
-              <a:t>Exchange 찾기</a:t>
-            </a:r>
-          </a:p>
-        </p:txBody>
-      </p:sp>
-      <p:sp>
-        <p:nvSpPr>
-          <p:cNvPr id="16" name="Rounded Rectangle 15"/>
-          <p:cNvSpPr/>
-          <p:nvPr/>
-        </p:nvSpPr>
-        <p:spPr>
-          <a:xfrm>
-            <a:off x="9334500" y="3429000"/>
-            <a:ext cx="3714750" cy="2476500"/>
+              <a:t>임시 뷰는 세션이 끝나면 사라진다 — Iceberg 테이블은 MinIO 에 파일로 남는다</a:t>
+            </a:r>
+          </a:p>
+        </p:txBody>
+      </p:sp>
+      <p:sp>
+        <p:nvSpPr>
+          <p:cNvPr id="18" name="Rounded Rectangle 17"/>
+          <p:cNvSpPr/>
+          <p:nvPr/>
+        </p:nvSpPr>
+        <p:spPr>
+          <a:xfrm>
+            <a:off x="1143000" y="4930140"/>
+            <a:ext cx="16002000" cy="902970"/>
           </a:xfrm>
           <a:prstGeom prst="roundRect">
             <a:avLst>
-              <a:gd name="adj" fmla="val 1923"/>
+              <a:gd name="adj" fmla="val 5274"/>
             </a:avLst>
           </a:prstGeom>
           <a:solidFill>
@@ -14373,14 +16758,14 @@
       </p:sp>
       <p:sp>
         <p:nvSpPr>
-          <p:cNvPr id="17" name="Rectangle 16"/>
-          <p:cNvSpPr/>
-          <p:nvPr/>
-        </p:nvSpPr>
-        <p:spPr>
-          <a:xfrm>
-            <a:off x="9334500" y="3429000"/>
-            <a:ext cx="3714750" cy="47625"/>
+          <p:cNvPr id="19" name="Rectangle 18"/>
+          <p:cNvSpPr/>
+          <p:nvPr/>
+        </p:nvSpPr>
+        <p:spPr>
+          <a:xfrm>
+            <a:off x="1143000" y="4930140"/>
+            <a:ext cx="47625" cy="902970"/>
           </a:xfrm>
           <a:prstGeom prst="rect">
             <a:avLst/>
@@ -14403,14 +16788,44 @@
       </p:sp>
       <p:sp>
         <p:nvSpPr>
-          <p:cNvPr id="18" name="TextBox 17"/>
-          <p:cNvSpPr txBox="1"/>
-          <p:nvPr/>
-        </p:nvSpPr>
-        <p:spPr>
-          <a:xfrm>
-            <a:off x="12192000" y="3638550"/>
-            <a:ext cx="590550" cy="400050"/>
+          <p:cNvPr id="20" name="Oval 19"/>
+          <p:cNvSpPr/>
+          <p:nvPr/>
+        </p:nvSpPr>
+        <p:spPr>
+          <a:xfrm>
+            <a:off x="1428750" y="5172075"/>
+            <a:ext cx="419100" cy="419100"/>
+          </a:xfrm>
+          <a:prstGeom prst="ellipse">
+            <a:avLst/>
+          </a:prstGeom>
+          <a:solidFill>
+            <a:srgbClr val="0D2B5E"/>
+          </a:solidFill>
+          <a:ln>
+            <a:noFill/>
+          </a:ln>
+          <a:effectLst/>
+        </p:spPr>
+        <p:txBody>
+          <a:bodyPr rtlCol="0" anchor="ctr" wrap="square"/>
+          <a:lstStyle/>
+          <a:p>
+            <a:pPr algn="ctr"/>
+          </a:p>
+        </p:txBody>
+      </p:sp>
+      <p:sp>
+        <p:nvSpPr>
+          <p:cNvPr id="21" name="TextBox 20"/>
+          <p:cNvSpPr txBox="1"/>
+          <p:nvPr/>
+        </p:nvSpPr>
+        <p:spPr>
+          <a:xfrm>
+            <a:off x="1428750" y="5238750"/>
+            <a:ext cx="419100" cy="304800"/>
           </a:xfrm>
           <a:prstGeom prst="rect">
             <a:avLst/>
@@ -14423,35 +16838,35 @@
           </a:bodyPr>
           <a:lstStyle/>
           <a:p>
-            <a:pPr algn="r">
+            <a:pPr algn="ctr">
               <a:lnSpc>
                 <a:spcPct val="100000"/>
               </a:lnSpc>
             </a:pPr>
             <a:r>
-              <a:rPr sz="2550" b="1">
-                <a:solidFill>
-                  <a:srgbClr val="E4EBF4"/>
-                </a:solidFill>
-                <a:latin typeface="Pretendard"/>
-                <a:ea typeface="Pretendard"/>
-                <a:cs typeface="Pretendard"/>
-              </a:rPr>
-              <a:t>03</a:t>
-            </a:r>
-          </a:p>
-        </p:txBody>
-      </p:sp>
-      <p:sp>
-        <p:nvSpPr>
-          <p:cNvPr id="19" name="TextBox 18"/>
-          <p:cNvSpPr txBox="1"/>
-          <p:nvPr/>
-        </p:nvSpPr>
-        <p:spPr>
-          <a:xfrm>
-            <a:off x="9658350" y="3752850"/>
-            <a:ext cx="3067050" cy="1828800"/>
+              <a:rPr sz="1875" b="1">
+                <a:solidFill>
+                  <a:srgbClr val="FFFFFF"/>
+                </a:solidFill>
+                <a:latin typeface="Pretendard"/>
+                <a:ea typeface="Pretendard"/>
+                <a:cs typeface="Pretendard"/>
+              </a:rPr>
+              <a:t>3</a:t>
+            </a:r>
+          </a:p>
+        </p:txBody>
+      </p:sp>
+      <p:sp>
+        <p:nvSpPr>
+          <p:cNvPr id="22" name="TextBox 21"/>
+          <p:cNvSpPr txBox="1"/>
+          <p:nvPr/>
+        </p:nvSpPr>
+        <p:spPr>
+          <a:xfrm>
+            <a:off x="2057400" y="5025390"/>
+            <a:ext cx="14763750" cy="712470"/>
           </a:xfrm>
           <a:prstGeom prst="rect">
             <a:avLst/>
@@ -14466,11 +16881,11 @@
           <a:p>
             <a:pPr>
               <a:lnSpc>
-                <a:spcPct val="115000"/>
-              </a:lnSpc>
-            </a:pPr>
-            <a:r>
-              <a:rPr sz="2700" b="1">
+                <a:spcPct val="120000"/>
+              </a:lnSpc>
+            </a:pPr>
+            <a:r>
+              <a:rPr sz="2175" b="1">
                 <a:solidFill>
                   <a:srgbClr val="0D2B5E"/>
                 </a:solidFill>
@@ -14478,20 +16893,20 @@
                 <a:ea typeface="Pretendard"/>
                 <a:cs typeface="Pretendard"/>
               </a:rPr>
-              <a:t>products 를 크게</a:t>
+              <a:t>F.col 없이 문자열로 써도 되나요?</a:t>
             </a:r>
           </a:p>
           <a:p>
             <a:pPr>
               <a:lnSpc>
-                <a:spcPct val="146000"/>
+                <a:spcPct val="130000"/>
               </a:lnSpc>
               <a:spcBef>
-                <a:spcPts val="1050"/>
+                <a:spcPts val="300"/>
               </a:spcBef>
             </a:pPr>
             <a:r>
-              <a:rPr sz="2025" b="0">
+              <a:rPr sz="1875" b="0">
                 <a:solidFill>
                   <a:srgbClr val="3D3D3D"/>
                 </a:solidFill>
@@ -14499,43 +16914,25 @@
                 <a:ea typeface="Pretendard"/>
                 <a:cs typeface="Pretendard"/>
               </a:rPr>
-              <a:t>Broadcast →</a:t>
-            </a:r>
-          </a:p>
-          <a:p>
-            <a:pPr>
-              <a:lnSpc>
-                <a:spcPct val="146000"/>
-              </a:lnSpc>
-            </a:pPr>
-            <a:r>
-              <a:rPr sz="2025" b="0">
-                <a:solidFill>
-                  <a:srgbClr val="3D3D3D"/>
-                </a:solidFill>
-                <a:latin typeface="Pretendard"/>
-                <a:ea typeface="Pretendard"/>
-                <a:cs typeface="Pretendard"/>
-              </a:rPr>
-              <a:t>SortMerge 지점</a:t>
-            </a:r>
-          </a:p>
-        </p:txBody>
-      </p:sp>
-      <p:sp>
-        <p:nvSpPr>
-          <p:cNvPr id="20" name="Rounded Rectangle 19"/>
-          <p:cNvSpPr/>
-          <p:nvPr/>
-        </p:nvSpPr>
-        <p:spPr>
-          <a:xfrm>
-            <a:off x="13430250" y="3429000"/>
-            <a:ext cx="3714750" cy="2476500"/>
+              <a:t>간단한 조건은 된다 — 이름에 공백이 있거나 복잡한 식에서는 F.col 이 안전</a:t>
+            </a:r>
+          </a:p>
+        </p:txBody>
+      </p:sp>
+      <p:sp>
+        <p:nvSpPr>
+          <p:cNvPr id="23" name="Rounded Rectangle 22"/>
+          <p:cNvSpPr/>
+          <p:nvPr/>
+        </p:nvSpPr>
+        <p:spPr>
+          <a:xfrm>
+            <a:off x="1143000" y="5966460"/>
+            <a:ext cx="16002000" cy="902970"/>
           </a:xfrm>
           <a:prstGeom prst="roundRect">
             <a:avLst>
-              <a:gd name="adj" fmla="val 1923"/>
+              <a:gd name="adj" fmla="val 5274"/>
             </a:avLst>
           </a:prstGeom>
           <a:solidFill>
@@ -14558,14 +16955,14 @@
       </p:sp>
       <p:sp>
         <p:nvSpPr>
-          <p:cNvPr id="21" name="Rectangle 20"/>
-          <p:cNvSpPr/>
-          <p:nvPr/>
-        </p:nvSpPr>
-        <p:spPr>
-          <a:xfrm>
-            <a:off x="13430250" y="3429000"/>
-            <a:ext cx="3714750" cy="47625"/>
+          <p:cNvPr id="24" name="Rectangle 23"/>
+          <p:cNvSpPr/>
+          <p:nvPr/>
+        </p:nvSpPr>
+        <p:spPr>
+          <a:xfrm>
+            <a:off x="1143000" y="5966460"/>
+            <a:ext cx="47625" cy="902970"/>
           </a:xfrm>
           <a:prstGeom prst="rect">
             <a:avLst/>
@@ -14588,141 +16985,20 @@
       </p:sp>
       <p:sp>
         <p:nvSpPr>
-          <p:cNvPr id="22" name="TextBox 21"/>
-          <p:cNvSpPr txBox="1"/>
-          <p:nvPr/>
-        </p:nvSpPr>
-        <p:spPr>
-          <a:xfrm>
-            <a:off x="16287750" y="3638550"/>
-            <a:ext cx="590550" cy="400050"/>
-          </a:xfrm>
-          <a:prstGeom prst="rect">
-            <a:avLst/>
-          </a:prstGeom>
-          <a:noFill/>
-        </p:spPr>
-        <p:txBody>
-          <a:bodyPr wrap="square" lIns="0" rIns="0" tIns="0" bIns="0" anchor="t">
-            <a:spAutoFit/>
-          </a:bodyPr>
-          <a:lstStyle/>
-          <a:p>
-            <a:pPr algn="r">
-              <a:lnSpc>
-                <a:spcPct val="100000"/>
-              </a:lnSpc>
-            </a:pPr>
-            <a:r>
-              <a:rPr sz="2550" b="1">
-                <a:solidFill>
-                  <a:srgbClr val="E4EBF4"/>
-                </a:solidFill>
-                <a:latin typeface="Pretendard"/>
-                <a:ea typeface="Pretendard"/>
-                <a:cs typeface="Pretendard"/>
-              </a:rPr>
-              <a:t>04</a:t>
-            </a:r>
-          </a:p>
-        </p:txBody>
-      </p:sp>
-      <p:sp>
-        <p:nvSpPr>
-          <p:cNvPr id="23" name="TextBox 22"/>
-          <p:cNvSpPr txBox="1"/>
-          <p:nvPr/>
-        </p:nvSpPr>
-        <p:spPr>
-          <a:xfrm>
-            <a:off x="13754100" y="3752850"/>
-            <a:ext cx="3067050" cy="1828800"/>
-          </a:xfrm>
-          <a:prstGeom prst="rect">
-            <a:avLst/>
-          </a:prstGeom>
-          <a:noFill/>
-        </p:spPr>
-        <p:txBody>
-          <a:bodyPr wrap="square" lIns="0" rIns="0" tIns="0" bIns="0" anchor="ctr">
-            <a:spAutoFit/>
-          </a:bodyPr>
-          <a:lstStyle/>
-          <a:p>
-            <a:pPr>
-              <a:lnSpc>
-                <a:spcPct val="115000"/>
-              </a:lnSpc>
-            </a:pPr>
-            <a:r>
-              <a:rPr sz="2700" b="1">
-                <a:solidFill>
-                  <a:srgbClr val="0D2B5E"/>
-                </a:solidFill>
-                <a:latin typeface="Pretendard"/>
-                <a:ea typeface="Pretendard"/>
-                <a:cs typeface="Pretendard"/>
-              </a:rPr>
-              <a:t>5-3 의 orders</a:t>
-            </a:r>
-          </a:p>
-          <a:p>
-            <a:pPr>
-              <a:lnSpc>
-                <a:spcPct val="146000"/>
-              </a:lnSpc>
-              <a:spcBef>
-                <a:spcPts val="1050"/>
-              </a:spcBef>
-            </a:pPr>
-            <a:r>
-              <a:rPr sz="2025" b="0">
-                <a:solidFill>
-                  <a:srgbClr val="3D3D3D"/>
-                </a:solidFill>
-                <a:latin typeface="Pretendard"/>
-                <a:ea typeface="Pretendard"/>
-                <a:cs typeface="Pretendard"/>
-              </a:rPr>
-              <a:t>lake.db.orders 를</a:t>
-            </a:r>
-          </a:p>
-          <a:p>
-            <a:pPr>
-              <a:lnSpc>
-                <a:spcPct val="146000"/>
-              </a:lnSpc>
-            </a:pPr>
-            <a:r>
-              <a:rPr sz="2025" b="0">
-                <a:solidFill>
-                  <a:srgbClr val="3D3D3D"/>
-                </a:solidFill>
-                <a:latin typeface="Pretendard"/>
-                <a:ea typeface="Pretendard"/>
-                <a:cs typeface="Pretendard"/>
-              </a:rPr>
-              <a:t>오늘 방식으로</a:t>
-            </a:r>
-          </a:p>
-        </p:txBody>
-      </p:sp>
-      <p:sp>
-        <p:nvSpPr>
-          <p:cNvPr id="24" name="Rectangle 23"/>
-          <p:cNvSpPr/>
-          <p:nvPr/>
-        </p:nvSpPr>
-        <p:spPr>
-          <a:xfrm>
-            <a:off x="1143000" y="6496050"/>
-            <a:ext cx="47625" cy="723900"/>
-          </a:xfrm>
-          <a:prstGeom prst="rect">
-            <a:avLst/>
-          </a:prstGeom>
-          <a:solidFill>
-            <a:srgbClr val="1E5BC6"/>
+          <p:cNvPr id="25" name="Oval 24"/>
+          <p:cNvSpPr/>
+          <p:nvPr/>
+        </p:nvSpPr>
+        <p:spPr>
+          <a:xfrm>
+            <a:off x="1428750" y="6208395"/>
+            <a:ext cx="419100" cy="419100"/>
+          </a:xfrm>
+          <a:prstGeom prst="ellipse">
+            <a:avLst/>
+          </a:prstGeom>
+          <a:solidFill>
+            <a:srgbClr val="0D2B5E"/>
           </a:solidFill>
           <a:ln>
             <a:noFill/>
@@ -14739,14 +17015,14 @@
       </p:sp>
       <p:sp>
         <p:nvSpPr>
-          <p:cNvPr id="25" name="TextBox 24"/>
-          <p:cNvSpPr txBox="1"/>
-          <p:nvPr/>
-        </p:nvSpPr>
-        <p:spPr>
-          <a:xfrm>
-            <a:off x="1390650" y="6553200"/>
-            <a:ext cx="15754350" cy="762000"/>
+          <p:cNvPr id="26" name="TextBox 25"/>
+          <p:cNvSpPr txBox="1"/>
+          <p:nvPr/>
+        </p:nvSpPr>
+        <p:spPr>
+          <a:xfrm>
+            <a:off x="1428750" y="6275070"/>
+            <a:ext cx="419100" cy="304800"/>
           </a:xfrm>
           <a:prstGeom prst="rect">
             <a:avLst/>
@@ -14759,28 +17035,287 @@
           </a:bodyPr>
           <a:lstStyle/>
           <a:p>
-            <a:pPr algn="l">
-              <a:lnSpc>
-                <a:spcPct val="150000"/>
-              </a:lnSpc>
-            </a:pPr>
-            <a:r>
-              <a:rPr sz="2025" b="1">
-                <a:solidFill>
-                  <a:srgbClr val="7D7D7D"/>
-                </a:solidFill>
-                <a:latin typeface="Pretendard"/>
-                <a:ea typeface="Pretendard"/>
-                <a:cs typeface="Pretendard"/>
-              </a:rPr>
-              <a:t>수만 행으로 키우면 조인 방식이 BroadcastHashJoin 에서 SortMergeJoin 으로 바뀌는 지점이 있다</a:t>
-            </a:r>
-          </a:p>
-        </p:txBody>
-      </p:sp>
-      <p:sp>
-        <p:nvSpPr>
-          <p:cNvPr id="26" name="Rectangle 25"/>
+            <a:pPr algn="ctr">
+              <a:lnSpc>
+                <a:spcPct val="100000"/>
+              </a:lnSpc>
+            </a:pPr>
+            <a:r>
+              <a:rPr sz="1875" b="1">
+                <a:solidFill>
+                  <a:srgbClr val="FFFFFF"/>
+                </a:solidFill>
+                <a:latin typeface="Pretendard"/>
+                <a:ea typeface="Pretendard"/>
+                <a:cs typeface="Pretendard"/>
+              </a:rPr>
+              <a:t>4</a:t>
+            </a:r>
+          </a:p>
+        </p:txBody>
+      </p:sp>
+      <p:sp>
+        <p:nvSpPr>
+          <p:cNvPr id="27" name="TextBox 26"/>
+          <p:cNvSpPr txBox="1"/>
+          <p:nvPr/>
+        </p:nvSpPr>
+        <p:spPr>
+          <a:xfrm>
+            <a:off x="2057400" y="6061710"/>
+            <a:ext cx="14763750" cy="712470"/>
+          </a:xfrm>
+          <a:prstGeom prst="rect">
+            <a:avLst/>
+          </a:prstGeom>
+          <a:noFill/>
+        </p:spPr>
+        <p:txBody>
+          <a:bodyPr wrap="square" lIns="0" rIns="0" tIns="0" bIns="0" anchor="ctr">
+            <a:spAutoFit/>
+          </a:bodyPr>
+          <a:lstStyle/>
+          <a:p>
+            <a:pPr>
+              <a:lnSpc>
+                <a:spcPct val="120000"/>
+              </a:lnSpc>
+            </a:pPr>
+            <a:r>
+              <a:rPr sz="2175" b="1">
+                <a:solidFill>
+                  <a:srgbClr val="0D2B5E"/>
+                </a:solidFill>
+                <a:latin typeface="Pretendard"/>
+                <a:ea typeface="Pretendard"/>
+                <a:cs typeface="Pretendard"/>
+              </a:rPr>
+              <a:t>Pandas 코드를 그대로 옮길 수 있나요?</a:t>
+            </a:r>
+          </a:p>
+          <a:p>
+            <a:pPr>
+              <a:lnSpc>
+                <a:spcPct val="130000"/>
+              </a:lnSpc>
+              <a:spcBef>
+                <a:spcPts val="300"/>
+              </a:spcBef>
+            </a:pPr>
+            <a:r>
+              <a:rPr sz="1875" b="0">
+                <a:solidFill>
+                  <a:srgbClr val="3D3D3D"/>
+                </a:solidFill>
+                <a:latin typeface="Pretendard"/>
+                <a:ea typeface="Pretendard"/>
+                <a:cs typeface="Pretendard"/>
+              </a:rPr>
+              <a:t>거의 — 인덱스가 없고, apply 같은 행 단위 함수는 느리니 내장 함수로</a:t>
+            </a:r>
+          </a:p>
+        </p:txBody>
+      </p:sp>
+      <p:sp>
+        <p:nvSpPr>
+          <p:cNvPr id="28" name="Rounded Rectangle 27"/>
+          <p:cNvSpPr/>
+          <p:nvPr/>
+        </p:nvSpPr>
+        <p:spPr>
+          <a:xfrm>
+            <a:off x="1143000" y="7002780"/>
+            <a:ext cx="16002000" cy="902970"/>
+          </a:xfrm>
+          <a:prstGeom prst="roundRect">
+            <a:avLst>
+              <a:gd name="adj" fmla="val 5274"/>
+            </a:avLst>
+          </a:prstGeom>
+          <a:solidFill>
+            <a:srgbClr val="FAFBFD"/>
+          </a:solidFill>
+          <a:ln w="9525">
+            <a:solidFill>
+              <a:srgbClr val="DCE1E8"/>
+            </a:solidFill>
+          </a:ln>
+          <a:effectLst/>
+        </p:spPr>
+        <p:txBody>
+          <a:bodyPr rtlCol="0" anchor="ctr" wrap="square"/>
+          <a:lstStyle/>
+          <a:p>
+            <a:pPr algn="ctr"/>
+          </a:p>
+        </p:txBody>
+      </p:sp>
+      <p:sp>
+        <p:nvSpPr>
+          <p:cNvPr id="29" name="Rectangle 28"/>
+          <p:cNvSpPr/>
+          <p:nvPr/>
+        </p:nvSpPr>
+        <p:spPr>
+          <a:xfrm>
+            <a:off x="1143000" y="7002780"/>
+            <a:ext cx="47625" cy="902970"/>
+          </a:xfrm>
+          <a:prstGeom prst="rect">
+            <a:avLst/>
+          </a:prstGeom>
+          <a:solidFill>
+            <a:srgbClr val="1E5BC6"/>
+          </a:solidFill>
+          <a:ln>
+            <a:noFill/>
+          </a:ln>
+          <a:effectLst/>
+        </p:spPr>
+        <p:txBody>
+          <a:bodyPr rtlCol="0" anchor="ctr" wrap="square"/>
+          <a:lstStyle/>
+          <a:p>
+            <a:pPr algn="ctr"/>
+          </a:p>
+        </p:txBody>
+      </p:sp>
+      <p:sp>
+        <p:nvSpPr>
+          <p:cNvPr id="30" name="Oval 29"/>
+          <p:cNvSpPr/>
+          <p:nvPr/>
+        </p:nvSpPr>
+        <p:spPr>
+          <a:xfrm>
+            <a:off x="1428750" y="7244715"/>
+            <a:ext cx="419100" cy="419100"/>
+          </a:xfrm>
+          <a:prstGeom prst="ellipse">
+            <a:avLst/>
+          </a:prstGeom>
+          <a:solidFill>
+            <a:srgbClr val="0D2B5E"/>
+          </a:solidFill>
+          <a:ln>
+            <a:noFill/>
+          </a:ln>
+          <a:effectLst/>
+        </p:spPr>
+        <p:txBody>
+          <a:bodyPr rtlCol="0" anchor="ctr" wrap="square"/>
+          <a:lstStyle/>
+          <a:p>
+            <a:pPr algn="ctr"/>
+          </a:p>
+        </p:txBody>
+      </p:sp>
+      <p:sp>
+        <p:nvSpPr>
+          <p:cNvPr id="31" name="TextBox 30"/>
+          <p:cNvSpPr txBox="1"/>
+          <p:nvPr/>
+        </p:nvSpPr>
+        <p:spPr>
+          <a:xfrm>
+            <a:off x="1428750" y="7311390"/>
+            <a:ext cx="419100" cy="304800"/>
+          </a:xfrm>
+          <a:prstGeom prst="rect">
+            <a:avLst/>
+          </a:prstGeom>
+          <a:noFill/>
+        </p:spPr>
+        <p:txBody>
+          <a:bodyPr wrap="square" lIns="0" rIns="0" tIns="0" bIns="0" anchor="t">
+            <a:spAutoFit/>
+          </a:bodyPr>
+          <a:lstStyle/>
+          <a:p>
+            <a:pPr algn="ctr">
+              <a:lnSpc>
+                <a:spcPct val="100000"/>
+              </a:lnSpc>
+            </a:pPr>
+            <a:r>
+              <a:rPr sz="1875" b="1">
+                <a:solidFill>
+                  <a:srgbClr val="FFFFFF"/>
+                </a:solidFill>
+                <a:latin typeface="Pretendard"/>
+                <a:ea typeface="Pretendard"/>
+                <a:cs typeface="Pretendard"/>
+              </a:rPr>
+              <a:t>5</a:t>
+            </a:r>
+          </a:p>
+        </p:txBody>
+      </p:sp>
+      <p:sp>
+        <p:nvSpPr>
+          <p:cNvPr id="32" name="TextBox 31"/>
+          <p:cNvSpPr txBox="1"/>
+          <p:nvPr/>
+        </p:nvSpPr>
+        <p:spPr>
+          <a:xfrm>
+            <a:off x="2057400" y="7098030"/>
+            <a:ext cx="14763750" cy="712470"/>
+          </a:xfrm>
+          <a:prstGeom prst="rect">
+            <a:avLst/>
+          </a:prstGeom>
+          <a:noFill/>
+        </p:spPr>
+        <p:txBody>
+          <a:bodyPr wrap="square" lIns="0" rIns="0" tIns="0" bIns="0" anchor="ctr">
+            <a:spAutoFit/>
+          </a:bodyPr>
+          <a:lstStyle/>
+          <a:p>
+            <a:pPr>
+              <a:lnSpc>
+                <a:spcPct val="120000"/>
+              </a:lnSpc>
+            </a:pPr>
+            <a:r>
+              <a:rPr sz="2175" b="1">
+                <a:solidFill>
+                  <a:srgbClr val="0D2B5E"/>
+                </a:solidFill>
+                <a:latin typeface="Pretendard"/>
+                <a:ea typeface="Pretendard"/>
+                <a:cs typeface="Pretendard"/>
+              </a:rPr>
+              <a:t>products 는 세 줄인데 왜 Broadcast 가 아닌가요?</a:t>
+            </a:r>
+          </a:p>
+          <a:p>
+            <a:pPr>
+              <a:lnSpc>
+                <a:spcPct val="130000"/>
+              </a:lnSpc>
+              <a:spcBef>
+                <a:spcPts val="300"/>
+              </a:spcBef>
+            </a:pPr>
+            <a:r>
+              <a:rPr sz="1875" b="0">
+                <a:solidFill>
+                  <a:srgbClr val="3D3D3D"/>
+                </a:solidFill>
+                <a:latin typeface="Pretendard"/>
+                <a:ea typeface="Pretendard"/>
+                <a:cs typeface="Pretendard"/>
+              </a:rPr>
+              <a:t>추정 크기로 고른다 — createDataFrame 표는 크기를 몰라 F.broadcast 나 Iceberg 로</a:t>
+            </a:r>
+          </a:p>
+        </p:txBody>
+      </p:sp>
+      <p:sp>
+        <p:nvSpPr>
+          <p:cNvPr id="33" name="Rectangle 32"/>
           <p:cNvSpPr/>
           <p:nvPr/>
         </p:nvSpPr>
@@ -14810,7 +17345,7 @@
       </p:sp>
       <p:sp>
         <p:nvSpPr>
-          <p:cNvPr id="27" name="TextBox 26"/>
+          <p:cNvPr id="34" name="TextBox 33"/>
           <p:cNvSpPr txBox="1"/>
           <p:nvPr/>
         </p:nvSpPr>
@@ -14851,7 +17386,7 @@
       </p:sp>
       <p:sp>
         <p:nvSpPr>
-          <p:cNvPr id="28" name="TextBox 27"/>
+          <p:cNvPr id="35" name="TextBox 34"/>
           <p:cNvSpPr txBox="1"/>
           <p:nvPr/>
         </p:nvSpPr>
@@ -14910,7 +17445,7 @@
       <p:grpSpPr/>
       <p:sp>
         <p:nvSpPr>
-          <p:cNvPr id="2" name="Oval 1"/>
+          <p:cNvPr id="2" name="deckgen:decor"/>
           <p:cNvSpPr/>
           <p:nvPr/>
         </p:nvSpPr>
@@ -14940,7 +17475,7 @@
       </p:sp>
       <p:sp>
         <p:nvSpPr>
-          <p:cNvPr id="3" name="Oval 2"/>
+          <p:cNvPr id="3" name="deckgen:decor"/>
           <p:cNvSpPr/>
           <p:nvPr/>
         </p:nvSpPr>
@@ -14970,7 +17505,7 @@
       </p:sp>
       <p:sp>
         <p:nvSpPr>
-          <p:cNvPr id="4" name="Oval 3"/>
+          <p:cNvPr id="4" name="deckgen:decor"/>
           <p:cNvSpPr/>
           <p:nvPr/>
         </p:nvSpPr>
@@ -15034,7 +17569,7 @@
                 <a:ea typeface="Pretendard"/>
                 <a:cs typeface="Pretendard"/>
               </a:rPr>
-              <a:t>다음 회차 예고</a:t>
+              <a:t>심화 과제 (선택)</a:t>
             </a:r>
           </a:p>
         </p:txBody>
@@ -15075,7 +17610,7 @@
                 <a:ea typeface="Pretendard"/>
                 <a:cs typeface="Pretendard"/>
               </a:rPr>
-              <a:t>5-5 · 파티셔닝과 셔플링 최적화</a:t>
+              <a:t>더 해 볼 것 넷 — 5-5 예습</a:t>
             </a:r>
           </a:p>
         </p:txBody>
@@ -15176,7 +17711,7 @@
       </p:sp>
       <p:sp>
         <p:nvSpPr>
-          <p:cNvPr id="10" name="TextBox 9"/>
+          <p:cNvPr id="10" name="deckgen:ornament"/>
           <p:cNvSpPr txBox="1"/>
           <p:nvPr/>
         </p:nvSpPr>
@@ -15251,7 +17786,7 @@
                 <a:ea typeface="Pretendard"/>
                 <a:cs typeface="Pretendard"/>
               </a:rPr>
-              <a:t>이론 1H</a:t>
+              <a:t>날짜별 매출 두 방식</a:t>
             </a:r>
           </a:p>
           <a:p>
@@ -15272,7 +17807,7 @@
                 <a:ea typeface="Pretendard"/>
                 <a:cs typeface="Pretendard"/>
               </a:rPr>
-              <a:t>파티셔닝과</a:t>
+              <a:t>API · SQL</a:t>
             </a:r>
           </a:p>
           <a:p>
@@ -15290,7 +17825,7 @@
                 <a:ea typeface="Pretendard"/>
                 <a:cs typeface="Pretendard"/>
               </a:rPr>
-              <a:t>셔플링 원리</a:t>
+              <a:t>결과 대조</a:t>
             </a:r>
           </a:p>
         </p:txBody>
@@ -15361,7 +17896,7 @@
       </p:sp>
       <p:sp>
         <p:nvSpPr>
-          <p:cNvPr id="14" name="TextBox 13"/>
+          <p:cNvPr id="14" name="deckgen:ornament"/>
           <p:cNvSpPr txBox="1"/>
           <p:nvPr/>
         </p:nvSpPr>
@@ -15436,7 +17971,7 @@
                 <a:ea typeface="Pretendard"/>
                 <a:cs typeface="Pretendard"/>
               </a:rPr>
-              <a:t>실습 1.5H</a:t>
+              <a:t>Spark UI 그래프</a:t>
             </a:r>
           </a:p>
           <a:p>
@@ -15457,7 +17992,7 @@
                 <a:ea typeface="Pretendard"/>
                 <a:cs typeface="Pretendard"/>
               </a:rPr>
-              <a:t>repartition·</a:t>
+              <a:t>SQL 탭에서</a:t>
             </a:r>
           </a:p>
           <a:p>
@@ -15475,7 +18010,7 @@
                 <a:ea typeface="Pretendard"/>
                 <a:cs typeface="Pretendard"/>
               </a:rPr>
-              <a:t>coalesce 셔플</a:t>
+              <a:t>Exchange 찾기</a:t>
             </a:r>
           </a:p>
         </p:txBody>
@@ -15497,11 +18032,11 @@
             </a:avLst>
           </a:prstGeom>
           <a:solidFill>
-            <a:srgbClr val="0D2B5E"/>
+            <a:srgbClr val="FAFBFD"/>
           </a:solidFill>
           <a:ln w="9525">
             <a:solidFill>
-              <a:srgbClr val="0D2B5E"/>
+              <a:srgbClr val="DCE1E8"/>
             </a:solidFill>
           </a:ln>
           <a:effectLst/>
@@ -15546,7 +18081,7 @@
       </p:sp>
       <p:sp>
         <p:nvSpPr>
-          <p:cNvPr id="18" name="TextBox 17"/>
+          <p:cNvPr id="18" name="deckgen:ornament"/>
           <p:cNvSpPr txBox="1"/>
           <p:nvPr/>
         </p:nvSpPr>
@@ -15574,7 +18109,7 @@
             <a:r>
               <a:rPr sz="2550" b="1">
                 <a:solidFill>
-                  <a:srgbClr val="3B4B7C"/>
+                  <a:srgbClr val="E4EBF4"/>
                 </a:solidFill>
                 <a:latin typeface="Pretendard"/>
                 <a:ea typeface="Pretendard"/>
@@ -15615,13 +18150,13 @@
             <a:r>
               <a:rPr sz="2700" b="1">
                 <a:solidFill>
-                  <a:srgbClr val="FFFFFF"/>
-                </a:solidFill>
-                <a:latin typeface="Pretendard"/>
-                <a:ea typeface="Pretendard"/>
-                <a:cs typeface="Pretendard"/>
-              </a:rPr>
-              <a:t>실습 1H</a:t>
+                  <a:srgbClr val="0D2B5E"/>
+                </a:solidFill>
+                <a:latin typeface="Pretendard"/>
+                <a:ea typeface="Pretendard"/>
+                <a:cs typeface="Pretendard"/>
+              </a:rPr>
+              <a:t>products 를 크게</a:t>
             </a:r>
           </a:p>
           <a:p>
@@ -15636,13 +18171,13 @@
             <a:r>
               <a:rPr sz="2025" b="0">
                 <a:solidFill>
-                  <a:srgbClr val="D9E2F0"/>
-                </a:solidFill>
-                <a:latin typeface="Pretendard"/>
-                <a:ea typeface="Pretendard"/>
-                <a:cs typeface="Pretendard"/>
-              </a:rPr>
-              <a:t>배치 스크립트로</a:t>
+                  <a:srgbClr val="3D3D3D"/>
+                </a:solidFill>
+                <a:latin typeface="Pretendard"/>
+                <a:ea typeface="Pretendard"/>
+                <a:cs typeface="Pretendard"/>
+              </a:rPr>
+              <a:t>spark.range 1만·10만</a:t>
             </a:r>
           </a:p>
           <a:p>
@@ -15654,13 +18189,13 @@
             <a:r>
               <a:rPr sz="2025" b="0">
                 <a:solidFill>
-                  <a:srgbClr val="D9E2F0"/>
-                </a:solidFill>
-                <a:latin typeface="Pretendard"/>
-                <a:ea typeface="Pretendard"/>
-                <a:cs typeface="Pretendard"/>
-              </a:rPr>
-              <a:t>데이터 마트 산출</a:t>
+                  <a:srgbClr val="3D3D3D"/>
+                </a:solidFill>
+                <a:latin typeface="Pretendard"/>
+                <a:ea typeface="Pretendard"/>
+                <a:cs typeface="Pretendard"/>
+              </a:rPr>
+              <a:t>BHJ · 100만 SMJ</a:t>
             </a:r>
           </a:p>
         </p:txBody>
@@ -15731,7 +18266,7 @@
       </p:sp>
       <p:sp>
         <p:nvSpPr>
-          <p:cNvPr id="22" name="TextBox 21"/>
+          <p:cNvPr id="22" name="deckgen:ornament"/>
           <p:cNvSpPr txBox="1"/>
           <p:nvPr/>
         </p:nvSpPr>
@@ -15806,7 +18341,7 @@
                 <a:ea typeface="Pretendard"/>
                 <a:cs typeface="Pretendard"/>
               </a:rPr>
-              <a:t>정리 0.5H</a:t>
+              <a:t>5-3 의 orders</a:t>
             </a:r>
           </a:p>
           <a:p>
@@ -15827,7 +18362,7 @@
                 <a:ea typeface="Pretendard"/>
                 <a:cs typeface="Pretendard"/>
               </a:rPr>
-              <a:t>정리·회고</a:t>
+              <a:t>item = name left</a:t>
             </a:r>
           </a:p>
           <a:p>
@@ -15845,7 +18380,7 @@
                 <a:ea typeface="Pretendard"/>
                 <a:cs typeface="Pretendard"/>
               </a:rPr>
-              <a:t>산출물 점검</a:t>
+              <a:t>webcam 은 NULL</a:t>
             </a:r>
           </a:p>
         </p:txBody>
@@ -15916,7 +18451,7 @@
                 <a:ea typeface="Pretendard"/>
                 <a:cs typeface="Pretendard"/>
               </a:rPr>
-              <a:t>준비: 5-3~5-4 compose(스파크 클러스터 + MinIO) · lake.db.orders · product_sales — 배치 스크립트와 마트 테이블이 주차 산출물</a:t>
+              <a:t>spark.range 표는 크기를 계산할 수 있다 — 1만·10만 행 BroadcastHashJoin, 100만 행 SortMergeJoin(실측)</a:t>
             </a:r>
           </a:p>
         </p:txBody>
